--- a/deck/QuickBite_Submission_Deck_NexMind_v2.pptx
+++ b/deck/QuickBite_Submission_Deck_NexMind_v2.pptx
@@ -2636,23 +2636,32 @@
           <a:lstStyle/>
           <a:p>
             <a:r>
-              <a:t>No custom server. The caller app talks to Gemini Live directly through Firebase AI Logic with App Check (reCAPTCHA Enterprise), so no API key ships in the web app. Every tool call is executed in the app and written to Cloud Firestore (asia-south1) through one shared incident client used by web, Android and the eval harness. The responder console is a separate React app that subscribes with Firestore realtime listeners, so fields appear on screen as they are written: the realtime channel IS the database.</a:t>
-            </a:r>
-          </a:p>
-          <a:p>
-            <a:endParaRPr/>
-          </a:p>
-          <a:p>
-            <a:r>
-              <a:t>Media: live video and listen-in are peer-to-peer WebRTC (Firestore carries only the handshake, Google STUN). Recordings go to Google Drive through an Apps Script web app; the case-report email (with PDF and scene sketch) and trusted-contact alerts use Apps Script mail. Location: GPS with IP fallback; Nominatim/Photon geocoding; OSRM routing.</a:t>
-            </a:r>
-          </a:p>
-          <a:p>
-            <a:endParaRPr/>
-          </a:p>
-          <a:p>
-            <a:r>
-              <a:t>Model choice is per task (shared/aiModels.ts): the smallest model that does each job. Free-tier key first, paid key only on quota errors. Planned: a Cloud Run backend with ADK agents for dispatch and verification (dashed box), which also moves the remaining keys server-side.</a:t>
+              <a:rPr lang="en-US" dirty="0"/>
+              <a:t>The backend is managed Firebase (Firestore, Auth, security rules). The QuickBite web app talks to Gemini Live directly over a WebSocket: the phone streams 16 kHz audio and a low-resolution camera frame every 2 seconds, and Mia answers by voice and with function calls.</a:t>
+            </a:r>
+          </a:p>
+          <a:p>
+            <a:r>
+              <a:rPr lang="en-US" dirty="0"/>
+              <a:t>The phone runs every tool call itself (severity rules, geocoding, routing) and writes the result to Cloud Firestore through one shared incident client, so the incident exists the moment a call starts and fills in field by field. The responder console is a separate React app that subscribes with Firestore realtime listeners; acknowledgements, notes and messages are written back the same way, and Mia relays messages as delivery chat.</a:t>
+            </a:r>
+          </a:p>
+          <a:p>
+            <a:r>
+              <a:rPr lang="en-US" dirty="0"/>
+              <a:t>After the call, the phone sends one request to gemini-3.5-flash-lite for the case summary, dispatch bulletin and third-party redactions, and gemini-3.1-flash-lite links the case to recent ones. The console uses gemini-3.1-flash-lite for Ask AI search, credibility checks and insights.</a:t>
+            </a:r>
+          </a:p>
+          <a:p>
+            <a:r>
+              <a:rPr lang="en-US" dirty="0"/>
+              <a:t>The full architecture documentation (overview, live-call sequence, Gemini agent loop, data and security, deployment) is linked at the bottom of the slide: https://github.com/Jeevanvsan/ai_builder_hack/tree/main/covert_call/docs/architecture#readme</a:t>
+            </a:r>
+          </a:p>
+          <a:p>
+            <a:r>
+              <a:rPr lang="en-US" dirty="0"/>
+              <a:t>Around that core: Apps Script stores recordings in Google Drive and sends the case-report email and trusted-contact alerts; GPS with an IP fallback, Nominatim and Photon geocoding and OSRM routing handle location; live video and listen-in are peer-to-peer WebRTC, with Firestore carrying only the handshake. Gemini keys use the free tier first and a paid key on quota errors, and token usage is recorded on every incident.</a:t>
             </a:r>
           </a:p>
         </p:txBody>
@@ -2749,23 +2758,38 @@
           <a:lstStyle/>
           <a:p>
             <a:r>
-              <a:t>This is the technical core. During a call the phone streams 16 kHz PCM audio and low-resolution camera frames (0.5 fps) into a Gemini Live session (gemini-3.8-live) running Mia's persona. Mia never 'chats': every fact she learns comes out as one of 12 function calls (report_situation, confirm_address, report_stress_level, report_scene_observation, report_vehicle_number, report_coercion_signal, get_route_guidance, and more). The app executes them: severity is computed by deterministic rules, addresses are geocoded, routes come from OSRM with landmarks; everything is written to Firestore and appears on the console instantly. Tool responses carry known facts, the next route turn and any responder message back into the conversation.</a:t>
-            </a:r>
-          </a:p>
-          <a:p>
-            <a:endParaRPr/>
-          </a:p>
-          <a:p>
-            <a:r>
-              <a:t>Engineering that made it reliable: record-only tools are answered SILENT and only one response per batch is allowed to trigger Mia's next reply (this cut model inferences from ~22 to 5 for a 4-turn test call); session resumption and sliding-window compression keep video calls alive past the session cap; silence/reply watchdogs and a 6-second routing budget mean Mia never goes quiet on a frightened caller.</a:t>
-            </a:r>
-          </a:p>
-          <a:p>
-            <a:endParaRPr/>
-          </a:p>
-          <a:p>
-            <a:r>
-              <a:t>After the call: 3.5 Flash-Lite writes the case summary with confidence per field and redacts third-party personal details in the same structured request; 3.1 Flash-Lite links the case to recent incidents. Every request records token usage on the incident, and a 17-scenario evaluation harness tests the real persona and tools end to end.</a:t>
+              <a:rPr lang="en-US" dirty="0"/>
+              <a:t>Follow one answer through the system. Mia offers a food choice and says its real meaning in the same breath: garlic bread means someone is following you. The caller says "Yes, garlic bread, please."</a:t>
+            </a:r>
+          </a:p>
+          <a:p>
+            <a:r>
+              <a:rPr lang="en-US" dirty="0"/>
+              <a:t>Gemini Live (gemini-3.8-live) hears the voice, and a camera frame every 2 seconds, and does not reply in free text. It calls a function, report_situation, with the danger tag "being followed or chased" and urgency high.</a:t>
+            </a:r>
+          </a:p>
+          <a:p>
+            <a:r>
+              <a:rPr lang="en-US" dirty="0"/>
+              <a:t>The phone executes it. Severity comes from a rule in code, not from the model: urgency high means severity HIGH. A tag that says the caller is followed marks them as moving, so the app starts a route to the nearest police station as soon as their location is known.</a:t>
+            </a:r>
+          </a:p>
+          <a:p>
+            <a:r>
+              <a:rPr lang="en-US" dirty="0"/>
+              <a:t>The result is written to Firestore, and the responder console shows the danger tag, the HIGH chip and the route through its realtime listener. On 8 real calls the danger tag reached the console 2 to 3.5 seconds before the caller's words were transcribed.</a:t>
+            </a:r>
+          </a:p>
+          <a:p>
+            <a:r>
+              <a:rPr lang="en-US" dirty="0"/>
+              <a:t>The tool response goes back to Mia carrying what is now known, so she asks only what is still missing, usually the location, and relays each turn of the route. The loop repeats for every answer.</a:t>
+            </a:r>
+          </a:p>
+          <a:p>
+            <a:r>
+              <a:rPr lang="en-US" dirty="0"/>
+              <a:t>The 12 tools fall into three groups: 8 report what she learns and are answered silently, 3 act for the caller (confirm the address, route to safety, email the case report), and 1 ends the call after the goodbye. Reliability comes from code around the model: one reply per tool batch, silence and reply watchdogs, a 6 second route budget, session resumption with context compression, and smaller Flash-Lite models after the call.</a:t>
             </a:r>
           </a:p>
         </p:txBody>
@@ -24049,58 +24073,225 @@
                 </a:solidFill>
                 <a:latin typeface="Arial"/>
               </a:rPr>
-              <a:t>Serverless by design: the phone, Gemini and Firestore do all the work</a:t>
-            </a:r>
-          </a:p>
-        </p:txBody>
-      </p:sp>
-      <p:sp>
-        <p:nvSpPr>
-          <p:cNvPr id="113" name="TextBox 112"/>
+              <a:t>Firebase backend: the phone, Gemini and Firestore do all the work</a:t>
+            </a:r>
+          </a:p>
+        </p:txBody>
+      </p:sp>
+      <p:sp>
+        <p:nvSpPr>
+          <p:cNvPr id="300" name="Header: caller"/>
           <p:cNvSpPr txBox="1"/>
           <p:nvPr/>
         </p:nvSpPr>
         <p:spPr>
           <a:xfrm>
             <a:off x="365760" y="1325880"/>
-            <a:ext cx="1965960" cy="201168"/>
+            <a:ext cx="1783080" cy="164592"/>
           </a:xfrm>
           <a:prstGeom prst="rect">
             <a:avLst/>
           </a:prstGeom>
           <a:noFill/>
-        </p:spPr>
-        <p:txBody>
-          <a:bodyPr wrap="square" lIns="0" tIns="0" rIns="0" bIns="0" anchor="t"/>
-          <a:lstStyle/>
-          <a:p>
-            <a:pPr algn="l"/>
-            <a:r>
-              <a:rPr sz="800" b="1" i="0">
+          <a:ln>
+            <a:noFill/>
+          </a:ln>
+        </p:spPr>
+        <p:txBody>
+          <a:bodyPr wrap="square" lIns="0" tIns="0" rIns="0" bIns="0" rtlCol="0" anchor="t">
+            <a:noAutofit/>
+          </a:bodyPr>
+          <a:lstStyle/>
+          <a:p>
+            <a:pPr marL="0" indent="0" algn="l">
+              <a:lnSpc>
+                <a:spcPct val="100000"/>
+              </a:lnSpc>
+              <a:spcBef>
+                <a:spcPts val="0"/>
+              </a:spcBef>
+              <a:spcAft>
+                <a:spcPts val="0"/>
+              </a:spcAft>
+              <a:buNone/>
+            </a:pPr>
+            <a:r>
+              <a:rPr lang="en-US" sz="800" b="1" i="0" dirty="0" spc="60">
                 <a:solidFill>
                   <a:srgbClr val="E8590C"/>
                 </a:solidFill>
                 <a:latin typeface="Arial"/>
-              </a:rPr>
-              <a:t>CALLER CLIENTS</a:t>
-            </a:r>
-          </a:p>
-        </p:txBody>
-      </p:sp>
-      <p:sp>
-        <p:nvSpPr>
-          <p:cNvPr id="114" name="Rounded Rectangle 113"/>
+                <a:cs typeface="Arial"/>
+              </a:rPr>
+              <a:t>CALLER'S PHONE</a:t>
+            </a:r>
+          </a:p>
+        </p:txBody>
+      </p:sp>
+      <p:sp>
+        <p:nvSpPr>
+          <p:cNvPr id="301" name="Header: Gemini"/>
+          <p:cNvSpPr txBox="1"/>
+          <p:nvPr/>
+        </p:nvSpPr>
+        <p:spPr>
+          <a:xfrm>
+            <a:off x="2926080" y="1325880"/>
+            <a:ext cx="1645920" cy="164592"/>
+          </a:xfrm>
+          <a:prstGeom prst="rect">
+            <a:avLst/>
+          </a:prstGeom>
+          <a:noFill/>
+          <a:ln>
+            <a:noFill/>
+          </a:ln>
+        </p:spPr>
+        <p:txBody>
+          <a:bodyPr wrap="square" lIns="0" tIns="0" rIns="0" bIns="0" rtlCol="0" anchor="t">
+            <a:noAutofit/>
+          </a:bodyPr>
+          <a:lstStyle/>
+          <a:p>
+            <a:pPr marL="0" indent="0" algn="l">
+              <a:lnSpc>
+                <a:spcPct val="100000"/>
+              </a:lnSpc>
+              <a:spcBef>
+                <a:spcPts val="0"/>
+              </a:spcBef>
+              <a:spcAft>
+                <a:spcPts val="0"/>
+              </a:spcAft>
+              <a:buNone/>
+            </a:pPr>
+            <a:r>
+              <a:rPr lang="en-US" sz="800" b="1" i="0" dirty="0" spc="60">
+                <a:solidFill>
+                  <a:srgbClr val="1A73E8"/>
+                </a:solidFill>
+                <a:latin typeface="Arial"/>
+                <a:cs typeface="Arial"/>
+              </a:rPr>
+              <a:t>GEMINI API</a:t>
+            </a:r>
+          </a:p>
+        </p:txBody>
+      </p:sp>
+      <p:sp>
+        <p:nvSpPr>
+          <p:cNvPr id="302" name="Header: Firebase"/>
+          <p:cNvSpPr txBox="1"/>
+          <p:nvPr/>
+        </p:nvSpPr>
+        <p:spPr>
+          <a:xfrm>
+            <a:off x="4846320" y="1325880"/>
+            <a:ext cx="1645920" cy="164592"/>
+          </a:xfrm>
+          <a:prstGeom prst="rect">
+            <a:avLst/>
+          </a:prstGeom>
+          <a:noFill/>
+          <a:ln>
+            <a:noFill/>
+          </a:ln>
+        </p:spPr>
+        <p:txBody>
+          <a:bodyPr wrap="square" lIns="0" tIns="0" rIns="0" bIns="0" rtlCol="0" anchor="t">
+            <a:noAutofit/>
+          </a:bodyPr>
+          <a:lstStyle/>
+          <a:p>
+            <a:pPr marL="0" indent="0" algn="l">
+              <a:lnSpc>
+                <a:spcPct val="100000"/>
+              </a:lnSpc>
+              <a:spcBef>
+                <a:spcPts val="0"/>
+              </a:spcBef>
+              <a:spcAft>
+                <a:spcPts val="0"/>
+              </a:spcAft>
+              <a:buNone/>
+            </a:pPr>
+            <a:r>
+              <a:rPr lang="en-US" sz="800" b="1" i="0" dirty="0" spc="60">
+                <a:solidFill>
+                  <a:srgbClr val="5F6368"/>
+                </a:solidFill>
+                <a:latin typeface="Arial"/>
+                <a:cs typeface="Arial"/>
+              </a:rPr>
+              <a:t>REALTIME DATA</a:t>
+            </a:r>
+          </a:p>
+        </p:txBody>
+      </p:sp>
+      <p:sp>
+        <p:nvSpPr>
+          <p:cNvPr id="303" name="Header: responders"/>
+          <p:cNvSpPr txBox="1"/>
+          <p:nvPr/>
+        </p:nvSpPr>
+        <p:spPr>
+          <a:xfrm>
+            <a:off x="7132320" y="1325880"/>
+            <a:ext cx="1645920" cy="164592"/>
+          </a:xfrm>
+          <a:prstGeom prst="rect">
+            <a:avLst/>
+          </a:prstGeom>
+          <a:noFill/>
+          <a:ln>
+            <a:noFill/>
+          </a:ln>
+        </p:spPr>
+        <p:txBody>
+          <a:bodyPr wrap="square" lIns="0" tIns="0" rIns="0" bIns="0" rtlCol="0" anchor="t">
+            <a:noAutofit/>
+          </a:bodyPr>
+          <a:lstStyle/>
+          <a:p>
+            <a:pPr marL="0" indent="0" algn="l">
+              <a:lnSpc>
+                <a:spcPct val="100000"/>
+              </a:lnSpc>
+              <a:spcBef>
+                <a:spcPts val="0"/>
+              </a:spcBef>
+              <a:spcAft>
+                <a:spcPts val="0"/>
+              </a:spcAft>
+              <a:buNone/>
+            </a:pPr>
+            <a:r>
+              <a:rPr lang="en-US" sz="800" b="1" i="0" dirty="0" spc="60">
+                <a:solidFill>
+                  <a:srgbClr val="2F9E44"/>
+                </a:solidFill>
+                <a:latin typeface="Arial"/>
+                <a:cs typeface="Arial"/>
+              </a:rPr>
+              <a:t>RESPONDERS</a:t>
+            </a:r>
+          </a:p>
+        </p:txBody>
+      </p:sp>
+      <p:sp>
+        <p:nvSpPr>
+          <p:cNvPr id="304" name="QuickBite web app"/>
           <p:cNvSpPr/>
           <p:nvPr/>
         </p:nvSpPr>
         <p:spPr>
           <a:xfrm>
-            <a:off x="365760" y="1554480"/>
-            <a:ext cx="1783080" cy="713232"/>
+            <a:off x="365760" y="1536192"/>
+            <a:ext cx="1783080" cy="640080"/>
           </a:xfrm>
           <a:prstGeom prst="roundRect">
             <a:avLst>
-              <a:gd name="adj" fmla="val 8000"/>
+              <a:gd name="adj" fmla="val 8571"/>
             </a:avLst>
           </a:prstGeom>
           <a:solidFill>
@@ -24109,65 +24300,124 @@
           <a:ln>
             <a:noFill/>
           </a:ln>
-          <a:effectLst/>
-        </p:spPr>
-        <p:style>
-          <a:lnRef idx="1">
-            <a:schemeClr val="accent1"/>
-          </a:lnRef>
-          <a:fillRef idx="3">
-            <a:schemeClr val="accent1"/>
-          </a:fillRef>
-          <a:effectRef idx="2">
-            <a:schemeClr val="accent1"/>
-          </a:effectRef>
-          <a:fontRef idx="minor">
-            <a:schemeClr val="lt1"/>
-          </a:fontRef>
-        </p:style>
-        <p:txBody>
-          <a:bodyPr wrap="square" tIns="91440" bIns="91440" rtlCol="0" anchor="ctr"/>
-          <a:lstStyle/>
-          <a:p>
-            <a:pPr algn="l"/>
-            <a:r>
-              <a:rPr sz="950" b="1" i="0">
+        </p:spPr>
+        <p:txBody>
+          <a:bodyPr wrap="square" lIns="73152" tIns="54864" rIns="73152" bIns="36576" rtlCol="0" anchor="t">
+            <a:noAutofit/>
+          </a:bodyPr>
+          <a:lstStyle/>
+          <a:p>
+            <a:pPr marL="0" indent="0" algn="l">
+              <a:lnSpc>
+                <a:spcPct val="100000"/>
+              </a:lnSpc>
+              <a:spcBef>
+                <a:spcPts val="0"/>
+              </a:spcBef>
+              <a:spcAft>
+                <a:spcPts val="0"/>
+              </a:spcAft>
+              <a:buNone/>
+            </a:pPr>
+            <a:r>
+              <a:rPr lang="en-US" sz="950" b="1" i="0" dirty="0">
                 <a:solidFill>
                   <a:srgbClr val="1A1A1A"/>
                 </a:solidFill>
                 <a:latin typeface="Arial"/>
+                <a:cs typeface="Arial"/>
               </a:rPr>
               <a:t>QuickBite web app</a:t>
             </a:r>
           </a:p>
           <a:p>
-            <a:pPr algn="l"/>
-            <a:r>
-              <a:rPr sz="750" b="0" i="0">
+            <a:pPr marL="0" indent="0" algn="l">
+              <a:lnSpc>
+                <a:spcPct val="100000"/>
+              </a:lnSpc>
+              <a:spcBef>
+                <a:spcPts val="200"/>
+              </a:spcBef>
+              <a:spcAft>
+                <a:spcPts val="0"/>
+              </a:spcAft>
+              <a:buNone/>
+            </a:pPr>
+            <a:r>
+              <a:rPr lang="en-US" sz="750" b="0" i="0" dirty="0">
                 <a:solidFill>
                   <a:srgbClr val="5F6368"/>
                 </a:solidFill>
                 <a:latin typeface="Arial"/>
-              </a:rPr>
-              <a:t>React + Vite + TS · Firebase Hosting · no install</a:t>
-            </a:r>
-          </a:p>
-        </p:txBody>
-      </p:sp>
-      <p:sp>
-        <p:nvSpPr>
-          <p:cNvPr id="115" name="Rounded Rectangle 114"/>
+                <a:cs typeface="Arial"/>
+              </a:rPr>
+              <a:t>React + Vite · Firebase Hosting</a:t>
+            </a:r>
+          </a:p>
+          <a:p>
+            <a:pPr marL="0" indent="0" algn="l">
+              <a:lnSpc>
+                <a:spcPct val="100000"/>
+              </a:lnSpc>
+              <a:spcBef>
+                <a:spcPts val="0"/>
+              </a:spcBef>
+              <a:spcAft>
+                <a:spcPts val="0"/>
+              </a:spcAft>
+              <a:buNone/>
+            </a:pPr>
+            <a:r>
+              <a:rPr lang="en-US" sz="750" b="0" i="0" dirty="0">
+                <a:solidFill>
+                  <a:srgbClr val="5F6368"/>
+                </a:solidFill>
+                <a:latin typeface="Arial"/>
+                <a:cs typeface="Arial"/>
+              </a:rPr>
+              <a:t>Opens in the phone browser,</a:t>
+            </a:r>
+          </a:p>
+          <a:p>
+            <a:pPr marL="0" indent="0" algn="l">
+              <a:lnSpc>
+                <a:spcPct val="100000"/>
+              </a:lnSpc>
+              <a:spcBef>
+                <a:spcPts val="0"/>
+              </a:spcBef>
+              <a:spcAft>
+                <a:spcPts val="0"/>
+              </a:spcAft>
+              <a:buNone/>
+            </a:pPr>
+            <a:r>
+              <a:rPr lang="en-US" sz="750" b="0" i="0" dirty="0">
+                <a:solidFill>
+                  <a:srgbClr val="5F6368"/>
+                </a:solidFill>
+                <a:latin typeface="Arial"/>
+                <a:cs typeface="Arial"/>
+              </a:rPr>
+              <a:t>nothing to install</a:t>
+            </a:r>
+          </a:p>
+        </p:txBody>
+      </p:sp>
+      <p:sp>
+        <p:nvSpPr>
+          <p:cNvPr id="305" name="Four hidden ways in"/>
           <p:cNvSpPr/>
           <p:nvPr/>
         </p:nvSpPr>
         <p:spPr>
           <a:xfrm>
-            <a:off x="365760" y="2359152"/>
-            <a:ext cx="1783080" cy="713232"/>
+            <a:off x="365760" y="2231136"/>
+            <a:ext cx="1783080" cy="512064"/>
           </a:xfrm>
           <a:prstGeom prst="roundRect">
             <a:avLst>
-              <a:gd name="adj" fmla="val 8000"/>
+              <a:gd name="adj" fmla="val 10714"/>
             </a:avLst>
           </a:prstGeom>
           <a:solidFill>
@@ -24176,98 +24426,202 @@
           <a:ln>
             <a:noFill/>
           </a:ln>
-          <a:effectLst/>
-        </p:spPr>
-        <p:style>
-          <a:lnRef idx="1">
-            <a:schemeClr val="accent1"/>
-          </a:lnRef>
-          <a:fillRef idx="3">
-            <a:schemeClr val="accent1"/>
-          </a:fillRef>
-          <a:effectRef idx="2">
-            <a:schemeClr val="accent1"/>
-          </a:effectRef>
-          <a:fontRef idx="minor">
-            <a:schemeClr val="lt1"/>
-          </a:fontRef>
-        </p:style>
-        <p:txBody>
-          <a:bodyPr wrap="square" tIns="91440" bIns="91440" rtlCol="0" anchor="ctr"/>
-          <a:lstStyle/>
-          <a:p>
-            <a:pPr algn="l"/>
-            <a:r>
-              <a:rPr sz="950" b="1" i="0">
+        </p:spPr>
+        <p:txBody>
+          <a:bodyPr wrap="square" lIns="73152" tIns="54864" rIns="73152" bIns="36576" rtlCol="0" anchor="t">
+            <a:noAutofit/>
+          </a:bodyPr>
+          <a:lstStyle/>
+          <a:p>
+            <a:pPr marL="0" indent="0" algn="l">
+              <a:lnSpc>
+                <a:spcPct val="100000"/>
+              </a:lnSpc>
+              <a:spcBef>
+                <a:spcPts val="0"/>
+              </a:spcBef>
+              <a:spcAft>
+                <a:spcPts val="0"/>
+              </a:spcAft>
+              <a:buNone/>
+            </a:pPr>
+            <a:r>
+              <a:rPr lang="en-US" sz="850" b="1" i="0" dirty="0">
                 <a:solidFill>
                   <a:srgbClr val="1A1A1A"/>
                 </a:solidFill>
                 <a:latin typeface="Arial"/>
-              </a:rPr>
-              <a:t>QuickBite Android</a:t>
-            </a:r>
-          </a:p>
-          <a:p>
-            <a:pPr algn="l"/>
-            <a:r>
-              <a:rPr sz="750" b="0" i="0">
-                <a:solidFill>
-                  <a:srgbClr val="5F6368"/>
-                </a:solidFill>
-                <a:latin typeface="Arial"/>
-              </a:rPr>
-              <a:t>React Native / Expo · react-native-webrtc · Kotlin frame-tap module</a:t>
-            </a:r>
-          </a:p>
-        </p:txBody>
-      </p:sp>
-      <p:sp>
-        <p:nvSpPr>
-          <p:cNvPr id="116" name="TextBox 115"/>
-          <p:cNvSpPr txBox="1"/>
-          <p:nvPr/>
-        </p:nvSpPr>
-        <p:spPr>
-          <a:xfrm>
-            <a:off x="2788920" y="1325880"/>
-            <a:ext cx="2194560" cy="201168"/>
-          </a:xfrm>
-          <a:prstGeom prst="rect">
-            <a:avLst/>
-          </a:prstGeom>
-          <a:noFill/>
-        </p:spPr>
-        <p:txBody>
-          <a:bodyPr wrap="square" lIns="0" tIns="0" rIns="0" bIns="0" anchor="t"/>
-          <a:lstStyle/>
-          <a:p>
-            <a:pPr algn="l"/>
-            <a:r>
-              <a:rPr sz="800" b="1" i="0">
-                <a:solidFill>
-                  <a:srgbClr val="1A73E8"/>
-                </a:solidFill>
-                <a:latin typeface="Arial"/>
-              </a:rPr>
-              <a:t>GEMINI (FIREBASE AI LOGIC + APP CHECK)</a:t>
-            </a:r>
-          </a:p>
-        </p:txBody>
-      </p:sp>
-      <p:sp>
-        <p:nvSpPr>
-          <p:cNvPr id="117" name="Rounded Rectangle 116"/>
+                <a:cs typeface="Arial"/>
+              </a:rPr>
+              <a:t>Four hidden ways in</a:t>
+            </a:r>
+          </a:p>
+          <a:p>
+            <a:pPr marL="0" indent="0" algn="l">
+              <a:lnSpc>
+                <a:spcPct val="100000"/>
+              </a:lnSpc>
+              <a:spcBef>
+                <a:spcPts val="200"/>
+              </a:spcBef>
+              <a:spcAft>
+                <a:spcPts val="0"/>
+              </a:spcAft>
+              <a:buNone/>
+            </a:pPr>
+            <a:r>
+              <a:rPr lang="en-US" sz="750" b="0" i="0" dirty="0">
+                <a:solidFill>
+                  <a:srgbClr val="1A1A1A"/>
+                </a:solidFill>
+                <a:latin typeface="Arial"/>
+                <a:cs typeface="Arial"/>
+              </a:rPr>
+              <a:t>Call to order · Click &amp; order</a:t>
+            </a:r>
+          </a:p>
+          <a:p>
+            <a:pPr marL="0" indent="0" algn="l">
+              <a:lnSpc>
+                <a:spcPct val="100000"/>
+              </a:lnSpc>
+              <a:spcBef>
+                <a:spcPts val="0"/>
+              </a:spcBef>
+              <a:spcAft>
+                <a:spcPts val="0"/>
+              </a:spcAft>
+              <a:buNone/>
+            </a:pPr>
+            <a:r>
+              <a:rPr lang="en-US" sz="750" b="0" i="0" dirty="0">
+                <a:solidFill>
+                  <a:srgbClr val="1A1A1A"/>
+                </a:solidFill>
+                <a:latin typeface="Arial"/>
+                <a:cs typeface="Arial"/>
+              </a:rPr>
+              <a:t>Delivery instructions · Heart SOS</a:t>
+            </a:r>
+          </a:p>
+        </p:txBody>
+      </p:sp>
+      <p:sp>
+        <p:nvSpPr>
+          <p:cNvPr id="306" name="Phone runs every tool call"/>
           <p:cNvSpPr/>
           <p:nvPr/>
         </p:nvSpPr>
         <p:spPr>
           <a:xfrm>
-            <a:off x="2788920" y="1554480"/>
-            <a:ext cx="2148840" cy="1938528"/>
+            <a:off x="365760" y="2798064"/>
+            <a:ext cx="1783080" cy="512064"/>
           </a:xfrm>
           <a:prstGeom prst="roundRect">
             <a:avLst>
-              <a:gd name="adj" fmla="val 5000"/>
+              <a:gd name="adj" fmla="val 10714"/>
+            </a:avLst>
+          </a:prstGeom>
+          <a:solidFill>
+            <a:srgbClr val="FDEBDF"/>
+          </a:solidFill>
+          <a:ln>
+            <a:noFill/>
+          </a:ln>
+        </p:spPr>
+        <p:txBody>
+          <a:bodyPr wrap="square" lIns="73152" tIns="54864" rIns="73152" bIns="36576" rtlCol="0" anchor="t">
+            <a:noAutofit/>
+          </a:bodyPr>
+          <a:lstStyle/>
+          <a:p>
+            <a:pPr marL="0" indent="0" algn="l">
+              <a:lnSpc>
+                <a:spcPct val="100000"/>
+              </a:lnSpc>
+              <a:spcBef>
+                <a:spcPts val="0"/>
+              </a:spcBef>
+              <a:spcAft>
+                <a:spcPts val="0"/>
+              </a:spcAft>
+              <a:buNone/>
+            </a:pPr>
+            <a:r>
+              <a:rPr lang="en-US" sz="850" b="1" i="0" dirty="0">
+                <a:solidFill>
+                  <a:srgbClr val="1A1A1A"/>
+                </a:solidFill>
+                <a:latin typeface="Arial"/>
+                <a:cs typeface="Arial"/>
+              </a:rPr>
+              <a:t>Every tool call runs here</a:t>
+            </a:r>
+          </a:p>
+          <a:p>
+            <a:pPr marL="0" indent="0" algn="l">
+              <a:lnSpc>
+                <a:spcPct val="100000"/>
+              </a:lnSpc>
+              <a:spcBef>
+                <a:spcPts val="200"/>
+              </a:spcBef>
+              <a:spcAft>
+                <a:spcPts val="0"/>
+              </a:spcAft>
+              <a:buNone/>
+            </a:pPr>
+            <a:r>
+              <a:rPr lang="en-US" sz="750" b="0" i="0" dirty="0">
+                <a:solidFill>
+                  <a:srgbClr val="5F6368"/>
+                </a:solidFill>
+                <a:latin typeface="Arial"/>
+                <a:cs typeface="Arial"/>
+              </a:rPr>
+              <a:t>severity rules · geocode · route</a:t>
+            </a:r>
+          </a:p>
+          <a:p>
+            <a:pPr marL="0" indent="0" algn="l">
+              <a:lnSpc>
+                <a:spcPct val="100000"/>
+              </a:lnSpc>
+              <a:spcBef>
+                <a:spcPts val="0"/>
+              </a:spcBef>
+              <a:spcAft>
+                <a:spcPts val="0"/>
+              </a:spcAft>
+              <a:buNone/>
+            </a:pPr>
+            <a:r>
+              <a:rPr lang="en-US" sz="750" b="0" i="0" dirty="0">
+                <a:solidFill>
+                  <a:srgbClr val="5F6368"/>
+                </a:solidFill>
+                <a:latin typeface="Arial"/>
+                <a:cs typeface="Arial"/>
+              </a:rPr>
+              <a:t>WebRTC · recorders · key pool</a:t>
+            </a:r>
+          </a:p>
+        </p:txBody>
+      </p:sp>
+      <p:sp>
+        <p:nvSpPr>
+          <p:cNvPr id="307" name="Gemini API container"/>
+          <p:cNvSpPr/>
+          <p:nvPr/>
+        </p:nvSpPr>
+        <p:spPr>
+          <a:xfrm>
+            <a:off x="2926080" y="1536192"/>
+            <a:ext cx="1645920" cy="1773936"/>
+          </a:xfrm>
+          <a:prstGeom prst="roundRect">
+            <a:avLst>
+              <a:gd name="adj" fmla="val 4444"/>
             </a:avLst>
           </a:prstGeom>
           <a:solidFill>
@@ -24276,44 +24630,31 @@
           <a:ln>
             <a:noFill/>
           </a:ln>
-          <a:effectLst/>
-        </p:spPr>
-        <p:style>
-          <a:lnRef idx="1">
-            <a:schemeClr val="accent1"/>
-          </a:lnRef>
-          <a:fillRef idx="3">
-            <a:schemeClr val="accent1"/>
-          </a:fillRef>
-          <a:effectRef idx="2">
-            <a:schemeClr val="accent1"/>
-          </a:effectRef>
-          <a:fontRef idx="minor">
-            <a:schemeClr val="lt1"/>
-          </a:fontRef>
-        </p:style>
-        <p:txBody>
-          <a:bodyPr rtlCol="0" anchor="ctr"/>
-          <a:lstStyle/>
-          <a:p>
-            <a:endParaRPr/>
-          </a:p>
-        </p:txBody>
-      </p:sp>
-      <p:sp>
-        <p:nvSpPr>
-          <p:cNvPr id="118" name="Rounded Rectangle 117"/>
+        </p:spPr>
+        <p:txBody>
+          <a:bodyPr wrap="square" lIns="73152" tIns="54864" rIns="73152" bIns="36576" rtlCol="0" anchor="t">
+            <a:noAutofit/>
+          </a:bodyPr>
+          <a:lstStyle/>
+          <a:p>
+            <a:endParaRPr lang="en-US" sz="700" dirty="0"/>
+          </a:p>
+        </p:txBody>
+      </p:sp>
+      <p:sp>
+        <p:nvSpPr>
+          <p:cNvPr id="308" name="gemini-3.8-live"/>
           <p:cNvSpPr/>
           <p:nvPr/>
         </p:nvSpPr>
         <p:spPr>
           <a:xfrm>
-            <a:off x="2862072" y="1627632"/>
-            <a:ext cx="2002536" cy="548640"/>
+            <a:off x="2990088" y="1600200"/>
+            <a:ext cx="1517904" cy="713232"/>
           </a:xfrm>
           <a:prstGeom prst="roundRect">
             <a:avLst>
-              <a:gd name="adj" fmla="val 8000"/>
+              <a:gd name="adj" fmla="val 7692"/>
             </a:avLst>
           </a:prstGeom>
           <a:solidFill>
@@ -24322,65 +24663,124 @@
           <a:ln>
             <a:noFill/>
           </a:ln>
-          <a:effectLst/>
-        </p:spPr>
-        <p:style>
-          <a:lnRef idx="1">
-            <a:schemeClr val="accent1"/>
-          </a:lnRef>
-          <a:fillRef idx="3">
-            <a:schemeClr val="accent1"/>
-          </a:fillRef>
-          <a:effectRef idx="2">
-            <a:schemeClr val="accent1"/>
-          </a:effectRef>
-          <a:fontRef idx="minor">
-            <a:schemeClr val="lt1"/>
-          </a:fontRef>
-        </p:style>
-        <p:txBody>
-          <a:bodyPr wrap="square" lIns="64008" tIns="64008" rIns="64008" bIns="64008" rtlCol="0" anchor="ctr"/>
-          <a:lstStyle/>
-          <a:p>
-            <a:pPr algn="l"/>
-            <a:r>
-              <a:rPr sz="850" b="1" i="0">
+        </p:spPr>
+        <p:txBody>
+          <a:bodyPr wrap="square" lIns="73152" tIns="54864" rIns="73152" bIns="36576" rtlCol="0" anchor="t">
+            <a:noAutofit/>
+          </a:bodyPr>
+          <a:lstStyle/>
+          <a:p>
+            <a:pPr marL="0" indent="0" algn="l">
+              <a:lnSpc>
+                <a:spcPct val="100000"/>
+              </a:lnSpc>
+              <a:spcBef>
+                <a:spcPts val="0"/>
+              </a:spcBef>
+              <a:spcAft>
+                <a:spcPts val="0"/>
+              </a:spcAft>
+              <a:buNone/>
+            </a:pPr>
+            <a:r>
+              <a:rPr lang="en-US" sz="900" b="1" i="0" dirty="0">
                 <a:solidFill>
                   <a:srgbClr val="1A73E8"/>
                 </a:solidFill>
                 <a:latin typeface="Arial"/>
+                <a:cs typeface="Arial"/>
               </a:rPr>
               <a:t>gemini-3.8-live</a:t>
             </a:r>
           </a:p>
           <a:p>
-            <a:pPr algn="l"/>
-            <a:r>
-              <a:rPr sz="750" b="0" i="0">
+            <a:pPr marL="0" indent="0" algn="l">
+              <a:lnSpc>
+                <a:spcPct val="100000"/>
+              </a:lnSpc>
+              <a:spcBef>
+                <a:spcPts val="200"/>
+              </a:spcBef>
+              <a:spcAft>
+                <a:spcPts val="0"/>
+              </a:spcAft>
+              <a:buNone/>
+            </a:pPr>
+            <a:r>
+              <a:rPr lang="en-US" sz="750" b="0" i="0" dirty="0">
                 <a:solidFill>
                   <a:srgbClr val="1A1A1A"/>
                 </a:solidFill>
                 <a:latin typeface="Arial"/>
-              </a:rPr>
-              <a:t>voice + camera frames + 12 tools</a:t>
-            </a:r>
-          </a:p>
-        </p:txBody>
-      </p:sp>
-      <p:sp>
-        <p:nvSpPr>
-          <p:cNvPr id="119" name="Rounded Rectangle 118"/>
+                <a:cs typeface="Arial"/>
+              </a:rPr>
+              <a:t>Mia, the live voice agent:</a:t>
+            </a:r>
+          </a:p>
+          <a:p>
+            <a:pPr marL="0" indent="0" algn="l">
+              <a:lnSpc>
+                <a:spcPct val="100000"/>
+              </a:lnSpc>
+              <a:spcBef>
+                <a:spcPts val="0"/>
+              </a:spcBef>
+              <a:spcAft>
+                <a:spcPts val="0"/>
+              </a:spcAft>
+              <a:buNone/>
+            </a:pPr>
+            <a:r>
+              <a:rPr lang="en-US" sz="750" b="0" i="0" dirty="0">
+                <a:solidFill>
+                  <a:srgbClr val="1A1A1A"/>
+                </a:solidFill>
+                <a:latin typeface="Arial"/>
+                <a:cs typeface="Arial"/>
+              </a:rPr>
+              <a:t>hears, sees, calls 12 tools</a:t>
+            </a:r>
+          </a:p>
+          <a:p>
+            <a:pPr marL="0" indent="0" algn="l">
+              <a:lnSpc>
+                <a:spcPct val="100000"/>
+              </a:lnSpc>
+              <a:spcBef>
+                <a:spcPts val="0"/>
+              </a:spcBef>
+              <a:spcAft>
+                <a:spcPts val="0"/>
+              </a:spcAft>
+              <a:buNone/>
+            </a:pPr>
+            <a:r>
+              <a:rPr lang="en-US" sz="750" b="0" i="0" dirty="0">
+                <a:solidFill>
+                  <a:srgbClr val="1A1A1A"/>
+                </a:solidFill>
+                <a:latin typeface="Arial"/>
+                <a:cs typeface="Arial"/>
+              </a:rPr>
+              <a:t>+ the silent SOS observer</a:t>
+            </a:r>
+          </a:p>
+        </p:txBody>
+      </p:sp>
+      <p:sp>
+        <p:nvSpPr>
+          <p:cNvPr id="309" name="gemini-3.5-flash-lite"/>
           <p:cNvSpPr/>
           <p:nvPr/>
         </p:nvSpPr>
         <p:spPr>
           <a:xfrm>
-            <a:off x="2862072" y="2231136"/>
-            <a:ext cx="2002536" cy="548640"/>
+            <a:off x="2990088" y="2377440"/>
+            <a:ext cx="1517904" cy="402336"/>
           </a:xfrm>
           <a:prstGeom prst="roundRect">
             <a:avLst>
-              <a:gd name="adj" fmla="val 8000"/>
+              <a:gd name="adj" fmla="val 13636"/>
             </a:avLst>
           </a:prstGeom>
           <a:solidFill>
@@ -24389,65 +24789,76 @@
           <a:ln>
             <a:noFill/>
           </a:ln>
-          <a:effectLst/>
-        </p:spPr>
-        <p:style>
-          <a:lnRef idx="1">
-            <a:schemeClr val="accent1"/>
-          </a:lnRef>
-          <a:fillRef idx="3">
-            <a:schemeClr val="accent1"/>
-          </a:fillRef>
-          <a:effectRef idx="2">
-            <a:schemeClr val="accent1"/>
-          </a:effectRef>
-          <a:fontRef idx="minor">
-            <a:schemeClr val="lt1"/>
-          </a:fontRef>
-        </p:style>
-        <p:txBody>
-          <a:bodyPr wrap="square" lIns="64008" tIns="64008" rIns="64008" bIns="64008" rtlCol="0" anchor="ctr"/>
-          <a:lstStyle/>
-          <a:p>
-            <a:pPr algn="l"/>
-            <a:r>
-              <a:rPr sz="850" b="1" i="0">
+        </p:spPr>
+        <p:txBody>
+          <a:bodyPr wrap="square" lIns="73152" tIns="54864" rIns="73152" bIns="36576" rtlCol="0" anchor="t">
+            <a:noAutofit/>
+          </a:bodyPr>
+          <a:lstStyle/>
+          <a:p>
+            <a:pPr marL="0" indent="0" algn="l">
+              <a:lnSpc>
+                <a:spcPct val="100000"/>
+              </a:lnSpc>
+              <a:spcBef>
+                <a:spcPts val="0"/>
+              </a:spcBef>
+              <a:spcAft>
+                <a:spcPts val="0"/>
+              </a:spcAft>
+              <a:buNone/>
+            </a:pPr>
+            <a:r>
+              <a:rPr lang="en-US" sz="850" b="1" i="0" dirty="0">
                 <a:solidFill>
                   <a:srgbClr val="1A73E8"/>
                 </a:solidFill>
                 <a:latin typeface="Arial"/>
+                <a:cs typeface="Arial"/>
               </a:rPr>
               <a:t>gemini-3.5-flash-lite</a:t>
             </a:r>
           </a:p>
           <a:p>
-            <a:pPr algn="l"/>
-            <a:r>
-              <a:rPr sz="750" b="0" i="0">
+            <a:pPr marL="0" indent="0" algn="l">
+              <a:lnSpc>
+                <a:spcPct val="100000"/>
+              </a:lnSpc>
+              <a:spcBef>
+                <a:spcPts val="200"/>
+              </a:spcBef>
+              <a:spcAft>
+                <a:spcPts val="0"/>
+              </a:spcAft>
+              <a:buNone/>
+            </a:pPr>
+            <a:r>
+              <a:rPr lang="en-US" sz="750" b="0" i="0" dirty="0">
                 <a:solidFill>
                   <a:srgbClr val="1A1A1A"/>
                 </a:solidFill>
                 <a:latin typeface="Arial"/>
-              </a:rPr>
-              <a:t>case summary, bulletin, redaction</a:t>
-            </a:r>
-          </a:p>
-        </p:txBody>
-      </p:sp>
-      <p:sp>
-        <p:nvSpPr>
-          <p:cNvPr id="120" name="Rounded Rectangle 119"/>
+                <a:cs typeface="Arial"/>
+              </a:rPr>
+              <a:t>summary, bulletin, redaction</a:t>
+            </a:r>
+          </a:p>
+        </p:txBody>
+      </p:sp>
+      <p:sp>
+        <p:nvSpPr>
+          <p:cNvPr id="310" name="gemini-3.1-flash-lite"/>
           <p:cNvSpPr/>
           <p:nvPr/>
         </p:nvSpPr>
         <p:spPr>
           <a:xfrm>
-            <a:off x="2862072" y="2834640"/>
-            <a:ext cx="2002536" cy="548640"/>
+            <a:off x="2990088" y="2843784"/>
+            <a:ext cx="1517904" cy="402336"/>
           </a:xfrm>
           <a:prstGeom prst="roundRect">
             <a:avLst>
-              <a:gd name="adj" fmla="val 8000"/>
+              <a:gd name="adj" fmla="val 13636"/>
             </a:avLst>
           </a:prstGeom>
           <a:solidFill>
@@ -24456,98 +24867,76 @@
           <a:ln>
             <a:noFill/>
           </a:ln>
-          <a:effectLst/>
-        </p:spPr>
-        <p:style>
-          <a:lnRef idx="1">
-            <a:schemeClr val="accent1"/>
-          </a:lnRef>
-          <a:fillRef idx="3">
-            <a:schemeClr val="accent1"/>
-          </a:fillRef>
-          <a:effectRef idx="2">
-            <a:schemeClr val="accent1"/>
-          </a:effectRef>
-          <a:fontRef idx="minor">
-            <a:schemeClr val="lt1"/>
-          </a:fontRef>
-        </p:style>
-        <p:txBody>
-          <a:bodyPr wrap="square" lIns="64008" tIns="64008" rIns="64008" bIns="64008" rtlCol="0" anchor="ctr"/>
-          <a:lstStyle/>
-          <a:p>
-            <a:pPr algn="l"/>
-            <a:r>
-              <a:rPr sz="850" b="1" i="0">
+        </p:spPr>
+        <p:txBody>
+          <a:bodyPr wrap="square" lIns="73152" tIns="54864" rIns="73152" bIns="36576" rtlCol="0" anchor="t">
+            <a:noAutofit/>
+          </a:bodyPr>
+          <a:lstStyle/>
+          <a:p>
+            <a:pPr marL="0" indent="0" algn="l">
+              <a:lnSpc>
+                <a:spcPct val="100000"/>
+              </a:lnSpc>
+              <a:spcBef>
+                <a:spcPts val="0"/>
+              </a:spcBef>
+              <a:spcAft>
+                <a:spcPts val="0"/>
+              </a:spcAft>
+              <a:buNone/>
+            </a:pPr>
+            <a:r>
+              <a:rPr lang="en-US" sz="850" b="1" i="0" dirty="0">
                 <a:solidFill>
                   <a:srgbClr val="1A73E8"/>
                 </a:solidFill>
                 <a:latin typeface="Arial"/>
+                <a:cs typeface="Arial"/>
               </a:rPr>
               <a:t>gemini-3.1-flash-lite</a:t>
             </a:r>
           </a:p>
           <a:p>
-            <a:pPr algn="l"/>
-            <a:r>
-              <a:rPr sz="750" b="0" i="0">
+            <a:pPr marL="0" indent="0" algn="l">
+              <a:lnSpc>
+                <a:spcPct val="100000"/>
+              </a:lnSpc>
+              <a:spcBef>
+                <a:spcPts val="200"/>
+              </a:spcBef>
+              <a:spcAft>
+                <a:spcPts val="0"/>
+              </a:spcAft>
+              <a:buNone/>
+            </a:pPr>
+            <a:r>
+              <a:rPr lang="en-US" sz="750" b="0" i="0" dirty="0">
                 <a:solidFill>
                   <a:srgbClr val="1A1A1A"/>
                 </a:solidFill>
                 <a:latin typeface="Arial"/>
-              </a:rPr>
-              <a:t>photo vision, case linking, search, credibility, insights</a:t>
-            </a:r>
-          </a:p>
-        </p:txBody>
-      </p:sp>
-      <p:sp>
-        <p:nvSpPr>
-          <p:cNvPr id="121" name="TextBox 120"/>
-          <p:cNvSpPr txBox="1"/>
-          <p:nvPr/>
-        </p:nvSpPr>
-        <p:spPr>
-          <a:xfrm>
-            <a:off x="5303520" y="1325880"/>
-            <a:ext cx="1645920" cy="201168"/>
-          </a:xfrm>
-          <a:prstGeom prst="rect">
-            <a:avLst/>
-          </a:prstGeom>
-          <a:noFill/>
-        </p:spPr>
-        <p:txBody>
-          <a:bodyPr wrap="square" lIns="0" tIns="0" rIns="0" bIns="0" anchor="t"/>
-          <a:lstStyle/>
-          <a:p>
-            <a:pPr algn="l"/>
-            <a:r>
-              <a:rPr sz="800" b="1" i="0">
-                <a:solidFill>
-                  <a:srgbClr val="5F6368"/>
-                </a:solidFill>
-                <a:latin typeface="Arial"/>
-              </a:rPr>
-              <a:t>REALTIME DATA</a:t>
-            </a:r>
-          </a:p>
-        </p:txBody>
-      </p:sp>
-      <p:sp>
-        <p:nvSpPr>
-          <p:cNvPr id="122" name="Rounded Rectangle 121"/>
+                <a:cs typeface="Arial"/>
+              </a:rPr>
+              <a:t>vision, case linking, console AI</a:t>
+            </a:r>
+          </a:p>
+        </p:txBody>
+      </p:sp>
+      <p:sp>
+        <p:nvSpPr>
+          <p:cNvPr id="311" name="Cloud Firestore"/>
           <p:cNvSpPr/>
           <p:nvPr/>
         </p:nvSpPr>
         <p:spPr>
           <a:xfrm>
-            <a:off x="5303520" y="1554480"/>
-            <a:ext cx="1645920" cy="1938528"/>
+            <a:off x="4846320" y="1536192"/>
+            <a:ext cx="1645920" cy="1773936"/>
           </a:xfrm>
           <a:prstGeom prst="roundRect">
             <a:avLst>
-              <a:gd name="adj" fmla="val 8000"/>
+              <a:gd name="adj" fmla="val 4444"/>
             </a:avLst>
           </a:prstGeom>
           <a:solidFill>
@@ -24557,566 +24946,174 @@
             <a:solidFill>
               <a:srgbClr val="DADCE0"/>
             </a:solidFill>
+            <a:round/>
           </a:ln>
-          <a:effectLst/>
-        </p:spPr>
-        <p:style>
-          <a:lnRef idx="1">
-            <a:schemeClr val="accent1"/>
-          </a:lnRef>
-          <a:fillRef idx="3">
-            <a:schemeClr val="accent1"/>
-          </a:fillRef>
-          <a:effectRef idx="2">
-            <a:schemeClr val="accent1"/>
-          </a:effectRef>
-          <a:fontRef idx="minor">
-            <a:schemeClr val="lt1"/>
-          </a:fontRef>
-        </p:style>
-        <p:txBody>
-          <a:bodyPr wrap="square" tIns="91440" bIns="91440" rtlCol="0" anchor="ctr"/>
-          <a:lstStyle/>
-          <a:p>
-            <a:pPr algn="l">
-              <a:spcAft>
+        </p:spPr>
+        <p:txBody>
+          <a:bodyPr wrap="square" lIns="73152" tIns="54864" rIns="73152" bIns="36576" rtlCol="0" anchor="t">
+            <a:noAutofit/>
+          </a:bodyPr>
+          <a:lstStyle/>
+          <a:p>
+            <a:pPr marL="0" indent="0" algn="l">
+              <a:lnSpc>
+                <a:spcPct val="100000"/>
+              </a:lnSpc>
+              <a:spcBef>
+                <a:spcPts val="0"/>
+              </a:spcBef>
+              <a:spcAft>
+                <a:spcPts val="0"/>
+              </a:spcAft>
+              <a:buNone/>
+            </a:pPr>
+            <a:r>
+              <a:rPr lang="en-US" sz="950" b="1" i="0" dirty="0">
+                <a:solidFill>
+                  <a:srgbClr val="1A1A1A"/>
+                </a:solidFill>
+                <a:latin typeface="Arial"/>
+                <a:cs typeface="Arial"/>
+              </a:rPr>
+              <a:t>Cloud Firestore</a:t>
+            </a:r>
+          </a:p>
+          <a:p>
+            <a:pPr marL="0" indent="0" algn="l">
+              <a:lnSpc>
+                <a:spcPct val="100000"/>
+              </a:lnSpc>
+              <a:spcBef>
+                <a:spcPts val="200"/>
+              </a:spcBef>
+              <a:spcAft>
+                <a:spcPts val="0"/>
+              </a:spcAft>
+              <a:buNone/>
+            </a:pPr>
+            <a:r>
+              <a:rPr lang="en-US" sz="750" b="0" i="0" dirty="0">
+                <a:solidFill>
+                  <a:srgbClr val="5F6368"/>
+                </a:solidFill>
+                <a:latin typeface="Arial"/>
+                <a:cs typeface="Arial"/>
+              </a:rPr>
+              <a:t>asia-south1 · one doc per incident</a:t>
+            </a:r>
+          </a:p>
+          <a:p>
+            <a:pPr marL="0" indent="0" algn="l">
+              <a:lnSpc>
+                <a:spcPct val="100000"/>
+              </a:lnSpc>
+              <a:spcBef>
                 <a:spcPts val="400"/>
-              </a:spcAft>
+              </a:spcBef>
+              <a:spcAft>
+                <a:spcPts val="0"/>
+              </a:spcAft>
+              <a:buNone/>
             </a:pPr>
             <a:r>
-              <a:rPr sz="950" b="1" i="0">
+              <a:rPr lang="en-US" sz="750" b="0" i="0" dirty="0">
                 <a:solidFill>
                   <a:srgbClr val="1A1A1A"/>
                 </a:solidFill>
                 <a:latin typeface="Arial"/>
-              </a:rPr>
-              <a:t>Cloud Firestore</a:t>
-            </a:r>
-          </a:p>
-          <a:p>
-            <a:pPr algn="l">
-              <a:spcAft>
+                <a:cs typeface="Arial"/>
+              </a:rPr>
+              <a:t>live fields · GPS trail · transcript</a:t>
+            </a:r>
+          </a:p>
+          <a:p>
+            <a:pPr marL="0" indent="0" algn="l">
+              <a:lnSpc>
+                <a:spcPct val="100000"/>
+              </a:lnSpc>
+              <a:spcBef>
+                <a:spcPts val="0"/>
+              </a:spcBef>
+              <a:spcAft>
+                <a:spcPts val="0"/>
+              </a:spcAft>
+              <a:buNone/>
+            </a:pPr>
+            <a:r>
+              <a:rPr lang="en-US" sz="750" b="0" i="0" dirty="0">
+                <a:solidFill>
+                  <a:srgbClr val="1A1A1A"/>
+                </a:solidFill>
+                <a:latin typeface="Arial"/>
+                <a:cs typeface="Arial"/>
+              </a:rPr>
+              <a:t>responder messages · snaps</a:t>
+            </a:r>
+          </a:p>
+          <a:p>
+            <a:pPr marL="0" indent="0" algn="l">
+              <a:lnSpc>
+                <a:spcPct val="100000"/>
+              </a:lnSpc>
+              <a:spcBef>
+                <a:spcPts val="0"/>
+              </a:spcBef>
+              <a:spcAft>
+                <a:spcPts val="0"/>
+              </a:spcAft>
+              <a:buNone/>
+            </a:pPr>
+            <a:r>
+              <a:rPr lang="en-US" sz="750" b="0" i="0" dirty="0">
+                <a:solidFill>
+                  <a:srgbClr val="1A1A1A"/>
+                </a:solidFill>
+                <a:latin typeface="Arial"/>
+                <a:cs typeface="Arial"/>
+              </a:rPr>
+              <a:t>WebRTC handshake</a:t>
+            </a:r>
+          </a:p>
+          <a:p>
+            <a:pPr marL="0" indent="0" algn="l">
+              <a:lnSpc>
+                <a:spcPct val="100000"/>
+              </a:lnSpc>
+              <a:spcBef>
                 <a:spcPts val="400"/>
-              </a:spcAft>
+              </a:spcBef>
+              <a:spcAft>
+                <a:spcPts val="0"/>
+              </a:spcAft>
+              <a:buNone/>
             </a:pPr>
             <a:r>
-              <a:rPr sz="750" b="0" i="0">
-                <a:solidFill>
-                  <a:srgbClr val="5F6368"/>
-                </a:solidFill>
-                <a:latin typeface="Arial"/>
-              </a:rPr>
-              <a:t>asia-south1</a:t>
-            </a:r>
-          </a:p>
-          <a:p>
-            <a:pPr algn="l">
-              <a:spcAft>
-                <a:spcPts val="400"/>
-              </a:spcAft>
-            </a:pPr>
-            <a:r>
-              <a:rPr sz="750" b="0" i="0">
-                <a:solidFill>
-                  <a:srgbClr val="1A1A1A"/>
-                </a:solidFill>
-                <a:latin typeface="Arial"/>
-              </a:rPr>
-              <a:t>incidents · live fields · GPS trail · messages · WebRTC signalling · security rules</a:t>
-            </a:r>
-          </a:p>
-          <a:p>
-            <a:pPr algn="l">
-              <a:spcAft>
-                <a:spcPts val="400"/>
-              </a:spcAft>
-            </a:pPr>
-            <a:r>
-              <a:rPr sz="750" b="1" i="0">
+              <a:rPr lang="en-US" sz="750" b="1" i="0" dirty="0">
                 <a:solidFill>
                   <a:srgbClr val="2F9E44"/>
                 </a:solidFill>
                 <a:latin typeface="Arial"/>
-              </a:rPr>
-              <a:t>Realtime listeners replace a server</a:t>
-            </a:r>
-          </a:p>
-        </p:txBody>
-      </p:sp>
-      <p:sp>
-        <p:nvSpPr>
-          <p:cNvPr id="123" name="TextBox 122"/>
-          <p:cNvSpPr txBox="1"/>
-          <p:nvPr/>
-        </p:nvSpPr>
-        <p:spPr>
-          <a:xfrm>
-            <a:off x="7269480" y="1325880"/>
-            <a:ext cx="1508760" cy="201168"/>
-          </a:xfrm>
-          <a:prstGeom prst="rect">
-            <a:avLst/>
-          </a:prstGeom>
-          <a:noFill/>
-        </p:spPr>
-        <p:txBody>
-          <a:bodyPr wrap="square" lIns="0" tIns="0" rIns="0" bIns="0" anchor="t"/>
-          <a:lstStyle/>
-          <a:p>
-            <a:pPr algn="l"/>
-            <a:r>
-              <a:rPr sz="800" b="1" i="0">
-                <a:solidFill>
-                  <a:srgbClr val="2F9E44"/>
-                </a:solidFill>
-                <a:latin typeface="Arial"/>
-              </a:rPr>
-              <a:t>RESPONDERS</a:t>
-            </a:r>
-          </a:p>
-        </p:txBody>
-      </p:sp>
-      <p:sp>
-        <p:nvSpPr>
-          <p:cNvPr id="124" name="Rounded Rectangle 123"/>
+                <a:cs typeface="Arial"/>
+              </a:rPr>
+              <a:t>Listeners sync data live</a:t>
+            </a:r>
+          </a:p>
+        </p:txBody>
+      </p:sp>
+      <p:sp>
+        <p:nvSpPr>
+          <p:cNvPr id="312" name="Auth and security rules"/>
           <p:cNvSpPr/>
           <p:nvPr/>
         </p:nvSpPr>
         <p:spPr>
           <a:xfrm>
-            <a:off x="7269480" y="1554480"/>
-            <a:ext cx="1508760" cy="1097280"/>
+            <a:off x="4910328" y="2615184"/>
+            <a:ext cx="1517904" cy="630936"/>
           </a:xfrm>
           <a:prstGeom prst="roundRect">
             <a:avLst>
-              <a:gd name="adj" fmla="val 8000"/>
-            </a:avLst>
-          </a:prstGeom>
-          <a:solidFill>
-            <a:srgbClr val="E3F4E6"/>
-          </a:solidFill>
-          <a:ln>
-            <a:noFill/>
-          </a:ln>
-          <a:effectLst/>
-        </p:spPr>
-        <p:style>
-          <a:lnRef idx="1">
-            <a:schemeClr val="accent1"/>
-          </a:lnRef>
-          <a:fillRef idx="3">
-            <a:schemeClr val="accent1"/>
-          </a:fillRef>
-          <a:effectRef idx="2">
-            <a:schemeClr val="accent1"/>
-          </a:effectRef>
-          <a:fontRef idx="minor">
-            <a:schemeClr val="lt1"/>
-          </a:fontRef>
-        </p:style>
-        <p:txBody>
-          <a:bodyPr wrap="square" tIns="91440" bIns="91440" rtlCol="0" anchor="ctr"/>
-          <a:lstStyle/>
-          <a:p>
-            <a:pPr algn="l"/>
-            <a:r>
-              <a:rPr sz="950" b="1" i="0">
-                <a:solidFill>
-                  <a:srgbClr val="1A1A1A"/>
-                </a:solidFill>
-                <a:latin typeface="Arial"/>
-              </a:rPr>
-              <a:t>Responder console</a:t>
-            </a:r>
-          </a:p>
-          <a:p>
-            <a:pPr algn="l"/>
-            <a:r>
-              <a:rPr sz="750" b="0" i="0">
-                <a:solidFill>
-                  <a:srgbClr val="5F6368"/>
-                </a:solidFill>
-                <a:latin typeface="Arial"/>
-              </a:rPr>
-              <a:t>React + Vite · Firebase Auth · Hosting · ECharts · Leaflet / Maps JS</a:t>
-            </a:r>
-          </a:p>
-        </p:txBody>
-      </p:sp>
-      <p:sp>
-        <p:nvSpPr>
-          <p:cNvPr id="125" name="Rounded Rectangle 124"/>
-          <p:cNvSpPr/>
-          <p:nvPr/>
-        </p:nvSpPr>
-        <p:spPr>
-          <a:xfrm>
-            <a:off x="7269480" y="2743200"/>
-            <a:ext cx="1508760" cy="749808"/>
-          </a:xfrm>
-          <a:prstGeom prst="roundRect">
-            <a:avLst>
-              <a:gd name="adj" fmla="val 8000"/>
-            </a:avLst>
-          </a:prstGeom>
-          <a:solidFill>
-            <a:srgbClr val="E3F4E6"/>
-          </a:solidFill>
-          <a:ln>
-            <a:noFill/>
-          </a:ln>
-          <a:effectLst/>
-        </p:spPr>
-        <p:style>
-          <a:lnRef idx="1">
-            <a:schemeClr val="accent1"/>
-          </a:lnRef>
-          <a:fillRef idx="3">
-            <a:schemeClr val="accent1"/>
-          </a:fillRef>
-          <a:effectRef idx="2">
-            <a:schemeClr val="accent1"/>
-          </a:effectRef>
-          <a:fontRef idx="minor">
-            <a:schemeClr val="lt1"/>
-          </a:fontRef>
-        </p:style>
-        <p:txBody>
-          <a:bodyPr wrap="square" tIns="91440" bIns="91440" rtlCol="0" anchor="ctr"/>
-          <a:lstStyle/>
-          <a:p>
-            <a:pPr algn="l"/>
-            <a:r>
-              <a:rPr sz="900" b="1" i="0">
-                <a:solidFill>
-                  <a:srgbClr val="1A1A1A"/>
-                </a:solidFill>
-                <a:latin typeface="Arial"/>
-              </a:rPr>
-              <a:t>Analytics export</a:t>
-            </a:r>
-          </a:p>
-          <a:p>
-            <a:pPr algn="l"/>
-            <a:r>
-              <a:rPr sz="750" b="0" i="0">
-                <a:solidFill>
-                  <a:srgbClr val="5F6368"/>
-                </a:solidFill>
-                <a:latin typeface="Arial"/>
-              </a:rPr>
-              <a:t>anonymised → BigQuery</a:t>
-            </a:r>
-          </a:p>
-        </p:txBody>
-      </p:sp>
-      <p:cxnSp>
-        <p:nvCxnSpPr>
-          <p:cNvPr id="126" name="Connector 125"/>
-          <p:cNvCxnSpPr/>
-          <p:nvPr/>
-        </p:nvCxnSpPr>
-        <p:spPr>
-          <a:xfrm>
-            <a:off x="2148840" y="1920240"/>
-            <a:ext cx="640080" cy="0"/>
-          </a:xfrm>
-          <a:prstGeom prst="line">
-            <a:avLst/>
-          </a:prstGeom>
-          <a:ln w="19050">
-            <a:solidFill>
-              <a:srgbClr val="1A73E8"/>
-            </a:solidFill>
-            <a:headEnd type="triangle" w="med" len="med"/>
-            <a:tailEnd type="triangle" w="med" len="med"/>
-          </a:ln>
-        </p:spPr>
-        <p:style>
-          <a:lnRef idx="2">
-            <a:schemeClr val="accent1"/>
-          </a:lnRef>
-          <a:fillRef idx="0">
-            <a:schemeClr val="accent1"/>
-          </a:fillRef>
-          <a:effectRef idx="1">
-            <a:schemeClr val="accent1"/>
-          </a:effectRef>
-          <a:fontRef idx="minor">
-            <a:schemeClr val="tx1"/>
-          </a:fontRef>
-        </p:style>
-      </p:cxnSp>
-      <p:sp>
-        <p:nvSpPr>
-          <p:cNvPr id="127" name="TextBox 126"/>
-          <p:cNvSpPr txBox="1"/>
-          <p:nvPr/>
-        </p:nvSpPr>
-        <p:spPr>
-          <a:xfrm>
-            <a:off x="2130552" y="1975104"/>
-            <a:ext cx="676656" cy="310896"/>
-          </a:xfrm>
-          <a:prstGeom prst="rect">
-            <a:avLst/>
-          </a:prstGeom>
-          <a:noFill/>
-        </p:spPr>
-        <p:txBody>
-          <a:bodyPr wrap="square" lIns="0" tIns="0" rIns="0" bIns="0" anchor="t"/>
-          <a:lstStyle/>
-          <a:p>
-            <a:pPr algn="ctr"/>
-            <a:r>
-              <a:rPr sz="550" b="0" i="0">
-                <a:solidFill>
-                  <a:srgbClr val="1A73E8"/>
-                </a:solidFill>
-                <a:latin typeface="Arial"/>
-              </a:rPr>
-              <a:t>audio, frames →</a:t>
-            </a:r>
-          </a:p>
-          <a:p>
-            <a:pPr algn="ctr"/>
-            <a:r>
-              <a:rPr sz="550" b="0" i="0">
-                <a:solidFill>
-                  <a:srgbClr val="1A73E8"/>
-                </a:solidFill>
-                <a:latin typeface="Arial"/>
-              </a:rPr>
-              <a:t>← voice, tool calls</a:t>
-            </a:r>
-          </a:p>
-        </p:txBody>
-      </p:sp>
-      <p:cxnSp>
-        <p:nvCxnSpPr>
-          <p:cNvPr id="128" name="Connector 127"/>
-          <p:cNvCxnSpPr/>
-          <p:nvPr/>
-        </p:nvCxnSpPr>
-        <p:spPr>
-          <a:xfrm>
-            <a:off x="1261872" y="3072384"/>
-            <a:ext cx="0" cy="585216"/>
-          </a:xfrm>
-          <a:prstGeom prst="line">
-            <a:avLst/>
-          </a:prstGeom>
-          <a:ln w="15875">
-            <a:solidFill>
-              <a:srgbClr val="5F6368"/>
-            </a:solidFill>
-            <a:tailEnd type="triangle" w="med" len="med"/>
-          </a:ln>
-        </p:spPr>
-        <p:style>
-          <a:lnRef idx="2">
-            <a:schemeClr val="accent1"/>
-          </a:lnRef>
-          <a:fillRef idx="0">
-            <a:schemeClr val="accent1"/>
-          </a:fillRef>
-          <a:effectRef idx="1">
-            <a:schemeClr val="accent1"/>
-          </a:effectRef>
-          <a:fontRef idx="minor">
-            <a:schemeClr val="tx1"/>
-          </a:fontRef>
-        </p:style>
-      </p:cxnSp>
-      <p:cxnSp>
-        <p:nvCxnSpPr>
-          <p:cNvPr id="129" name="Connector 128"/>
-          <p:cNvCxnSpPr/>
-          <p:nvPr/>
-        </p:nvCxnSpPr>
-        <p:spPr>
-          <a:xfrm>
-            <a:off x="1261872" y="3657600"/>
-            <a:ext cx="4864608" cy="0"/>
-          </a:xfrm>
-          <a:prstGeom prst="line">
-            <a:avLst/>
-          </a:prstGeom>
-          <a:ln w="15875">
-            <a:solidFill>
-              <a:srgbClr val="5F6368"/>
-            </a:solidFill>
-            <a:tailEnd type="triangle" w="med" len="med"/>
-          </a:ln>
-        </p:spPr>
-        <p:style>
-          <a:lnRef idx="2">
-            <a:schemeClr val="accent1"/>
-          </a:lnRef>
-          <a:fillRef idx="0">
-            <a:schemeClr val="accent1"/>
-          </a:fillRef>
-          <a:effectRef idx="1">
-            <a:schemeClr val="accent1"/>
-          </a:effectRef>
-          <a:fontRef idx="minor">
-            <a:schemeClr val="tx1"/>
-          </a:fontRef>
-        </p:style>
-      </p:cxnSp>
-      <p:cxnSp>
-        <p:nvCxnSpPr>
-          <p:cNvPr id="130" name="Connector 129"/>
-          <p:cNvCxnSpPr/>
-          <p:nvPr/>
-        </p:nvCxnSpPr>
-        <p:spPr>
-          <a:xfrm flipV="1">
-            <a:off x="6126480" y="3493008"/>
-            <a:ext cx="0" cy="164592"/>
-          </a:xfrm>
-          <a:prstGeom prst="line">
-            <a:avLst/>
-          </a:prstGeom>
-          <a:ln w="15875">
-            <a:solidFill>
-              <a:srgbClr val="5F6368"/>
-            </a:solidFill>
-            <a:tailEnd type="triangle" w="med" len="med"/>
-          </a:ln>
-        </p:spPr>
-        <p:style>
-          <a:lnRef idx="2">
-            <a:schemeClr val="accent1"/>
-          </a:lnRef>
-          <a:fillRef idx="0">
-            <a:schemeClr val="accent1"/>
-          </a:fillRef>
-          <a:effectRef idx="1">
-            <a:schemeClr val="accent1"/>
-          </a:effectRef>
-          <a:fontRef idx="minor">
-            <a:schemeClr val="tx1"/>
-          </a:fontRef>
-        </p:style>
-      </p:cxnSp>
-      <p:sp>
-        <p:nvSpPr>
-          <p:cNvPr id="131" name="TextBox 130"/>
-          <p:cNvSpPr txBox="1"/>
-          <p:nvPr/>
-        </p:nvSpPr>
-        <p:spPr>
-          <a:xfrm>
-            <a:off x="1828800" y="3502152"/>
-            <a:ext cx="3291840" cy="164592"/>
-          </a:xfrm>
-          <a:prstGeom prst="rect">
-            <a:avLst/>
-          </a:prstGeom>
-          <a:noFill/>
-        </p:spPr>
-        <p:txBody>
-          <a:bodyPr wrap="square" lIns="0" tIns="0" rIns="0" bIns="0" anchor="t"/>
-          <a:lstStyle/>
-          <a:p>
-            <a:pPr algn="l"/>
-            <a:r>
-              <a:rPr sz="650" b="0" i="0">
-                <a:solidFill>
-                  <a:srgbClr val="5F6368"/>
-                </a:solidFill>
-                <a:latin typeface="Arial"/>
-              </a:rPr>
-              <a:t>tool results written as live fields (shared incident client)</a:t>
-            </a:r>
-          </a:p>
-        </p:txBody>
-      </p:sp>
-      <p:cxnSp>
-        <p:nvCxnSpPr>
-          <p:cNvPr id="132" name="Connector 131"/>
-          <p:cNvCxnSpPr/>
-          <p:nvPr/>
-        </p:nvCxnSpPr>
-        <p:spPr>
-          <a:xfrm>
-            <a:off x="6949440" y="2103120"/>
-            <a:ext cx="320040" cy="0"/>
-          </a:xfrm>
-          <a:prstGeom prst="line">
-            <a:avLst/>
-          </a:prstGeom>
-          <a:ln w="19050">
-            <a:solidFill>
-              <a:srgbClr val="2F9E44"/>
-            </a:solidFill>
-            <a:headEnd type="triangle" w="med" len="med"/>
-            <a:tailEnd type="triangle" w="med" len="med"/>
-          </a:ln>
-        </p:spPr>
-        <p:style>
-          <a:lnRef idx="2">
-            <a:schemeClr val="accent1"/>
-          </a:lnRef>
-          <a:fillRef idx="0">
-            <a:schemeClr val="accent1"/>
-          </a:fillRef>
-          <a:effectRef idx="1">
-            <a:schemeClr val="accent1"/>
-          </a:effectRef>
-          <a:fontRef idx="minor">
-            <a:schemeClr val="tx1"/>
-          </a:fontRef>
-        </p:style>
-      </p:cxnSp>
-      <p:sp>
-        <p:nvSpPr>
-          <p:cNvPr id="133" name="TextBox 132"/>
-          <p:cNvSpPr txBox="1"/>
-          <p:nvPr/>
-        </p:nvSpPr>
-        <p:spPr>
-          <a:xfrm>
-            <a:off x="6876288" y="2176272"/>
-            <a:ext cx="457200" cy="274320"/>
-          </a:xfrm>
-          <a:prstGeom prst="rect">
-            <a:avLst/>
-          </a:prstGeom>
-          <a:noFill/>
-        </p:spPr>
-        <p:txBody>
-          <a:bodyPr wrap="square" lIns="0" tIns="0" rIns="0" bIns="0" anchor="t"/>
-          <a:lstStyle/>
-          <a:p>
-            <a:pPr algn="ctr"/>
-            <a:r>
-              <a:rPr sz="550" b="0" i="0">
-                <a:solidFill>
-                  <a:srgbClr val="2F9E44"/>
-                </a:solidFill>
-                <a:latin typeface="Arial"/>
-              </a:rPr>
-              <a:t>live sync</a:t>
-            </a:r>
-          </a:p>
-        </p:txBody>
-      </p:sp>
-      <p:sp>
-        <p:nvSpPr>
-          <p:cNvPr id="134" name="Rounded Rectangle 133"/>
-          <p:cNvSpPr/>
-          <p:nvPr/>
-        </p:nvSpPr>
-        <p:spPr>
-          <a:xfrm>
-            <a:off x="365760" y="3840480"/>
-            <a:ext cx="1600200" cy="548640"/>
-          </a:xfrm>
-          <a:prstGeom prst="roundRect">
-            <a:avLst>
-              <a:gd name="adj" fmla="val 8000"/>
+              <a:gd name="adj" fmla="val 8696"/>
             </a:avLst>
           </a:prstGeom>
           <a:solidFill>
@@ -25126,66 +25123,405 @@
             <a:solidFill>
               <a:srgbClr val="DADCE0"/>
             </a:solidFill>
+            <a:round/>
           </a:ln>
-          <a:effectLst/>
-        </p:spPr>
-        <p:style>
-          <a:lnRef idx="1">
-            <a:schemeClr val="accent1"/>
-          </a:lnRef>
-          <a:fillRef idx="3">
-            <a:schemeClr val="accent1"/>
-          </a:fillRef>
-          <a:effectRef idx="2">
-            <a:schemeClr val="accent1"/>
-          </a:effectRef>
-          <a:fontRef idx="minor">
-            <a:schemeClr val="lt1"/>
-          </a:fontRef>
-        </p:style>
-        <p:txBody>
-          <a:bodyPr wrap="square" lIns="64008" tIns="64008" rIns="64008" bIns="64008" rtlCol="0" anchor="ctr"/>
-          <a:lstStyle/>
-          <a:p>
-            <a:pPr algn="l"/>
-            <a:r>
-              <a:rPr sz="800" b="1" i="0">
+        </p:spPr>
+        <p:txBody>
+          <a:bodyPr wrap="square" lIns="73152" tIns="54864" rIns="73152" bIns="36576" rtlCol="0" anchor="t">
+            <a:noAutofit/>
+          </a:bodyPr>
+          <a:lstStyle/>
+          <a:p>
+            <a:pPr marL="0" indent="0" algn="l">
+              <a:lnSpc>
+                <a:spcPct val="100000"/>
+              </a:lnSpc>
+              <a:spcBef>
+                <a:spcPts val="0"/>
+              </a:spcBef>
+              <a:spcAft>
+                <a:spcPts val="0"/>
+              </a:spcAft>
+              <a:buNone/>
+            </a:pPr>
+            <a:r>
+              <a:rPr lang="en-US" sz="850" b="1" i="0" dirty="0">
                 <a:solidFill>
                   <a:srgbClr val="1A1A1A"/>
                 </a:solidFill>
                 <a:latin typeface="Arial"/>
-              </a:rPr>
-              <a:t>Live video + listen-in</a:t>
-            </a:r>
-          </a:p>
-          <a:p>
-            <a:pPr algn="l"/>
-            <a:r>
-              <a:rPr sz="700" b="0" i="0">
+                <a:cs typeface="Arial"/>
+              </a:rPr>
+              <a:t>Auth · security rules</a:t>
+            </a:r>
+          </a:p>
+          <a:p>
+            <a:pPr marL="0" indent="0" algn="l">
+              <a:lnSpc>
+                <a:spcPct val="100000"/>
+              </a:lnSpc>
+              <a:spcBef>
+                <a:spcPts val="200"/>
+              </a:spcBef>
+              <a:spcAft>
+                <a:spcPts val="0"/>
+              </a:spcAft>
+              <a:buNone/>
+            </a:pPr>
+            <a:r>
+              <a:rPr lang="en-US" sz="750" b="0" i="0" dirty="0">
                 <a:solidFill>
                   <a:srgbClr val="5F6368"/>
                 </a:solidFill>
                 <a:latin typeface="Arial"/>
-              </a:rPr>
-              <a:t>P2P WebRTC, Google STUN</a:t>
-            </a:r>
-          </a:p>
-        </p:txBody>
-      </p:sp>
-      <p:sp>
-        <p:nvSpPr>
-          <p:cNvPr id="135" name="Rounded Rectangle 134"/>
+                <a:cs typeface="Arial"/>
+              </a:rPr>
+              <a:t>callers: anonymous sign-in</a:t>
+            </a:r>
+          </a:p>
+          <a:p>
+            <a:pPr marL="0" indent="0" algn="l">
+              <a:lnSpc>
+                <a:spcPct val="100000"/>
+              </a:lnSpc>
+              <a:spcBef>
+                <a:spcPts val="0"/>
+              </a:spcBef>
+              <a:spcAft>
+                <a:spcPts val="0"/>
+              </a:spcAft>
+              <a:buNone/>
+            </a:pPr>
+            <a:r>
+              <a:rPr lang="en-US" sz="750" b="0" i="0" dirty="0">
+                <a:solidFill>
+                  <a:srgbClr val="5F6368"/>
+                </a:solidFill>
+                <a:latin typeface="Arial"/>
+                <a:cs typeface="Arial"/>
+              </a:rPr>
+              <a:t>responders: email + roles</a:t>
+            </a:r>
+          </a:p>
+          <a:p>
+            <a:pPr marL="0" indent="0" algn="l">
+              <a:lnSpc>
+                <a:spcPct val="100000"/>
+              </a:lnSpc>
+              <a:spcBef>
+                <a:spcPts val="0"/>
+              </a:spcBef>
+              <a:spcAft>
+                <a:spcPts val="0"/>
+              </a:spcAft>
+              <a:buNone/>
+            </a:pPr>
+            <a:r>
+              <a:rPr lang="en-US" sz="750" b="0" i="0" dirty="0">
+                <a:solidFill>
+                  <a:srgbClr val="5F6368"/>
+                </a:solidFill>
+                <a:latin typeface="Arial"/>
+                <a:cs typeface="Arial"/>
+              </a:rPr>
+              <a:t>every write schema-checked</a:t>
+            </a:r>
+          </a:p>
+        </p:txBody>
+      </p:sp>
+      <p:sp>
+        <p:nvSpPr>
+          <p:cNvPr id="313" name="Responder console"/>
           <p:cNvSpPr/>
           <p:nvPr/>
         </p:nvSpPr>
         <p:spPr>
           <a:xfrm>
-            <a:off x="2057400" y="3840480"/>
-            <a:ext cx="1600200" cy="548640"/>
+            <a:off x="7132320" y="1536192"/>
+            <a:ext cx="1645920" cy="1773936"/>
           </a:xfrm>
           <a:prstGeom prst="roundRect">
             <a:avLst>
-              <a:gd name="adj" fmla="val 8000"/>
+              <a:gd name="adj" fmla="val 4444"/>
+            </a:avLst>
+          </a:prstGeom>
+          <a:solidFill>
+            <a:srgbClr val="E3F4E6"/>
+          </a:solidFill>
+          <a:ln>
+            <a:noFill/>
+          </a:ln>
+        </p:spPr>
+        <p:txBody>
+          <a:bodyPr wrap="square" lIns="73152" tIns="54864" rIns="73152" bIns="36576" rtlCol="0" anchor="t">
+            <a:noAutofit/>
+          </a:bodyPr>
+          <a:lstStyle/>
+          <a:p>
+            <a:pPr marL="0" indent="0" algn="l">
+              <a:lnSpc>
+                <a:spcPct val="100000"/>
+              </a:lnSpc>
+              <a:spcBef>
+                <a:spcPts val="0"/>
+              </a:spcBef>
+              <a:spcAft>
+                <a:spcPts val="0"/>
+              </a:spcAft>
+              <a:buNone/>
+            </a:pPr>
+            <a:r>
+              <a:rPr lang="en-US" sz="950" b="1" i="0" dirty="0">
+                <a:solidFill>
+                  <a:srgbClr val="1A1A1A"/>
+                </a:solidFill>
+                <a:latin typeface="Arial"/>
+                <a:cs typeface="Arial"/>
+              </a:rPr>
+              <a:t>Responder console</a:t>
+            </a:r>
+          </a:p>
+          <a:p>
+            <a:pPr marL="0" indent="0" algn="l">
+              <a:lnSpc>
+                <a:spcPct val="100000"/>
+              </a:lnSpc>
+              <a:spcBef>
+                <a:spcPts val="200"/>
+              </a:spcBef>
+              <a:spcAft>
+                <a:spcPts val="0"/>
+              </a:spcAft>
+              <a:buNone/>
+            </a:pPr>
+            <a:r>
+              <a:rPr lang="en-US" sz="750" b="0" i="0" dirty="0">
+                <a:solidFill>
+                  <a:srgbClr val="5F6368"/>
+                </a:solidFill>
+                <a:latin typeface="Arial"/>
+                <a:cs typeface="Arial"/>
+              </a:rPr>
+              <a:t>React + Vite · sign-in only</a:t>
+            </a:r>
+          </a:p>
+          <a:p>
+            <a:pPr marL="0" indent="0" algn="l">
+              <a:lnSpc>
+                <a:spcPct val="100000"/>
+              </a:lnSpc>
+              <a:spcBef>
+                <a:spcPts val="400"/>
+              </a:spcBef>
+              <a:spcAft>
+                <a:spcPts val="0"/>
+              </a:spcAft>
+              <a:buNone/>
+            </a:pPr>
+            <a:r>
+              <a:rPr lang="en-US" sz="750" b="0" i="0" dirty="0">
+                <a:solidFill>
+                  <a:srgbClr val="1A1A1A"/>
+                </a:solidFill>
+                <a:latin typeface="Arial"/>
+                <a:cs typeface="Arial"/>
+              </a:rPr>
+              <a:t>Live queue + siren alerts</a:t>
+            </a:r>
+          </a:p>
+          <a:p>
+            <a:pPr marL="0" indent="0" algn="l">
+              <a:lnSpc>
+                <a:spcPct val="100000"/>
+              </a:lnSpc>
+              <a:spcBef>
+                <a:spcPts val="0"/>
+              </a:spcBef>
+              <a:spcAft>
+                <a:spcPts val="0"/>
+              </a:spcAft>
+              <a:buNone/>
+            </a:pPr>
+            <a:r>
+              <a:rPr lang="en-US" sz="750" b="0" i="0" dirty="0">
+                <a:solidFill>
+                  <a:srgbClr val="1A1A1A"/>
+                </a:solidFill>
+                <a:latin typeface="Arial"/>
+                <a:cs typeface="Arial"/>
+              </a:rPr>
+              <a:t>Case board: map, evidence</a:t>
+            </a:r>
+          </a:p>
+          <a:p>
+            <a:pPr marL="0" indent="0" algn="l">
+              <a:lnSpc>
+                <a:spcPct val="100000"/>
+              </a:lnSpc>
+              <a:spcBef>
+                <a:spcPts val="0"/>
+              </a:spcBef>
+              <a:spcAft>
+                <a:spcPts val="0"/>
+              </a:spcAft>
+              <a:buNone/>
+            </a:pPr>
+            <a:r>
+              <a:rPr lang="en-US" sz="750" b="0" i="0" dirty="0">
+                <a:solidFill>
+                  <a:srgbClr val="1A1A1A"/>
+                </a:solidFill>
+                <a:latin typeface="Arial"/>
+                <a:cs typeface="Arial"/>
+              </a:rPr>
+              <a:t>Live video + listen-in</a:t>
+            </a:r>
+          </a:p>
+          <a:p>
+            <a:pPr marL="0" indent="0" algn="l">
+              <a:lnSpc>
+                <a:spcPct val="100000"/>
+              </a:lnSpc>
+              <a:spcBef>
+                <a:spcPts val="0"/>
+              </a:spcBef>
+              <a:spcAft>
+                <a:spcPts val="0"/>
+              </a:spcAft>
+              <a:buNone/>
+            </a:pPr>
+            <a:r>
+              <a:rPr lang="en-US" sz="750" b="0" i="0" dirty="0">
+                <a:solidFill>
+                  <a:srgbClr val="1A1A1A"/>
+                </a:solidFill>
+                <a:latin typeface="Arial"/>
+                <a:cs typeface="Arial"/>
+              </a:rPr>
+              <a:t>Acknowledge · message caller</a:t>
+            </a:r>
+          </a:p>
+          <a:p>
+            <a:pPr marL="0" indent="0" algn="l">
+              <a:lnSpc>
+                <a:spcPct val="100000"/>
+              </a:lnSpc>
+              <a:spcBef>
+                <a:spcPts val="0"/>
+              </a:spcBef>
+              <a:spcAft>
+                <a:spcPts val="0"/>
+              </a:spcAft>
+              <a:buNone/>
+            </a:pPr>
+            <a:r>
+              <a:rPr lang="en-US" sz="750" b="0" i="0" dirty="0">
+                <a:solidFill>
+                  <a:srgbClr val="1A1A1A"/>
+                </a:solidFill>
+                <a:latin typeface="Arial"/>
+                <a:cs typeface="Arial"/>
+              </a:rPr>
+              <a:t>History · analytics · admin</a:t>
+            </a:r>
+          </a:p>
+        </p:txBody>
+      </p:sp>
+      <p:sp>
+        <p:nvSpPr>
+          <p:cNvPr id="314" name="Console AI"/>
+          <p:cNvSpPr/>
+          <p:nvPr/>
+        </p:nvSpPr>
+        <p:spPr>
+          <a:xfrm>
+            <a:off x="7196328" y="2770632"/>
+            <a:ext cx="1517904" cy="475488"/>
+          </a:xfrm>
+          <a:prstGeom prst="roundRect">
+            <a:avLst>
+              <a:gd name="adj" fmla="val 11538"/>
+            </a:avLst>
+          </a:prstGeom>
+          <a:solidFill>
+            <a:srgbClr val="FFFFFF"/>
+          </a:solidFill>
+          <a:ln w="12700">
+            <a:solidFill>
+              <a:srgbClr val="1A73E8"/>
+            </a:solidFill>
+            <a:round/>
+          </a:ln>
+        </p:spPr>
+        <p:txBody>
+          <a:bodyPr wrap="square" lIns="73152" tIns="54864" rIns="73152" bIns="36576" rtlCol="0" anchor="t">
+            <a:noAutofit/>
+          </a:bodyPr>
+          <a:lstStyle/>
+          <a:p>
+            <a:pPr marL="0" indent="0" algn="l">
+              <a:lnSpc>
+                <a:spcPct val="100000"/>
+              </a:lnSpc>
+              <a:spcBef>
+                <a:spcPts val="0"/>
+              </a:spcBef>
+              <a:spcAft>
+                <a:spcPts val="0"/>
+              </a:spcAft>
+              <a:buNone/>
+            </a:pPr>
+            <a:r>
+              <a:rPr lang="en-US" sz="750" b="1" i="0" dirty="0">
+                <a:solidFill>
+                  <a:srgbClr val="1A73E8"/>
+                </a:solidFill>
+                <a:latin typeface="Arial"/>
+                <a:cs typeface="Arial"/>
+              </a:rPr>
+              <a:t>Ask AI · credibility · insights</a:t>
+            </a:r>
+          </a:p>
+          <a:p>
+            <a:pPr marL="0" indent="0" algn="l">
+              <a:lnSpc>
+                <a:spcPct val="100000"/>
+              </a:lnSpc>
+              <a:spcBef>
+                <a:spcPts val="100"/>
+              </a:spcBef>
+              <a:spcAft>
+                <a:spcPts val="0"/>
+              </a:spcAft>
+              <a:buNone/>
+            </a:pPr>
+            <a:r>
+              <a:rPr lang="en-US" sz="750" b="0" i="0" dirty="0">
+                <a:solidFill>
+                  <a:srgbClr val="5F6368"/>
+                </a:solidFill>
+                <a:latin typeface="Arial"/>
+                <a:cs typeface="Arial"/>
+              </a:rPr>
+              <a:t>via gemini-3.1-flash-lite</a:t>
+            </a:r>
+          </a:p>
+        </p:txBody>
+      </p:sp>
+      <p:sp>
+        <p:nvSpPr>
+          <p:cNvPr id="315" name="Location and routing"/>
+          <p:cNvSpPr/>
+          <p:nvPr/>
+        </p:nvSpPr>
+        <p:spPr>
+          <a:xfrm>
+            <a:off x="365760" y="3822192"/>
+            <a:ext cx="2000250" cy="731520"/>
+          </a:xfrm>
+          <a:prstGeom prst="roundRect">
+            <a:avLst>
+              <a:gd name="adj" fmla="val 7500"/>
             </a:avLst>
           </a:prstGeom>
           <a:solidFill>
@@ -25195,66 +25531,126 @@
             <a:solidFill>
               <a:srgbClr val="DADCE0"/>
             </a:solidFill>
+            <a:round/>
           </a:ln>
-          <a:effectLst/>
-        </p:spPr>
-        <p:style>
-          <a:lnRef idx="1">
-            <a:schemeClr val="accent1"/>
-          </a:lnRef>
-          <a:fillRef idx="3">
-            <a:schemeClr val="accent1"/>
-          </a:fillRef>
-          <a:effectRef idx="2">
-            <a:schemeClr val="accent1"/>
-          </a:effectRef>
-          <a:fontRef idx="minor">
-            <a:schemeClr val="lt1"/>
-          </a:fontRef>
-        </p:style>
-        <p:txBody>
-          <a:bodyPr wrap="square" lIns="64008" tIns="64008" rIns="64008" bIns="64008" rtlCol="0" anchor="ctr"/>
-          <a:lstStyle/>
-          <a:p>
-            <a:pPr algn="l"/>
-            <a:r>
-              <a:rPr sz="800" b="1" i="0">
+        </p:spPr>
+        <p:txBody>
+          <a:bodyPr wrap="square" lIns="73152" tIns="54864" rIns="73152" bIns="36576" rtlCol="0" anchor="t">
+            <a:noAutofit/>
+          </a:bodyPr>
+          <a:lstStyle/>
+          <a:p>
+            <a:pPr marL="0" indent="0" algn="l">
+              <a:lnSpc>
+                <a:spcPct val="100000"/>
+              </a:lnSpc>
+              <a:spcBef>
+                <a:spcPts val="0"/>
+              </a:spcBef>
+              <a:spcAft>
+                <a:spcPts val="0"/>
+              </a:spcAft>
+              <a:buNone/>
+            </a:pPr>
+            <a:r>
+              <a:rPr lang="en-US" sz="850" b="1" i="0" dirty="0">
                 <a:solidFill>
                   <a:srgbClr val="1A1A1A"/>
                 </a:solidFill>
                 <a:latin typeface="Arial"/>
-              </a:rPr>
-              <a:t>Evidence</a:t>
-            </a:r>
-          </a:p>
-          <a:p>
-            <a:pPr algn="l"/>
-            <a:r>
-              <a:rPr sz="700" b="0" i="0">
-                <a:solidFill>
-                  <a:srgbClr val="5F6368"/>
-                </a:solidFill>
-                <a:latin typeface="Arial"/>
-              </a:rPr>
-              <a:t>Apps Script → Google Drive</a:t>
-            </a:r>
-          </a:p>
-        </p:txBody>
-      </p:sp>
-      <p:sp>
-        <p:nvSpPr>
-          <p:cNvPr id="136" name="Rounded Rectangle 135"/>
+                <a:cs typeface="Arial"/>
+              </a:rPr>
+              <a:t>Location &amp; routing</a:t>
+            </a:r>
+          </a:p>
+          <a:p>
+            <a:pPr marL="0" indent="0" algn="l">
+              <a:lnSpc>
+                <a:spcPct val="100000"/>
+              </a:lnSpc>
+              <a:spcBef>
+                <a:spcPts val="200"/>
+              </a:spcBef>
+              <a:spcAft>
+                <a:spcPts val="0"/>
+              </a:spcAft>
+              <a:buNone/>
+            </a:pPr>
+            <a:r>
+              <a:rPr lang="en-US" sz="750" b="0" i="0" dirty="0">
+                <a:solidFill>
+                  <a:srgbClr val="1A1A1A"/>
+                </a:solidFill>
+                <a:latin typeface="Arial"/>
+                <a:cs typeface="Arial"/>
+              </a:rPr>
+              <a:t>GPS, else IP lookup</a:t>
+            </a:r>
+          </a:p>
+          <a:p>
+            <a:pPr marL="0" indent="0" algn="l">
+              <a:lnSpc>
+                <a:spcPct val="100000"/>
+              </a:lnSpc>
+              <a:spcBef>
+                <a:spcPts val="0"/>
+              </a:spcBef>
+              <a:spcAft>
+                <a:spcPts val="0"/>
+              </a:spcAft>
+              <a:buNone/>
+            </a:pPr>
+            <a:r>
+              <a:rPr lang="en-US" sz="750" b="0" i="0" dirty="0">
+                <a:solidFill>
+                  <a:srgbClr val="1A1A1A"/>
+                </a:solidFill>
+                <a:latin typeface="Arial"/>
+                <a:cs typeface="Arial"/>
+              </a:rPr>
+              <a:t>Nominatim + Photon: address, help</a:t>
+            </a:r>
+          </a:p>
+          <a:p>
+            <a:pPr marL="0" indent="0" algn="l">
+              <a:lnSpc>
+                <a:spcPct val="100000"/>
+              </a:lnSpc>
+              <a:spcBef>
+                <a:spcPts val="0"/>
+              </a:spcBef>
+              <a:spcAft>
+                <a:spcPts val="0"/>
+              </a:spcAft>
+              <a:buNone/>
+            </a:pPr>
+            <a:r>
+              <a:rPr lang="en-US" sz="750" b="0" i="0" dirty="0">
+                <a:solidFill>
+                  <a:srgbClr val="1A1A1A"/>
+                </a:solidFill>
+                <a:latin typeface="Arial"/>
+                <a:cs typeface="Arial"/>
+              </a:rPr>
+              <a:t>OSRM: route to police / hospital</a:t>
+            </a:r>
+          </a:p>
+        </p:txBody>
+      </p:sp>
+      <p:sp>
+        <p:nvSpPr>
+          <p:cNvPr id="316" name="Evidence recordings"/>
           <p:cNvSpPr/>
           <p:nvPr/>
         </p:nvSpPr>
         <p:spPr>
           <a:xfrm>
-            <a:off x="3749039" y="3840480"/>
-            <a:ext cx="1600200" cy="548640"/>
+            <a:off x="2503170" y="3822192"/>
+            <a:ext cx="2000250" cy="731520"/>
           </a:xfrm>
           <a:prstGeom prst="roundRect">
             <a:avLst>
-              <a:gd name="adj" fmla="val 8000"/>
+              <a:gd name="adj" fmla="val 7500"/>
             </a:avLst>
           </a:prstGeom>
           <a:solidFill>
@@ -25264,66 +25660,126 @@
             <a:solidFill>
               <a:srgbClr val="DADCE0"/>
             </a:solidFill>
+            <a:round/>
           </a:ln>
-          <a:effectLst/>
-        </p:spPr>
-        <p:style>
-          <a:lnRef idx="1">
-            <a:schemeClr val="accent1"/>
-          </a:lnRef>
-          <a:fillRef idx="3">
-            <a:schemeClr val="accent1"/>
-          </a:fillRef>
-          <a:effectRef idx="2">
-            <a:schemeClr val="accent1"/>
-          </a:effectRef>
-          <a:fontRef idx="minor">
-            <a:schemeClr val="lt1"/>
-          </a:fontRef>
-        </p:style>
-        <p:txBody>
-          <a:bodyPr wrap="square" lIns="64008" tIns="64008" rIns="64008" bIns="64008" rtlCol="0" anchor="ctr"/>
-          <a:lstStyle/>
-          <a:p>
-            <a:pPr algn="l"/>
-            <a:r>
-              <a:rPr sz="800" b="1" i="0">
+        </p:spPr>
+        <p:txBody>
+          <a:bodyPr wrap="square" lIns="73152" tIns="54864" rIns="73152" bIns="36576" rtlCol="0" anchor="t">
+            <a:noAutofit/>
+          </a:bodyPr>
+          <a:lstStyle/>
+          <a:p>
+            <a:pPr marL="0" indent="0" algn="l">
+              <a:lnSpc>
+                <a:spcPct val="100000"/>
+              </a:lnSpc>
+              <a:spcBef>
+                <a:spcPts val="0"/>
+              </a:spcBef>
+              <a:spcAft>
+                <a:spcPts val="0"/>
+              </a:spcAft>
+              <a:buNone/>
+            </a:pPr>
+            <a:r>
+              <a:rPr lang="en-US" sz="850" b="1" i="0" dirty="0">
                 <a:solidFill>
                   <a:srgbClr val="1A1A1A"/>
                 </a:solidFill>
                 <a:latin typeface="Arial"/>
-              </a:rPr>
-              <a:t>Case report + alerts</a:t>
-            </a:r>
-          </a:p>
-          <a:p>
-            <a:pPr algn="l"/>
-            <a:r>
-              <a:rPr sz="700" b="0" i="0">
-                <a:solidFill>
-                  <a:srgbClr val="5F6368"/>
-                </a:solidFill>
-                <a:latin typeface="Arial"/>
-              </a:rPr>
-              <a:t>Apps Script mail, PDF</a:t>
-            </a:r>
-          </a:p>
-        </p:txBody>
-      </p:sp>
-      <p:sp>
-        <p:nvSpPr>
-          <p:cNvPr id="137" name="Rounded Rectangle 136"/>
+                <a:cs typeface="Arial"/>
+              </a:rPr>
+              <a:t>Evidence recordings</a:t>
+            </a:r>
+          </a:p>
+          <a:p>
+            <a:pPr marL="0" indent="0" algn="l">
+              <a:lnSpc>
+                <a:spcPct val="100000"/>
+              </a:lnSpc>
+              <a:spcBef>
+                <a:spcPts val="200"/>
+              </a:spcBef>
+              <a:spcAft>
+                <a:spcPts val="0"/>
+              </a:spcAft>
+              <a:buNone/>
+            </a:pPr>
+            <a:r>
+              <a:rPr lang="en-US" sz="750" b="0" i="0" dirty="0">
+                <a:solidFill>
+                  <a:srgbClr val="1A1A1A"/>
+                </a:solidFill>
+                <a:latin typeface="Arial"/>
+                <a:cs typeface="Arial"/>
+              </a:rPr>
+              <a:t>Apps Script → Google Drive</a:t>
+            </a:r>
+          </a:p>
+          <a:p>
+            <a:pPr marL="0" indent="0" algn="l">
+              <a:lnSpc>
+                <a:spcPct val="100000"/>
+              </a:lnSpc>
+              <a:spcBef>
+                <a:spcPts val="0"/>
+              </a:spcBef>
+              <a:spcAft>
+                <a:spcPts val="0"/>
+              </a:spcAft>
+              <a:buNone/>
+            </a:pPr>
+            <a:r>
+              <a:rPr lang="en-US" sz="750" b="0" i="0" dirty="0">
+                <a:solidFill>
+                  <a:srgbClr val="1A1A1A"/>
+                </a:solidFill>
+                <a:latin typeface="Arial"/>
+                <a:cs typeface="Arial"/>
+              </a:rPr>
+              <a:t>camera video every 20 s + at end</a:t>
+            </a:r>
+          </a:p>
+          <a:p>
+            <a:pPr marL="0" indent="0" algn="l">
+              <a:lnSpc>
+                <a:spcPct val="100000"/>
+              </a:lnSpc>
+              <a:spcBef>
+                <a:spcPts val="0"/>
+              </a:spcBef>
+              <a:spcAft>
+                <a:spcPts val="0"/>
+              </a:spcAft>
+              <a:buNone/>
+            </a:pPr>
+            <a:r>
+              <a:rPr lang="en-US" sz="750" b="0" i="0" dirty="0">
+                <a:solidFill>
+                  <a:srgbClr val="1A1A1A"/>
+                </a:solidFill>
+                <a:latin typeface="Arial"/>
+                <a:cs typeface="Arial"/>
+              </a:rPr>
+              <a:t>call audio once, at the end</a:t>
+            </a:r>
+          </a:p>
+        </p:txBody>
+      </p:sp>
+      <p:sp>
+        <p:nvSpPr>
+          <p:cNvPr id="317" name="Case report and alerts"/>
           <p:cNvSpPr/>
           <p:nvPr/>
         </p:nvSpPr>
         <p:spPr>
           <a:xfrm>
-            <a:off x="5440679" y="3840480"/>
-            <a:ext cx="1600200" cy="548640"/>
+            <a:off x="4640580" y="3822192"/>
+            <a:ext cx="2000250" cy="731520"/>
           </a:xfrm>
           <a:prstGeom prst="roundRect">
             <a:avLst>
-              <a:gd name="adj" fmla="val 8000"/>
+              <a:gd name="adj" fmla="val 7500"/>
             </a:avLst>
           </a:prstGeom>
           <a:solidFill>
@@ -25333,149 +25789,1005 @@
             <a:solidFill>
               <a:srgbClr val="DADCE0"/>
             </a:solidFill>
+            <a:round/>
           </a:ln>
-          <a:effectLst/>
-        </p:spPr>
-        <p:style>
-          <a:lnRef idx="1">
-            <a:schemeClr val="accent1"/>
-          </a:lnRef>
-          <a:fillRef idx="3">
-            <a:schemeClr val="accent1"/>
-          </a:fillRef>
-          <a:effectRef idx="2">
-            <a:schemeClr val="accent1"/>
-          </a:effectRef>
-          <a:fontRef idx="minor">
-            <a:schemeClr val="lt1"/>
-          </a:fontRef>
-        </p:style>
-        <p:txBody>
-          <a:bodyPr wrap="square" lIns="64008" tIns="64008" rIns="64008" bIns="64008" rtlCol="0" anchor="ctr"/>
-          <a:lstStyle/>
-          <a:p>
-            <a:pPr algn="l"/>
-            <a:r>
-              <a:rPr sz="800" b="1" i="0">
+        </p:spPr>
+        <p:txBody>
+          <a:bodyPr wrap="square" lIns="73152" tIns="54864" rIns="73152" bIns="36576" rtlCol="0" anchor="t">
+            <a:noAutofit/>
+          </a:bodyPr>
+          <a:lstStyle/>
+          <a:p>
+            <a:pPr marL="0" indent="0" algn="l">
+              <a:lnSpc>
+                <a:spcPct val="100000"/>
+              </a:lnSpc>
+              <a:spcBef>
+                <a:spcPts val="0"/>
+              </a:spcBef>
+              <a:spcAft>
+                <a:spcPts val="0"/>
+              </a:spcAft>
+              <a:buNone/>
+            </a:pPr>
+            <a:r>
+              <a:rPr lang="en-US" sz="850" b="1" i="0" dirty="0">
                 <a:solidFill>
                   <a:srgbClr val="1A1A1A"/>
                 </a:solidFill>
                 <a:latin typeface="Arial"/>
-              </a:rPr>
-              <a:t>Location</a:t>
-            </a:r>
-          </a:p>
-          <a:p>
-            <a:pPr algn="l"/>
-            <a:r>
-              <a:rPr sz="700" b="0" i="0">
-                <a:solidFill>
-                  <a:srgbClr val="5F6368"/>
-                </a:solidFill>
-                <a:latin typeface="Arial"/>
-              </a:rPr>
-              <a:t>GPS/IP · Nominatim/Photon · OSRM</a:t>
-            </a:r>
-          </a:p>
-        </p:txBody>
-      </p:sp>
-      <p:sp>
-        <p:nvSpPr>
-          <p:cNvPr id="138" name="Rounded Rectangle 137"/>
+                <a:cs typeface="Arial"/>
+              </a:rPr>
+              <a:t>Case report + alerts</a:t>
+            </a:r>
+          </a:p>
+          <a:p>
+            <a:pPr marL="0" indent="0" algn="l">
+              <a:lnSpc>
+                <a:spcPct val="100000"/>
+              </a:lnSpc>
+              <a:spcBef>
+                <a:spcPts val="200"/>
+              </a:spcBef>
+              <a:spcAft>
+                <a:spcPts val="0"/>
+              </a:spcAft>
+              <a:buNone/>
+            </a:pPr>
+            <a:r>
+              <a:rPr lang="en-US" sz="750" b="0" i="0" dirty="0">
+                <a:solidFill>
+                  <a:srgbClr val="1A1A1A"/>
+                </a:solidFill>
+                <a:latin typeface="Arial"/>
+                <a:cs typeface="Arial"/>
+              </a:rPr>
+              <a:t>Apps Script mail: report + PDF</a:t>
+            </a:r>
+          </a:p>
+          <a:p>
+            <a:pPr marL="0" indent="0" algn="l">
+              <a:lnSpc>
+                <a:spcPct val="100000"/>
+              </a:lnSpc>
+              <a:spcBef>
+                <a:spcPts val="0"/>
+              </a:spcBef>
+              <a:spcAft>
+                <a:spcPts val="0"/>
+              </a:spcAft>
+              <a:buNone/>
+            </a:pPr>
+            <a:r>
+              <a:rPr lang="en-US" sz="750" b="0" i="0" dirty="0">
+                <a:solidFill>
+                  <a:srgbClr val="1A1A1A"/>
+                </a:solidFill>
+                <a:latin typeface="Arial"/>
+                <a:cs typeface="Arial"/>
+              </a:rPr>
+              <a:t>trusted contacts at high severity</a:t>
+            </a:r>
+          </a:p>
+          <a:p>
+            <a:pPr marL="0" indent="0" algn="l">
+              <a:lnSpc>
+                <a:spcPct val="100000"/>
+              </a:lnSpc>
+              <a:spcBef>
+                <a:spcPts val="0"/>
+              </a:spcBef>
+              <a:spcAft>
+                <a:spcPts val="0"/>
+              </a:spcAft>
+              <a:buNone/>
+            </a:pPr>
+            <a:r>
+              <a:rPr lang="en-US" sz="750" b="0" i="0" dirty="0">
+                <a:solidFill>
+                  <a:srgbClr val="1A1A1A"/>
+                </a:solidFill>
+                <a:latin typeface="Arial"/>
+                <a:cs typeface="Arial"/>
+              </a:rPr>
+              <a:t>reads the incident via Firestore REST</a:t>
+            </a:r>
+          </a:p>
+        </p:txBody>
+      </p:sp>
+      <p:sp>
+        <p:nvSpPr>
+          <p:cNvPr id="318" name="Live video and listen-in"/>
           <p:cNvSpPr/>
           <p:nvPr/>
         </p:nvSpPr>
         <p:spPr>
           <a:xfrm>
-            <a:off x="7132320" y="3840480"/>
-            <a:ext cx="1645920" cy="548640"/>
+            <a:off x="6777990" y="3822192"/>
+            <a:ext cx="2000250" cy="731520"/>
           </a:xfrm>
           <a:prstGeom prst="roundRect">
             <a:avLst>
-              <a:gd name="adj" fmla="val 8000"/>
+              <a:gd name="adj" fmla="val 7500"/>
             </a:avLst>
           </a:prstGeom>
+          <a:solidFill>
+            <a:srgbClr val="FFFFFF"/>
+          </a:solidFill>
+          <a:ln w="9525">
+            <a:solidFill>
+              <a:srgbClr val="DADCE0"/>
+            </a:solidFill>
+            <a:round/>
+          </a:ln>
+        </p:spPr>
+        <p:txBody>
+          <a:bodyPr wrap="square" lIns="73152" tIns="54864" rIns="73152" bIns="36576" rtlCol="0" anchor="t">
+            <a:noAutofit/>
+          </a:bodyPr>
+          <a:lstStyle/>
+          <a:p>
+            <a:pPr marL="0" indent="0" algn="l">
+              <a:lnSpc>
+                <a:spcPct val="100000"/>
+              </a:lnSpc>
+              <a:spcBef>
+                <a:spcPts val="0"/>
+              </a:spcBef>
+              <a:spcAft>
+                <a:spcPts val="0"/>
+              </a:spcAft>
+              <a:buNone/>
+            </a:pPr>
+            <a:r>
+              <a:rPr lang="en-US" sz="850" b="1" i="0" dirty="0">
+                <a:solidFill>
+                  <a:srgbClr val="1A1A1A"/>
+                </a:solidFill>
+                <a:latin typeface="Arial"/>
+                <a:cs typeface="Arial"/>
+              </a:rPr>
+              <a:t>Live video + listen-in</a:t>
+            </a:r>
+          </a:p>
+          <a:p>
+            <a:pPr marL="0" indent="0" algn="l">
+              <a:lnSpc>
+                <a:spcPct val="100000"/>
+              </a:lnSpc>
+              <a:spcBef>
+                <a:spcPts val="200"/>
+              </a:spcBef>
+              <a:spcAft>
+                <a:spcPts val="0"/>
+              </a:spcAft>
+              <a:buNone/>
+            </a:pPr>
+            <a:r>
+              <a:rPr lang="en-US" sz="750" b="0" i="0" dirty="0">
+                <a:solidFill>
+                  <a:srgbClr val="1A1A1A"/>
+                </a:solidFill>
+                <a:latin typeface="Arial"/>
+                <a:cs typeface="Arial"/>
+              </a:rPr>
+              <a:t>P2P WebRTC · Google STUN</a:t>
+            </a:r>
+          </a:p>
+          <a:p>
+            <a:pPr marL="0" indent="0" algn="l">
+              <a:lnSpc>
+                <a:spcPct val="100000"/>
+              </a:lnSpc>
+              <a:spcBef>
+                <a:spcPts val="0"/>
+              </a:spcBef>
+              <a:spcAft>
+                <a:spcPts val="0"/>
+              </a:spcAft>
+              <a:buNone/>
+            </a:pPr>
+            <a:r>
+              <a:rPr lang="en-US" sz="750" b="0" i="0" dirty="0">
+                <a:solidFill>
+                  <a:srgbClr val="1A1A1A"/>
+                </a:solidFill>
+                <a:latin typeface="Arial"/>
+                <a:cs typeface="Arial"/>
+              </a:rPr>
+              <a:t>media one way: phone → console</a:t>
+            </a:r>
+          </a:p>
+          <a:p>
+            <a:pPr marL="0" indent="0" algn="l">
+              <a:lnSpc>
+                <a:spcPct val="100000"/>
+              </a:lnSpc>
+              <a:spcBef>
+                <a:spcPts val="0"/>
+              </a:spcBef>
+              <a:spcAft>
+                <a:spcPts val="0"/>
+              </a:spcAft>
+              <a:buNone/>
+            </a:pPr>
+            <a:r>
+              <a:rPr lang="en-US" sz="750" b="0" i="0" dirty="0">
+                <a:solidFill>
+                  <a:srgbClr val="1A1A1A"/>
+                </a:solidFill>
+                <a:latin typeface="Arial"/>
+                <a:cs typeface="Arial"/>
+              </a:rPr>
+              <a:t>Firestore carries only the handshake</a:t>
+            </a:r>
+          </a:p>
+        </p:txBody>
+      </p:sp>
+      <p:cxnSp>
+        <p:nvCxnSpPr>
+          <p:cNvPr id="319" name="Phone to Gemini Live"/>
+          <p:cNvCxnSpPr/>
+          <p:nvPr/>
+        </p:nvCxnSpPr>
+        <p:spPr>
+          <a:xfrm>
+            <a:off x="2148840" y="1773936"/>
+            <a:ext cx="841248" cy="0"/>
+          </a:xfrm>
+          <a:prstGeom prst="straightConnector1">
+            <a:avLst/>
+          </a:prstGeom>
+          <a:ln w="22225">
+            <a:solidFill>
+              <a:srgbClr val="1A73E8"/>
+            </a:solidFill>
+            <a:round/>
+            <a:tailEnd type="triangle" w="med" len="med"/>
+          </a:ln>
+        </p:spPr>
+      </p:cxnSp>
+      <p:sp>
+        <p:nvSpPr>
+          <p:cNvPr id="320" name="Label: audio + frames"/>
+          <p:cNvSpPr txBox="1"/>
+          <p:nvPr/>
+        </p:nvSpPr>
+        <p:spPr>
+          <a:xfrm>
+            <a:off x="2148840" y="1627632"/>
+            <a:ext cx="841248" cy="128016"/>
+          </a:xfrm>
+          <a:prstGeom prst="rect">
+            <a:avLst/>
+          </a:prstGeom>
           <a:noFill/>
-          <a:ln w="9525">
+          <a:ln>
+            <a:noFill/>
+          </a:ln>
+        </p:spPr>
+        <p:txBody>
+          <a:bodyPr wrap="square" lIns="0" tIns="0" rIns="0" bIns="0" rtlCol="0" anchor="t">
+            <a:noAutofit/>
+          </a:bodyPr>
+          <a:lstStyle/>
+          <a:p>
+            <a:pPr marL="0" indent="0" algn="ctr">
+              <a:lnSpc>
+                <a:spcPct val="100000"/>
+              </a:lnSpc>
+              <a:spcBef>
+                <a:spcPts val="0"/>
+              </a:spcBef>
+              <a:spcAft>
+                <a:spcPts val="0"/>
+              </a:spcAft>
+              <a:buNone/>
+            </a:pPr>
+            <a:r>
+              <a:rPr lang="en-US" sz="700" b="0" i="0" dirty="0">
+                <a:solidFill>
+                  <a:srgbClr val="1A73E8"/>
+                </a:solidFill>
+                <a:latin typeface="Arial"/>
+                <a:cs typeface="Arial"/>
+              </a:rPr>
+              <a:t>audio + frames</a:t>
+            </a:r>
+          </a:p>
+        </p:txBody>
+      </p:sp>
+      <p:cxnSp>
+        <p:nvCxnSpPr>
+          <p:cNvPr id="321" name="Gemini Live to phone"/>
+          <p:cNvCxnSpPr/>
+          <p:nvPr/>
+        </p:nvCxnSpPr>
+        <p:spPr>
+          <a:xfrm flipH="1">
+            <a:off x="2148840" y="2011680"/>
+            <a:ext cx="841248" cy="0"/>
+          </a:xfrm>
+          <a:prstGeom prst="straightConnector1">
+            <a:avLst/>
+          </a:prstGeom>
+          <a:ln w="22225">
+            <a:solidFill>
+              <a:srgbClr val="1A73E8"/>
+            </a:solidFill>
+            <a:round/>
+            <a:tailEnd type="triangle" w="med" len="med"/>
+          </a:ln>
+        </p:spPr>
+      </p:cxnSp>
+      <p:sp>
+        <p:nvSpPr>
+          <p:cNvPr id="322" name="Label: voice, tool calls"/>
+          <p:cNvSpPr txBox="1"/>
+          <p:nvPr/>
+        </p:nvSpPr>
+        <p:spPr>
+          <a:xfrm>
+            <a:off x="2148840" y="2048256"/>
+            <a:ext cx="841248" cy="128016"/>
+          </a:xfrm>
+          <a:prstGeom prst="rect">
+            <a:avLst/>
+          </a:prstGeom>
+          <a:noFill/>
+          <a:ln>
+            <a:noFill/>
+          </a:ln>
+        </p:spPr>
+        <p:txBody>
+          <a:bodyPr wrap="square" lIns="0" tIns="0" rIns="0" bIns="0" rtlCol="0" anchor="t">
+            <a:noAutofit/>
+          </a:bodyPr>
+          <a:lstStyle/>
+          <a:p>
+            <a:pPr marL="0" indent="0" algn="ctr">
+              <a:lnSpc>
+                <a:spcPct val="100000"/>
+              </a:lnSpc>
+              <a:spcBef>
+                <a:spcPts val="0"/>
+              </a:spcBef>
+              <a:spcAft>
+                <a:spcPts val="0"/>
+              </a:spcAft>
+              <a:buNone/>
+            </a:pPr>
+            <a:r>
+              <a:rPr lang="en-US" sz="700" b="0" i="0" dirty="0">
+                <a:solidFill>
+                  <a:srgbClr val="1A73E8"/>
+                </a:solidFill>
+                <a:latin typeface="Arial"/>
+                <a:cs typeface="Arial"/>
+              </a:rPr>
+              <a:t>voice, tool calls</a:t>
+            </a:r>
+          </a:p>
+        </p:txBody>
+      </p:sp>
+      <p:cxnSp>
+        <p:nvCxnSpPr>
+          <p:cNvPr id="323" name="Phone to Flash-Lite after the call"/>
+          <p:cNvCxnSpPr/>
+          <p:nvPr/>
+        </p:nvCxnSpPr>
+        <p:spPr>
+          <a:xfrm>
+            <a:off x="2148840" y="2578608"/>
+            <a:ext cx="841248" cy="0"/>
+          </a:xfrm>
+          <a:prstGeom prst="straightConnector1">
+            <a:avLst/>
+          </a:prstGeom>
+          <a:ln w="19050">
+            <a:solidFill>
+              <a:srgbClr val="1A73E8"/>
+            </a:solidFill>
+            <a:prstDash val="dash"/>
+            <a:round/>
+            <a:tailEnd type="triangle" w="med" len="med"/>
+          </a:ln>
+        </p:spPr>
+      </p:cxnSp>
+      <p:sp>
+        <p:nvSpPr>
+          <p:cNvPr id="324" name="Label: after the call"/>
+          <p:cNvSpPr txBox="1"/>
+          <p:nvPr/>
+        </p:nvSpPr>
+        <p:spPr>
+          <a:xfrm>
+            <a:off x="2148840" y="2423160"/>
+            <a:ext cx="841248" cy="128016"/>
+          </a:xfrm>
+          <a:prstGeom prst="rect">
+            <a:avLst/>
+          </a:prstGeom>
+          <a:noFill/>
+          <a:ln>
+            <a:noFill/>
+          </a:ln>
+        </p:spPr>
+        <p:txBody>
+          <a:bodyPr wrap="square" lIns="0" tIns="0" rIns="0" bIns="0" rtlCol="0" anchor="t">
+            <a:noAutofit/>
+          </a:bodyPr>
+          <a:lstStyle/>
+          <a:p>
+            <a:pPr marL="0" indent="0" algn="ctr">
+              <a:lnSpc>
+                <a:spcPct val="100000"/>
+              </a:lnSpc>
+              <a:spcBef>
+                <a:spcPts val="0"/>
+              </a:spcBef>
+              <a:spcAft>
+                <a:spcPts val="0"/>
+              </a:spcAft>
+              <a:buNone/>
+            </a:pPr>
+            <a:r>
+              <a:rPr lang="en-US" sz="700" b="0" i="0" dirty="0">
+                <a:solidFill>
+                  <a:srgbClr val="1A73E8"/>
+                </a:solidFill>
+                <a:latin typeface="Arial"/>
+                <a:cs typeface="Arial"/>
+              </a:rPr>
+              <a:t>after the call</a:t>
+            </a:r>
+          </a:p>
+        </p:txBody>
+      </p:sp>
+      <p:cxnSp>
+        <p:nvCxnSpPr>
+          <p:cNvPr id="325" name="Firestore to console"/>
+          <p:cNvCxnSpPr/>
+          <p:nvPr/>
+        </p:nvCxnSpPr>
+        <p:spPr>
+          <a:xfrm>
+            <a:off x="6492240" y="1883664"/>
+            <a:ext cx="640080" cy="0"/>
+          </a:xfrm>
+          <a:prstGeom prst="straightConnector1">
+            <a:avLst/>
+          </a:prstGeom>
+          <a:ln w="22225">
+            <a:solidFill>
+              <a:srgbClr val="2F9E44"/>
+            </a:solidFill>
+            <a:round/>
+            <a:tailEnd type="triangle" w="med" len="med"/>
+          </a:ln>
+        </p:spPr>
+      </p:cxnSp>
+      <p:sp>
+        <p:nvSpPr>
+          <p:cNvPr id="326" name="Label: live sync"/>
+          <p:cNvSpPr txBox="1"/>
+          <p:nvPr/>
+        </p:nvSpPr>
+        <p:spPr>
+          <a:xfrm>
+            <a:off x="6492240" y="1737360"/>
+            <a:ext cx="640080" cy="128016"/>
+          </a:xfrm>
+          <a:prstGeom prst="rect">
+            <a:avLst/>
+          </a:prstGeom>
+          <a:noFill/>
+          <a:ln>
+            <a:noFill/>
+          </a:ln>
+        </p:spPr>
+        <p:txBody>
+          <a:bodyPr wrap="square" lIns="0" tIns="0" rIns="0" bIns="0" rtlCol="0" anchor="t">
+            <a:noAutofit/>
+          </a:bodyPr>
+          <a:lstStyle/>
+          <a:p>
+            <a:pPr marL="0" indent="0" algn="ctr">
+              <a:lnSpc>
+                <a:spcPct val="100000"/>
+              </a:lnSpc>
+              <a:spcBef>
+                <a:spcPts val="0"/>
+              </a:spcBef>
+              <a:spcAft>
+                <a:spcPts val="0"/>
+              </a:spcAft>
+              <a:buNone/>
+            </a:pPr>
+            <a:r>
+              <a:rPr lang="en-US" sz="700" b="0" i="0" dirty="0">
+                <a:solidFill>
+                  <a:srgbClr val="2F9E44"/>
+                </a:solidFill>
+                <a:latin typeface="Arial"/>
+                <a:cs typeface="Arial"/>
+              </a:rPr>
+              <a:t>live sync</a:t>
+            </a:r>
+          </a:p>
+        </p:txBody>
+      </p:sp>
+      <p:cxnSp>
+        <p:nvCxnSpPr>
+          <p:cNvPr id="327" name="Console to Firestore"/>
+          <p:cNvCxnSpPr/>
+          <p:nvPr/>
+        </p:nvCxnSpPr>
+        <p:spPr>
+          <a:xfrm flipH="1">
+            <a:off x="6492240" y="2249424"/>
+            <a:ext cx="640080" cy="0"/>
+          </a:xfrm>
+          <a:prstGeom prst="straightConnector1">
+            <a:avLst/>
+          </a:prstGeom>
+          <a:ln w="22225">
+            <a:solidFill>
+              <a:srgbClr val="2F9E44"/>
+            </a:solidFill>
+            <a:round/>
+            <a:tailEnd type="triangle" w="med" len="med"/>
+          </a:ln>
+        </p:spPr>
+      </p:cxnSp>
+      <p:sp>
+        <p:nvSpPr>
+          <p:cNvPr id="328" name="Label: actions"/>
+          <p:cNvSpPr txBox="1"/>
+          <p:nvPr/>
+        </p:nvSpPr>
+        <p:spPr>
+          <a:xfrm>
+            <a:off x="6492240" y="2286000"/>
+            <a:ext cx="640080" cy="128016"/>
+          </a:xfrm>
+          <a:prstGeom prst="rect">
+            <a:avLst/>
+          </a:prstGeom>
+          <a:noFill/>
+          <a:ln>
+            <a:noFill/>
+          </a:ln>
+        </p:spPr>
+        <p:txBody>
+          <a:bodyPr wrap="square" lIns="0" tIns="0" rIns="0" bIns="0" rtlCol="0" anchor="t">
+            <a:noAutofit/>
+          </a:bodyPr>
+          <a:lstStyle/>
+          <a:p>
+            <a:pPr marL="0" indent="0" algn="ctr">
+              <a:lnSpc>
+                <a:spcPct val="100000"/>
+              </a:lnSpc>
+              <a:spcBef>
+                <a:spcPts val="0"/>
+              </a:spcBef>
+              <a:spcAft>
+                <a:spcPts val="0"/>
+              </a:spcAft>
+              <a:buNone/>
+            </a:pPr>
+            <a:r>
+              <a:rPr lang="en-US" sz="700" b="0" i="0" dirty="0">
+                <a:solidFill>
+                  <a:srgbClr val="2F9E44"/>
+                </a:solidFill>
+                <a:latin typeface="Arial"/>
+                <a:cs typeface="Arial"/>
+              </a:rPr>
+              <a:t>actions</a:t>
+            </a:r>
+          </a:p>
+        </p:txBody>
+      </p:sp>
+      <p:sp>
+        <p:nvSpPr>
+          <p:cNvPr id="329" name="Phone to Firestore: live fields"/>
+          <p:cNvSpPr/>
+          <p:nvPr/>
+        </p:nvSpPr>
+        <p:spPr>
+          <a:xfrm>
+            <a:off x="1965960" y="3310128"/>
+            <a:ext cx="3154680" cy="164592"/>
+          </a:xfrm>
+          <a:custGeom>
+            <a:avLst/>
+            <a:gdLst/>
+            <a:ahLst/>
+            <a:cxnLst/>
+            <a:rect l="l" t="t" r="r" b="b"/>
+            <a:pathLst>
+              <a:path w="3154680" h="164592" fill="none">
+                <a:moveTo>
+                  <a:pt x="0" y="0"/>
+                </a:moveTo>
+                <a:lnTo>
+                  <a:pt x="0" y="164592"/>
+                </a:lnTo>
+                <a:lnTo>
+                  <a:pt x="3154680" y="164592"/>
+                </a:lnTo>
+                <a:lnTo>
+                  <a:pt x="3154680" y="0"/>
+                </a:lnTo>
+              </a:path>
+            </a:pathLst>
+          </a:custGeom>
+          <a:noFill/>
+          <a:ln w="22225">
             <a:solidFill>
               <a:srgbClr val="5F6368"/>
             </a:solidFill>
+            <a:round/>
+            <a:headEnd type="triangle" w="med" len="med"/>
+            <a:tailEnd type="triangle" w="med" len="med"/>
+          </a:ln>
+        </p:spPr>
+      </p:sp>
+      <p:sp>
+        <p:nvSpPr>
+          <p:cNvPr id="330" name="Label: live fields"/>
+          <p:cNvSpPr txBox="1"/>
+          <p:nvPr/>
+        </p:nvSpPr>
+        <p:spPr>
+          <a:xfrm>
+            <a:off x="1965960" y="3502152"/>
+            <a:ext cx="3154680" cy="128016"/>
+          </a:xfrm>
+          <a:prstGeom prst="rect">
+            <a:avLst/>
+          </a:prstGeom>
+          <a:noFill/>
+          <a:ln>
+            <a:noFill/>
+          </a:ln>
+        </p:spPr>
+        <p:txBody>
+          <a:bodyPr wrap="square" lIns="0" tIns="0" rIns="0" bIns="0" rtlCol="0" anchor="t">
+            <a:noAutofit/>
+          </a:bodyPr>
+          <a:lstStyle/>
+          <a:p>
+            <a:pPr marL="0" indent="0" algn="ctr">
+              <a:lnSpc>
+                <a:spcPct val="100000"/>
+              </a:lnSpc>
+              <a:spcBef>
+                <a:spcPts val="0"/>
+              </a:spcBef>
+              <a:spcAft>
+                <a:spcPts val="0"/>
+              </a:spcAft>
+              <a:buNone/>
+            </a:pPr>
+            <a:r>
+              <a:rPr lang="en-US" sz="700" b="0" i="0" dirty="0">
+                <a:solidFill>
+                  <a:srgbClr val="5F6368"/>
+                </a:solidFill>
+                <a:latin typeface="Arial"/>
+                <a:cs typeface="Arial"/>
+              </a:rPr>
+              <a:t>tool results → live fields · messages + route back</a:t>
+            </a:r>
+          </a:p>
+        </p:txBody>
+      </p:sp>
+      <p:sp>
+        <p:nvSpPr>
+          <p:cNvPr id="331" name="Phone to services bus"/>
+          <p:cNvSpPr/>
+          <p:nvPr/>
+        </p:nvSpPr>
+        <p:spPr>
+          <a:xfrm>
+            <a:off x="502920" y="3310128"/>
+            <a:ext cx="6549390" cy="402336"/>
+          </a:xfrm>
+          <a:custGeom>
+            <a:avLst/>
+            <a:gdLst/>
+            <a:ahLst/>
+            <a:cxnLst/>
+            <a:rect l="l" t="t" r="r" b="b"/>
+            <a:pathLst>
+              <a:path w="6549390" h="402336" fill="none">
+                <a:moveTo>
+                  <a:pt x="0" y="0"/>
+                </a:moveTo>
+                <a:lnTo>
+                  <a:pt x="0" y="402336"/>
+                </a:lnTo>
+                <a:lnTo>
+                  <a:pt x="6549390" y="402336"/>
+                </a:lnTo>
+              </a:path>
+            </a:pathLst>
+          </a:custGeom>
+          <a:noFill/>
+          <a:ln w="19050">
+            <a:solidFill>
+              <a:srgbClr val="5F6368"/>
+            </a:solidFill>
+            <a:round/>
+          </a:ln>
+        </p:spPr>
+      </p:sp>
+      <p:cxnSp>
+        <p:nvCxnSpPr>
+          <p:cNvPr id="332" name="Bus stub 1"/>
+          <p:cNvCxnSpPr/>
+          <p:nvPr/>
+        </p:nvCxnSpPr>
+        <p:spPr>
+          <a:xfrm>
+            <a:off x="640080" y="3712464"/>
+            <a:ext cx="0" cy="109728"/>
+          </a:xfrm>
+          <a:prstGeom prst="straightConnector1">
+            <a:avLst/>
+          </a:prstGeom>
+          <a:ln w="19050">
+            <a:solidFill>
+              <a:srgbClr val="5F6368"/>
+            </a:solidFill>
+            <a:round/>
+            <a:tailEnd type="triangle" w="med" len="med"/>
+          </a:ln>
+        </p:spPr>
+      </p:cxnSp>
+      <p:cxnSp>
+        <p:nvCxnSpPr>
+          <p:cNvPr id="333" name="Bus stub 2"/>
+          <p:cNvCxnSpPr/>
+          <p:nvPr/>
+        </p:nvCxnSpPr>
+        <p:spPr>
+          <a:xfrm>
+            <a:off x="2777490" y="3712464"/>
+            <a:ext cx="0" cy="109728"/>
+          </a:xfrm>
+          <a:prstGeom prst="straightConnector1">
+            <a:avLst/>
+          </a:prstGeom>
+          <a:ln w="19050">
+            <a:solidFill>
+              <a:srgbClr val="5F6368"/>
+            </a:solidFill>
+            <a:round/>
+            <a:tailEnd type="triangle" w="med" len="med"/>
+          </a:ln>
+        </p:spPr>
+      </p:cxnSp>
+      <p:cxnSp>
+        <p:nvCxnSpPr>
+          <p:cNvPr id="334" name="Bus stub 3"/>
+          <p:cNvCxnSpPr/>
+          <p:nvPr/>
+        </p:nvCxnSpPr>
+        <p:spPr>
+          <a:xfrm>
+            <a:off x="4914900" y="3712464"/>
+            <a:ext cx="0" cy="109728"/>
+          </a:xfrm>
+          <a:prstGeom prst="straightConnector1">
+            <a:avLst/>
+          </a:prstGeom>
+          <a:ln w="19050">
+            <a:solidFill>
+              <a:srgbClr val="5F6368"/>
+            </a:solidFill>
+            <a:round/>
+            <a:tailEnd type="triangle" w="med" len="med"/>
+          </a:ln>
+        </p:spPr>
+      </p:cxnSp>
+      <p:cxnSp>
+        <p:nvCxnSpPr>
+          <p:cNvPr id="335" name="Bus stub 4"/>
+          <p:cNvCxnSpPr/>
+          <p:nvPr/>
+        </p:nvCxnSpPr>
+        <p:spPr>
+          <a:xfrm>
+            <a:off x="7052310" y="3712464"/>
+            <a:ext cx="0" cy="109728"/>
+          </a:xfrm>
+          <a:prstGeom prst="straightConnector1">
+            <a:avLst/>
+          </a:prstGeom>
+          <a:ln w="19050">
+            <a:solidFill>
+              <a:srgbClr val="5F6368"/>
+            </a:solidFill>
+            <a:round/>
+            <a:tailEnd type="triangle" w="med" len="med"/>
+          </a:ln>
+        </p:spPr>
+      </p:cxnSp>
+      <p:cxnSp>
+        <p:nvCxnSpPr>
+          <p:cNvPr id="336" name="Live media to console"/>
+          <p:cNvCxnSpPr/>
+          <p:nvPr/>
+        </p:nvCxnSpPr>
+        <p:spPr>
+          <a:xfrm flipV="1">
+            <a:off x="8458200" y="3310128"/>
+            <a:ext cx="0" cy="512064"/>
+          </a:xfrm>
+          <a:prstGeom prst="straightConnector1">
+            <a:avLst/>
+          </a:prstGeom>
+          <a:ln w="22225">
+            <a:solidFill>
+              <a:srgbClr val="2F9E44"/>
+            </a:solidFill>
             <a:prstDash val="dash"/>
+            <a:round/>
+            <a:tailEnd type="triangle" w="med" len="med"/>
           </a:ln>
-          <a:effectLst/>
-        </p:spPr>
-        <p:style>
-          <a:lnRef idx="1">
-            <a:schemeClr val="accent1"/>
-          </a:lnRef>
-          <a:fillRef idx="3">
-            <a:schemeClr val="accent1"/>
-          </a:fillRef>
-          <a:effectRef idx="2">
-            <a:schemeClr val="accent1"/>
-          </a:effectRef>
-          <a:fontRef idx="minor">
-            <a:schemeClr val="lt1"/>
-          </a:fontRef>
-        </p:style>
-        <p:txBody>
-          <a:bodyPr wrap="square" lIns="64008" tIns="64008" rIns="64008" bIns="64008" rtlCol="0" anchor="ctr"/>
-          <a:lstStyle/>
-          <a:p>
-            <a:pPr algn="l"/>
-            <a:r>
-              <a:rPr sz="800" b="1" i="0">
-                <a:solidFill>
-                  <a:srgbClr val="1A1A1A"/>
-                </a:solidFill>
-                <a:latin typeface="Arial"/>
-              </a:rPr>
-              <a:t>Next: Cloud Run + ADK</a:t>
-            </a:r>
-          </a:p>
-          <a:p>
-            <a:pPr algn="l"/>
-            <a:r>
-              <a:rPr sz="700" b="0" i="0">
+        </p:spPr>
+      </p:cxnSp>
+      <p:sp>
+        <p:nvSpPr>
+          <p:cNvPr id="337" name="Label: video, audio"/>
+          <p:cNvSpPr txBox="1"/>
+          <p:nvPr/>
+        </p:nvSpPr>
+        <p:spPr>
+          <a:xfrm>
+            <a:off x="7589520" y="3493008"/>
+            <a:ext cx="804672" cy="128016"/>
+          </a:xfrm>
+          <a:prstGeom prst="rect">
+            <a:avLst/>
+          </a:prstGeom>
+          <a:noFill/>
+          <a:ln>
+            <a:noFill/>
+          </a:ln>
+        </p:spPr>
+        <p:txBody>
+          <a:bodyPr wrap="square" lIns="0" tIns="0" rIns="0" bIns="0" rtlCol="0" anchor="t">
+            <a:noAutofit/>
+          </a:bodyPr>
+          <a:lstStyle/>
+          <a:p>
+            <a:pPr marL="0" indent="0" algn="r">
+              <a:lnSpc>
+                <a:spcPct val="100000"/>
+              </a:lnSpc>
+              <a:spcBef>
+                <a:spcPts val="0"/>
+              </a:spcBef>
+              <a:spcAft>
+                <a:spcPts val="0"/>
+              </a:spcAft>
+              <a:buNone/>
+            </a:pPr>
+            <a:r>
+              <a:rPr lang="en-US" sz="700" b="0" i="0" dirty="0">
+                <a:solidFill>
+                  <a:srgbClr val="2F9E44"/>
+                </a:solidFill>
+                <a:latin typeface="Arial"/>
+                <a:cs typeface="Arial"/>
+              </a:rPr>
+              <a:t>video, audio</a:t>
+            </a:r>
+          </a:p>
+        </p:txBody>
+      </p:sp>
+      <p:sp>
+        <p:nvSpPr>
+          <p:cNvPr id="338" name="Footer"/>
+          <p:cNvSpPr txBox="1"/>
+          <p:nvPr/>
+        </p:nvSpPr>
+        <p:spPr>
+          <a:xfrm>
+            <a:off x="365760" y="4645152"/>
+            <a:ext cx="8412480" cy="146304"/>
+          </a:xfrm>
+          <a:prstGeom prst="rect">
+            <a:avLst/>
+          </a:prstGeom>
+          <a:noFill/>
+          <a:ln>
+            <a:noFill/>
+          </a:ln>
+        </p:spPr>
+        <p:txBody>
+          <a:bodyPr wrap="square" lIns="0" tIns="0" rIns="0" bIns="0" rtlCol="0" anchor="t">
+            <a:noAutofit/>
+          </a:bodyPr>
+          <a:lstStyle/>
+          <a:p>
+            <a:pPr marL="0" indent="0" algn="ctr">
+              <a:lnSpc>
+                <a:spcPct val="100000"/>
+              </a:lnSpc>
+              <a:spcBef>
+                <a:spcPts val="0"/>
+              </a:spcBef>
+              <a:spcAft>
+                <a:spcPts val="0"/>
+              </a:spcAft>
+              <a:buNone/>
+            </a:pPr>
+            <a:r>
+              <a:rPr lang="en-US" sz="700" b="0" i="0" dirty="0">
                 <a:solidFill>
                   <a:srgbClr val="5F6368"/>
                 </a:solidFill>
                 <a:latin typeface="Arial"/>
-              </a:rPr>
-              <a:t>dispatch &amp; verification agents</a:t>
-            </a:r>
-          </a:p>
-        </p:txBody>
-      </p:sp>
-      <p:sp>
-        <p:nvSpPr>
-          <p:cNvPr id="139" name="TextBox 138"/>
+                <a:cs typeface="Arial"/>
+              </a:rPr>
+              <a:t>Managed Firebase backend · Gemini API keys: free tier first, paid fallback · AI usage metered per call · gitleaks secret scan · 4 Firebase Hosting sites</a:t>
+            </a:r>
+          </a:p>
+        </p:txBody>
+      </p:sp>
+      <p:sp>
+        <p:nvSpPr>
+          <p:cNvPr id="339" name="Link: full architecture docs"/>
           <p:cNvSpPr txBox="1"/>
           <p:nvPr/>
         </p:nvSpPr>
         <p:spPr>
           <a:xfrm>
-            <a:off x="365760" y="4480560"/>
-            <a:ext cx="8412480" cy="320040"/>
+            <a:off x="365760" y="4818888"/>
+            <a:ext cx="8412480" cy="182880"/>
           </a:xfrm>
           <a:prstGeom prst="rect">
             <a:avLst/>
           </a:prstGeom>
           <a:noFill/>
-        </p:spPr>
-        <p:txBody>
-          <a:bodyPr wrap="square" lIns="0" tIns="0" rIns="0" bIns="0" anchor="t"/>
-          <a:lstStyle/>
-          <a:p>
-            <a:pPr algn="l"/>
-            <a:r>
-              <a:rPr sz="750" b="0" i="0">
-                <a:solidFill>
-                  <a:srgbClr val="5F6368"/>
-                </a:solidFill>
-                <a:latin typeface="Arial"/>
-              </a:rPr>
-              <a:t>Free → paid key pool per model · per-call AI usage metering · GitHub Actions: gitleaks + APK release · EAS builds · 4 Firebase Hosting sites (app, console, landing, staging)</a:t>
+          <a:ln>
+            <a:noFill/>
+          </a:ln>
+        </p:spPr>
+        <p:txBody>
+          <a:bodyPr wrap="square" lIns="0" tIns="0" rIns="0" bIns="0" rtlCol="0" anchor="t">
+            <a:noAutofit/>
+          </a:bodyPr>
+          <a:lstStyle/>
+          <a:p>
+            <a:pPr marL="0" indent="0" algn="ctr">
+              <a:lnSpc>
+                <a:spcPct val="100000"/>
+              </a:lnSpc>
+              <a:spcBef>
+                <a:spcPts val="0"/>
+              </a:spcBef>
+              <a:spcAft>
+                <a:spcPts val="0"/>
+              </a:spcAft>
+              <a:buNone/>
+            </a:pPr>
+            <a:r>
+              <a:rPr lang="en-US" sz="800" b="1" i="0" u="sng" dirty="0">
+                <a:solidFill>
+                  <a:srgbClr val="1A73E8"/>
+                </a:solidFill>
+                <a:latin typeface="Arial"/>
+                <a:cs typeface="Arial"/>
+                <a:hlinkClick r:id="rId6"/>
+              </a:rPr>
+              <a:t>Full architecture docs on GitHub →</a:t>
             </a:r>
           </a:p>
         </p:txBody>
@@ -25685,58 +26997,869 @@
                 </a:solidFill>
                 <a:latin typeface="Arial"/>
               </a:rPr>
-              <a:t>Not a chatbot wrapper: a real-time multimodal agent with 12 tools</a:t>
-            </a:r>
-          </a:p>
-        </p:txBody>
-      </p:sp>
-      <p:sp>
-        <p:nvSpPr>
-          <p:cNvPr id="168" name="TextBox 167"/>
+              <a:t>Not a chatbot: every answer becomes a function call that the app turns into live data</a:t>
+            </a:r>
+          </a:p>
+        </p:txBody>
+      </p:sp>
+      <p:sp>
+        <p:nvSpPr>
+          <p:cNvPr id="300" name="Header: one answer"/>
           <p:cNvSpPr txBox="1"/>
           <p:nvPr/>
         </p:nvSpPr>
         <p:spPr>
           <a:xfrm>
             <a:off x="365760" y="1325880"/>
-            <a:ext cx="3657600" cy="182880"/>
+            <a:ext cx="3657600" cy="164592"/>
           </a:xfrm>
           <a:prstGeom prst="rect">
             <a:avLst/>
           </a:prstGeom>
           <a:noFill/>
-        </p:spPr>
-        <p:txBody>
-          <a:bodyPr wrap="square" lIns="0" tIns="0" rIns="0" bIns="0" anchor="t"/>
-          <a:lstStyle/>
-          <a:p>
-            <a:pPr algn="l"/>
-            <a:r>
-              <a:rPr sz="800" b="1" i="0">
+          <a:ln>
+            <a:noFill/>
+          </a:ln>
+        </p:spPr>
+        <p:txBody>
+          <a:bodyPr wrap="square" lIns="0" tIns="0" rIns="0" bIns="0" rtlCol="0" anchor="t">
+            <a:noAutofit/>
+          </a:bodyPr>
+          <a:lstStyle/>
+          <a:p>
+            <a:pPr marL="0" indent="0" algn="l">
+              <a:lnSpc>
+                <a:spcPct val="100000"/>
+              </a:lnSpc>
+              <a:spcBef>
+                <a:spcPts val="0"/>
+              </a:spcBef>
+              <a:spcAft>
+                <a:spcPts val="0"/>
+              </a:spcAft>
+              <a:buNone/>
+            </a:pPr>
+            <a:r>
+              <a:rPr lang="en-US" sz="800" b="1" i="0" dirty="0" spc="60">
                 <a:solidFill>
                   <a:srgbClr val="1A73E8"/>
                 </a:solidFill>
                 <a:latin typeface="Arial"/>
-              </a:rPr>
-              <a:t>DURING THE CALL</a:t>
-            </a:r>
-          </a:p>
-        </p:txBody>
-      </p:sp>
-      <p:sp>
-        <p:nvSpPr>
-          <p:cNvPr id="169" name="Rounded Rectangle 168"/>
+                <a:cs typeface="Arial"/>
+              </a:rPr>
+              <a:t>ONE ANSWER, END TO END</a:t>
+            </a:r>
+          </a:p>
+        </p:txBody>
+      </p:sp>
+      <p:sp>
+        <p:nvSpPr>
+          <p:cNvPr id="301" name="Step 1: caller"/>
           <p:cNvSpPr/>
           <p:nvPr/>
         </p:nvSpPr>
         <p:spPr>
           <a:xfrm>
-            <a:off x="365760" y="1554480"/>
-            <a:ext cx="1143000" cy="1188720"/>
+            <a:off x="365760" y="1536192"/>
+            <a:ext cx="1536192" cy="1024128"/>
           </a:xfrm>
           <a:prstGeom prst="roundRect">
             <a:avLst>
-              <a:gd name="adj" fmla="val 8000"/>
+              <a:gd name="adj" fmla="val 5357"/>
+            </a:avLst>
+          </a:prstGeom>
+          <a:solidFill>
+            <a:srgbClr val="FDEBDF"/>
+          </a:solidFill>
+          <a:ln>
+            <a:noFill/>
+          </a:ln>
+        </p:spPr>
+        <p:txBody>
+          <a:bodyPr wrap="square" lIns="73152" tIns="54864" rIns="73152" bIns="36576" rtlCol="0" anchor="t">
+            <a:noAutofit/>
+          </a:bodyPr>
+          <a:lstStyle/>
+          <a:p>
+            <a:pPr marL="0" indent="0" algn="l">
+              <a:lnSpc>
+                <a:spcPct val="100000"/>
+              </a:lnSpc>
+              <a:spcBef>
+                <a:spcPts val="0"/>
+              </a:spcBef>
+              <a:spcAft>
+                <a:spcPts val="0"/>
+              </a:spcAft>
+              <a:buNone/>
+            </a:pPr>
+            <a:r>
+              <a:rPr lang="en-US" sz="700" b="1" i="0" dirty="0" spc="30">
+                <a:solidFill>
+                  <a:srgbClr val="E8590C"/>
+                </a:solidFill>
+                <a:latin typeface="Arial"/>
+                <a:cs typeface="Arial"/>
+              </a:rPr>
+              <a:t>1 · THE CALLER SAYS</a:t>
+            </a:r>
+          </a:p>
+          <a:p>
+            <a:pPr marL="0" indent="0" algn="l">
+              <a:lnSpc>
+                <a:spcPct val="100000"/>
+              </a:lnSpc>
+              <a:spcBef>
+                <a:spcPts val="300"/>
+              </a:spcBef>
+              <a:spcAft>
+                <a:spcPts val="0"/>
+              </a:spcAft>
+              <a:buNone/>
+            </a:pPr>
+            <a:r>
+              <a:rPr lang="en-US" sz="900" b="1" i="0" dirty="0">
+                <a:solidFill>
+                  <a:srgbClr val="1A1A1A"/>
+                </a:solidFill>
+                <a:latin typeface="Arial"/>
+                <a:cs typeface="Arial"/>
+              </a:rPr>
+              <a:t>“Yes, garlic bread, please.”</a:t>
+            </a:r>
+          </a:p>
+          <a:p>
+            <a:pPr marL="0" indent="0" algn="l">
+              <a:lnSpc>
+                <a:spcPct val="100000"/>
+              </a:lnSpc>
+              <a:spcBef>
+                <a:spcPts val="300"/>
+              </a:spcBef>
+              <a:spcAft>
+                <a:spcPts val="0"/>
+              </a:spcAft>
+              <a:buNone/>
+            </a:pPr>
+            <a:r>
+              <a:rPr lang="en-US" sz="700" b="0" i="0" dirty="0">
+                <a:solidFill>
+                  <a:srgbClr val="5F6368"/>
+                </a:solidFill>
+                <a:latin typeface="Arial"/>
+                <a:cs typeface="Arial"/>
+              </a:rPr>
+              <a:t>Mia offered it in the same breath: garlic bread means someone is following you.</a:t>
+            </a:r>
+          </a:p>
+        </p:txBody>
+      </p:sp>
+      <p:sp>
+        <p:nvSpPr>
+          <p:cNvPr id="302" name="Step 2: Gemini Live"/>
+          <p:cNvSpPr/>
+          <p:nvPr/>
+        </p:nvSpPr>
+        <p:spPr>
+          <a:xfrm>
+            <a:off x="2084832" y="1536192"/>
+            <a:ext cx="1536192" cy="1024128"/>
+          </a:xfrm>
+          <a:prstGeom prst="roundRect">
+            <a:avLst>
+              <a:gd name="adj" fmla="val 5357"/>
+            </a:avLst>
+          </a:prstGeom>
+          <a:solidFill>
+            <a:srgbClr val="E8F0FE"/>
+          </a:solidFill>
+          <a:ln>
+            <a:noFill/>
+          </a:ln>
+        </p:spPr>
+        <p:txBody>
+          <a:bodyPr wrap="square" lIns="73152" tIns="54864" rIns="73152" bIns="36576" rtlCol="0" anchor="t">
+            <a:noAutofit/>
+          </a:bodyPr>
+          <a:lstStyle/>
+          <a:p>
+            <a:pPr marL="0" indent="0" algn="l">
+              <a:lnSpc>
+                <a:spcPct val="100000"/>
+              </a:lnSpc>
+              <a:spcBef>
+                <a:spcPts val="0"/>
+              </a:spcBef>
+              <a:spcAft>
+                <a:spcPts val="0"/>
+              </a:spcAft>
+              <a:buNone/>
+            </a:pPr>
+            <a:r>
+              <a:rPr lang="en-US" sz="700" b="1" i="0" dirty="0" spc="30">
+                <a:solidFill>
+                  <a:srgbClr val="1A73E8"/>
+                </a:solidFill>
+                <a:latin typeface="Arial"/>
+                <a:cs typeface="Arial"/>
+              </a:rPr>
+              <a:t>2 · GEMINI LIVE DECIDES</a:t>
+            </a:r>
+          </a:p>
+          <a:p>
+            <a:pPr marL="0" indent="0" algn="l">
+              <a:lnSpc>
+                <a:spcPct val="100000"/>
+              </a:lnSpc>
+              <a:spcBef>
+                <a:spcPts val="300"/>
+              </a:spcBef>
+              <a:spcAft>
+                <a:spcPts val="0"/>
+              </a:spcAft>
+              <a:buNone/>
+            </a:pPr>
+            <a:r>
+              <a:rPr lang="en-US" sz="700" b="0" i="0" dirty="0">
+                <a:solidFill>
+                  <a:srgbClr val="1A1A1A"/>
+                </a:solidFill>
+                <a:latin typeface="Arial"/>
+                <a:cs typeface="Arial"/>
+              </a:rPr>
+              <a:t>Hears the voice and a camera frame every 2 s, then calls</a:t>
+            </a:r>
+          </a:p>
+          <a:p>
+            <a:pPr marL="0" indent="0" algn="l">
+              <a:lnSpc>
+                <a:spcPct val="100000"/>
+              </a:lnSpc>
+              <a:spcBef>
+                <a:spcPts val="200"/>
+              </a:spcBef>
+              <a:spcAft>
+                <a:spcPts val="0"/>
+              </a:spcAft>
+              <a:buNone/>
+            </a:pPr>
+            <a:r>
+              <a:rPr lang="en-US" sz="750" b="1" i="0" dirty="0">
+                <a:solidFill>
+                  <a:srgbClr val="1A73E8"/>
+                </a:solidFill>
+                <a:latin typeface="Courier New"/>
+                <a:cs typeface="Courier New"/>
+              </a:rPr>
+              <a:t>report_situation</a:t>
+            </a:r>
+          </a:p>
+          <a:p>
+            <a:pPr marL="0" indent="0" algn="l">
+              <a:lnSpc>
+                <a:spcPct val="100000"/>
+              </a:lnSpc>
+              <a:spcBef>
+                <a:spcPts val="0"/>
+              </a:spcBef>
+              <a:spcAft>
+                <a:spcPts val="0"/>
+              </a:spcAft>
+              <a:buNone/>
+            </a:pPr>
+            <a:r>
+              <a:rPr lang="en-US" sz="700" b="0" i="0" dirty="0">
+                <a:solidFill>
+                  <a:srgbClr val="1A1A1A"/>
+                </a:solidFill>
+                <a:latin typeface="Arial"/>
+                <a:cs typeface="Arial"/>
+              </a:rPr>
+              <a:t>danger: being followed or chased</a:t>
+            </a:r>
+          </a:p>
+          <a:p>
+            <a:pPr marL="0" indent="0" algn="l">
+              <a:lnSpc>
+                <a:spcPct val="100000"/>
+              </a:lnSpc>
+              <a:spcBef>
+                <a:spcPts val="0"/>
+              </a:spcBef>
+              <a:spcAft>
+                <a:spcPts val="0"/>
+              </a:spcAft>
+              <a:buNone/>
+            </a:pPr>
+            <a:r>
+              <a:rPr lang="en-US" sz="700" b="0" i="0" dirty="0">
+                <a:solidFill>
+                  <a:srgbClr val="1A1A1A"/>
+                </a:solidFill>
+                <a:latin typeface="Arial"/>
+                <a:cs typeface="Arial"/>
+              </a:rPr>
+              <a:t>urgency: high</a:t>
+            </a:r>
+          </a:p>
+        </p:txBody>
+      </p:sp>
+      <p:cxnSp>
+        <p:nvCxnSpPr>
+          <p:cNvPr id="303" name="Step arrow 1"/>
+          <p:cNvCxnSpPr/>
+          <p:nvPr/>
+        </p:nvCxnSpPr>
+        <p:spPr>
+          <a:xfrm>
+            <a:off x="1920240" y="2048256"/>
+            <a:ext cx="146304" cy="0"/>
+          </a:xfrm>
+          <a:prstGeom prst="straightConnector1">
+            <a:avLst/>
+          </a:prstGeom>
+          <a:ln w="19050">
+            <a:solidFill>
+              <a:srgbClr val="5F6368"/>
+            </a:solidFill>
+            <a:round/>
+            <a:tailEnd type="triangle" w="med" len="med"/>
+          </a:ln>
+        </p:spPr>
+      </p:cxnSp>
+      <p:sp>
+        <p:nvSpPr>
+          <p:cNvPr id="304" name="Step 3: the phone"/>
+          <p:cNvSpPr/>
+          <p:nvPr/>
+        </p:nvSpPr>
+        <p:spPr>
+          <a:xfrm>
+            <a:off x="3803904" y="1536192"/>
+            <a:ext cx="1536192" cy="1024128"/>
+          </a:xfrm>
+          <a:prstGeom prst="roundRect">
+            <a:avLst>
+              <a:gd name="adj" fmla="val 5357"/>
+            </a:avLst>
+          </a:prstGeom>
+          <a:solidFill>
+            <a:srgbClr val="FDEBDF"/>
+          </a:solidFill>
+          <a:ln>
+            <a:noFill/>
+          </a:ln>
+        </p:spPr>
+        <p:txBody>
+          <a:bodyPr wrap="square" lIns="73152" tIns="54864" rIns="73152" bIns="36576" rtlCol="0" anchor="t">
+            <a:noAutofit/>
+          </a:bodyPr>
+          <a:lstStyle/>
+          <a:p>
+            <a:pPr marL="0" indent="0" algn="l">
+              <a:lnSpc>
+                <a:spcPct val="100000"/>
+              </a:lnSpc>
+              <a:spcBef>
+                <a:spcPts val="0"/>
+              </a:spcBef>
+              <a:spcAft>
+                <a:spcPts val="0"/>
+              </a:spcAft>
+              <a:buNone/>
+            </a:pPr>
+            <a:r>
+              <a:rPr lang="en-US" sz="700" b="1" i="0" dirty="0" spc="30">
+                <a:solidFill>
+                  <a:srgbClr val="E8590C"/>
+                </a:solidFill>
+                <a:latin typeface="Arial"/>
+                <a:cs typeface="Arial"/>
+              </a:rPr>
+              <a:t>3 · THE PHONE ACTS</a:t>
+            </a:r>
+          </a:p>
+          <a:p>
+            <a:pPr marL="0" indent="0" algn="l">
+              <a:lnSpc>
+                <a:spcPct val="100000"/>
+              </a:lnSpc>
+              <a:spcBef>
+                <a:spcPts val="300"/>
+              </a:spcBef>
+              <a:spcAft>
+                <a:spcPts val="0"/>
+              </a:spcAft>
+              <a:buNone/>
+            </a:pPr>
+            <a:r>
+              <a:rPr lang="en-US" sz="700" b="0" i="0" dirty="0">
+                <a:solidFill>
+                  <a:srgbClr val="1A1A1A"/>
+                </a:solidFill>
+                <a:latin typeface="Arial"/>
+                <a:cs typeface="Arial"/>
+              </a:rPr>
+              <a:t>A rule in code, not AI: urgency high → severity HIGH</a:t>
+            </a:r>
+          </a:p>
+          <a:p>
+            <a:pPr marL="0" indent="0" algn="l">
+              <a:lnSpc>
+                <a:spcPct val="100000"/>
+              </a:lnSpc>
+              <a:spcBef>
+                <a:spcPts val="300"/>
+              </a:spcBef>
+              <a:spcAft>
+                <a:spcPts val="0"/>
+              </a:spcAft>
+              <a:buNone/>
+            </a:pPr>
+            <a:r>
+              <a:rPr lang="en-US" sz="700" b="0" i="0" dirty="0">
+                <a:solidFill>
+                  <a:srgbClr val="1A1A1A"/>
+                </a:solidFill>
+                <a:latin typeface="Arial"/>
+                <a:cs typeface="Arial"/>
+              </a:rPr>
+              <a:t>“Followed” means moving: a route to the nearest police station starts once the location is known</a:t>
+            </a:r>
+          </a:p>
+        </p:txBody>
+      </p:sp>
+      <p:cxnSp>
+        <p:nvCxnSpPr>
+          <p:cNvPr id="305" name="Step arrow 2"/>
+          <p:cNvCxnSpPr/>
+          <p:nvPr/>
+        </p:nvCxnSpPr>
+        <p:spPr>
+          <a:xfrm>
+            <a:off x="3639312" y="2048256"/>
+            <a:ext cx="146304" cy="0"/>
+          </a:xfrm>
+          <a:prstGeom prst="straightConnector1">
+            <a:avLst/>
+          </a:prstGeom>
+          <a:ln w="19050">
+            <a:solidFill>
+              <a:srgbClr val="5F6368"/>
+            </a:solidFill>
+            <a:round/>
+            <a:tailEnd type="triangle" w="med" len="med"/>
+          </a:ln>
+        </p:spPr>
+      </p:cxnSp>
+      <p:sp>
+        <p:nvSpPr>
+          <p:cNvPr id="306" name="Step 4: console"/>
+          <p:cNvSpPr/>
+          <p:nvPr/>
+        </p:nvSpPr>
+        <p:spPr>
+          <a:xfrm>
+            <a:off x="5522976" y="1536192"/>
+            <a:ext cx="1536192" cy="1024128"/>
+          </a:xfrm>
+          <a:prstGeom prst="roundRect">
+            <a:avLst>
+              <a:gd name="adj" fmla="val 5357"/>
+            </a:avLst>
+          </a:prstGeom>
+          <a:solidFill>
+            <a:srgbClr val="E3F4E6"/>
+          </a:solidFill>
+          <a:ln>
+            <a:noFill/>
+          </a:ln>
+        </p:spPr>
+        <p:txBody>
+          <a:bodyPr wrap="square" lIns="73152" tIns="54864" rIns="73152" bIns="36576" rtlCol="0" anchor="t">
+            <a:noAutofit/>
+          </a:bodyPr>
+          <a:lstStyle/>
+          <a:p>
+            <a:pPr marL="0" indent="0" algn="l">
+              <a:lnSpc>
+                <a:spcPct val="100000"/>
+              </a:lnSpc>
+              <a:spcBef>
+                <a:spcPts val="0"/>
+              </a:spcBef>
+              <a:spcAft>
+                <a:spcPts val="0"/>
+              </a:spcAft>
+              <a:buNone/>
+            </a:pPr>
+            <a:r>
+              <a:rPr lang="en-US" sz="700" b="1" i="0" dirty="0" spc="30">
+                <a:solidFill>
+                  <a:srgbClr val="2F9E44"/>
+                </a:solidFill>
+                <a:latin typeface="Arial"/>
+                <a:cs typeface="Arial"/>
+              </a:rPr>
+              <a:t>4 · RESPONDERS SEE IT</a:t>
+            </a:r>
+          </a:p>
+          <a:p>
+            <a:pPr marL="0" indent="0" algn="l">
+              <a:lnSpc>
+                <a:spcPct val="100000"/>
+              </a:lnSpc>
+              <a:spcBef>
+                <a:spcPts val="300"/>
+              </a:spcBef>
+              <a:spcAft>
+                <a:spcPts val="0"/>
+              </a:spcAft>
+              <a:buNone/>
+            </a:pPr>
+            <a:r>
+              <a:rPr lang="en-US" sz="700" b="0" i="0" dirty="0">
+                <a:solidFill>
+                  <a:srgbClr val="1A1A1A"/>
+                </a:solidFill>
+                <a:latin typeface="Arial"/>
+                <a:cs typeface="Arial"/>
+              </a:rPr>
+              <a:t>Firestore listener: the danger tag, a HIGH chip and the route appear</a:t>
+            </a:r>
+          </a:p>
+          <a:p>
+            <a:pPr marL="0" indent="0" algn="l">
+              <a:lnSpc>
+                <a:spcPct val="100000"/>
+              </a:lnSpc>
+              <a:spcBef>
+                <a:spcPts val="300"/>
+              </a:spcBef>
+              <a:spcAft>
+                <a:spcPts val="0"/>
+              </a:spcAft>
+              <a:buNone/>
+            </a:pPr>
+            <a:r>
+              <a:rPr lang="en-US" sz="700" b="1" i="0" dirty="0">
+                <a:solidFill>
+                  <a:srgbClr val="1A1A1A"/>
+                </a:solidFill>
+                <a:latin typeface="Arial"/>
+                <a:cs typeface="Arial"/>
+              </a:rPr>
+              <a:t>2–3.5 s before the caller’s words are transcribed (8 real calls)</a:t>
+            </a:r>
+          </a:p>
+        </p:txBody>
+      </p:sp>
+      <p:cxnSp>
+        <p:nvCxnSpPr>
+          <p:cNvPr id="307" name="Step arrow 3"/>
+          <p:cNvCxnSpPr/>
+          <p:nvPr/>
+        </p:nvCxnSpPr>
+        <p:spPr>
+          <a:xfrm>
+            <a:off x="5358384" y="2048256"/>
+            <a:ext cx="146304" cy="0"/>
+          </a:xfrm>
+          <a:prstGeom prst="straightConnector1">
+            <a:avLst/>
+          </a:prstGeom>
+          <a:ln w="19050">
+            <a:solidFill>
+              <a:srgbClr val="5F6368"/>
+            </a:solidFill>
+            <a:round/>
+            <a:tailEnd type="triangle" w="med" len="med"/>
+          </a:ln>
+        </p:spPr>
+      </p:cxnSp>
+      <p:sp>
+        <p:nvSpPr>
+          <p:cNvPr id="308" name="Step 5: back to Mia"/>
+          <p:cNvSpPr/>
+          <p:nvPr/>
+        </p:nvSpPr>
+        <p:spPr>
+          <a:xfrm>
+            <a:off x="7242048" y="1536192"/>
+            <a:ext cx="1536192" cy="1024128"/>
+          </a:xfrm>
+          <a:prstGeom prst="roundRect">
+            <a:avLst>
+              <a:gd name="adj" fmla="val 5357"/>
+            </a:avLst>
+          </a:prstGeom>
+          <a:solidFill>
+            <a:srgbClr val="E8F0FE"/>
+          </a:solidFill>
+          <a:ln>
+            <a:noFill/>
+          </a:ln>
+        </p:spPr>
+        <p:txBody>
+          <a:bodyPr wrap="square" lIns="73152" tIns="54864" rIns="73152" bIns="36576" rtlCol="0" anchor="t">
+            <a:noAutofit/>
+          </a:bodyPr>
+          <a:lstStyle/>
+          <a:p>
+            <a:pPr marL="0" indent="0" algn="l">
+              <a:lnSpc>
+                <a:spcPct val="100000"/>
+              </a:lnSpc>
+              <a:spcBef>
+                <a:spcPts val="0"/>
+              </a:spcBef>
+              <a:spcAft>
+                <a:spcPts val="0"/>
+              </a:spcAft>
+              <a:buNone/>
+            </a:pPr>
+            <a:r>
+              <a:rPr lang="en-US" sz="700" b="1" i="0" dirty="0" spc="30">
+                <a:solidFill>
+                  <a:srgbClr val="1A73E8"/>
+                </a:solidFill>
+                <a:latin typeface="Arial"/>
+                <a:cs typeface="Arial"/>
+              </a:rPr>
+              <a:t>5 · BACK TO MIA</a:t>
+            </a:r>
+          </a:p>
+          <a:p>
+            <a:pPr marL="0" indent="0" algn="l">
+              <a:lnSpc>
+                <a:spcPct val="100000"/>
+              </a:lnSpc>
+              <a:spcBef>
+                <a:spcPts val="300"/>
+              </a:spcBef>
+              <a:spcAft>
+                <a:spcPts val="0"/>
+              </a:spcAft>
+              <a:buNone/>
+            </a:pPr>
+            <a:r>
+              <a:rPr lang="en-US" sz="700" b="0" i="0" dirty="0">
+                <a:solidFill>
+                  <a:srgbClr val="1A1A1A"/>
+                </a:solidFill>
+                <a:latin typeface="Arial"/>
+                <a:cs typeface="Arial"/>
+              </a:rPr>
+              <a:t>The tool response carries what is now known</a:t>
+            </a:r>
+          </a:p>
+          <a:p>
+            <a:pPr marL="0" indent="0" algn="l">
+              <a:lnSpc>
+                <a:spcPct val="100000"/>
+              </a:lnSpc>
+              <a:spcBef>
+                <a:spcPts val="300"/>
+              </a:spcBef>
+              <a:spcAft>
+                <a:spcPts val="0"/>
+              </a:spcAft>
+              <a:buNone/>
+            </a:pPr>
+            <a:r>
+              <a:rPr lang="en-US" sz="700" b="0" i="0" dirty="0">
+                <a:solidFill>
+                  <a:srgbClr val="1A1A1A"/>
+                </a:solidFill>
+                <a:latin typeface="Arial"/>
+                <a:cs typeface="Arial"/>
+              </a:rPr>
+              <a:t>so Mia asks only what is still missing (where are you?) and relays each turn</a:t>
+            </a:r>
+          </a:p>
+        </p:txBody>
+      </p:sp>
+      <p:cxnSp>
+        <p:nvCxnSpPr>
+          <p:cNvPr id="309" name="Step arrow 4"/>
+          <p:cNvCxnSpPr/>
+          <p:nvPr/>
+        </p:nvCxnSpPr>
+        <p:spPr>
+          <a:xfrm>
+            <a:off x="7077456" y="2048256"/>
+            <a:ext cx="146304" cy="0"/>
+          </a:xfrm>
+          <a:prstGeom prst="straightConnector1">
+            <a:avLst/>
+          </a:prstGeom>
+          <a:ln w="19050">
+            <a:solidFill>
+              <a:srgbClr val="5F6368"/>
+            </a:solidFill>
+            <a:round/>
+            <a:tailEnd type="triangle" w="med" len="med"/>
+          </a:ln>
+        </p:spPr>
+      </p:cxnSp>
+      <p:sp>
+        <p:nvSpPr>
+          <p:cNvPr id="310" name="Loop back to Gemini"/>
+          <p:cNvSpPr/>
+          <p:nvPr/>
+        </p:nvSpPr>
+        <p:spPr>
+          <a:xfrm>
+            <a:off x="2852928" y="2560320"/>
+            <a:ext cx="5157216" cy="128016"/>
+          </a:xfrm>
+          <a:custGeom>
+            <a:avLst/>
+            <a:gdLst/>
+            <a:ahLst/>
+            <a:cxnLst/>
+            <a:rect l="l" t="t" r="r" b="b"/>
+            <a:pathLst>
+              <a:path w="5157216" h="128016" fill="none">
+                <a:moveTo>
+                  <a:pt x="5157216" y="0"/>
+                </a:moveTo>
+                <a:lnTo>
+                  <a:pt x="5157216" y="128016"/>
+                </a:lnTo>
+                <a:lnTo>
+                  <a:pt x="0" y="128016"/>
+                </a:lnTo>
+                <a:lnTo>
+                  <a:pt x="0" y="0"/>
+                </a:lnTo>
+              </a:path>
+            </a:pathLst>
+          </a:custGeom>
+          <a:noFill/>
+          <a:ln w="19050">
+            <a:solidFill>
+              <a:srgbClr val="1A73E8"/>
+            </a:solidFill>
+            <a:round/>
+            <a:tailEnd type="triangle" w="med" len="med"/>
+          </a:ln>
+        </p:spPr>
+      </p:sp>
+      <p:sp>
+        <p:nvSpPr>
+          <p:cNvPr id="311" name="Label: loop"/>
+          <p:cNvSpPr txBox="1"/>
+          <p:nvPr/>
+        </p:nvSpPr>
+        <p:spPr>
+          <a:xfrm>
+            <a:off x="2990088" y="2715768"/>
+            <a:ext cx="4882896" cy="128016"/>
+          </a:xfrm>
+          <a:prstGeom prst="rect">
+            <a:avLst/>
+          </a:prstGeom>
+          <a:noFill/>
+          <a:ln>
+            <a:noFill/>
+          </a:ln>
+        </p:spPr>
+        <p:txBody>
+          <a:bodyPr wrap="square" lIns="0" tIns="0" rIns="0" bIns="0" rtlCol="0" anchor="t">
+            <a:noAutofit/>
+          </a:bodyPr>
+          <a:lstStyle/>
+          <a:p>
+            <a:pPr marL="0" indent="0" algn="ctr">
+              <a:lnSpc>
+                <a:spcPct val="100000"/>
+              </a:lnSpc>
+              <a:spcBef>
+                <a:spcPts val="0"/>
+              </a:spcBef>
+              <a:spcAft>
+                <a:spcPts val="0"/>
+              </a:spcAft>
+              <a:buNone/>
+            </a:pPr>
+            <a:r>
+              <a:rPr lang="en-US" sz="700" b="0" i="0" dirty="0">
+                <a:solidFill>
+                  <a:srgbClr val="1A73E8"/>
+                </a:solidFill>
+                <a:latin typeface="Arial"/>
+                <a:cs typeface="Arial"/>
+              </a:rPr>
+              <a:t>the loop repeats for every answer, one function call at a time</a:t>
+            </a:r>
+          </a:p>
+        </p:txBody>
+      </p:sp>
+      <p:sp>
+        <p:nvSpPr>
+          <p:cNvPr id="312" name="Header: tools"/>
+          <p:cNvSpPr txBox="1"/>
+          <p:nvPr/>
+        </p:nvSpPr>
+        <p:spPr>
+          <a:xfrm>
+            <a:off x="365760" y="2944368"/>
+            <a:ext cx="4023360" cy="164592"/>
+          </a:xfrm>
+          <a:prstGeom prst="rect">
+            <a:avLst/>
+          </a:prstGeom>
+          <a:noFill/>
+          <a:ln>
+            <a:noFill/>
+          </a:ln>
+        </p:spPr>
+        <p:txBody>
+          <a:bodyPr wrap="square" lIns="0" tIns="0" rIns="0" bIns="0" rtlCol="0" anchor="t">
+            <a:noAutofit/>
+          </a:bodyPr>
+          <a:lstStyle/>
+          <a:p>
+            <a:pPr marL="0" indent="0" algn="l">
+              <a:lnSpc>
+                <a:spcPct val="100000"/>
+              </a:lnSpc>
+              <a:spcBef>
+                <a:spcPts val="0"/>
+              </a:spcBef>
+              <a:spcAft>
+                <a:spcPts val="0"/>
+              </a:spcAft>
+              <a:buNone/>
+            </a:pPr>
+            <a:r>
+              <a:rPr lang="en-US" sz="800" b="1" i="0" dirty="0" spc="60">
+                <a:solidFill>
+                  <a:srgbClr val="1A73E8"/>
+                </a:solidFill>
+                <a:latin typeface="Arial"/>
+                <a:cs typeface="Arial"/>
+              </a:rPr>
+              <a:t>THE 12 TOOLS, BY WHAT THEY DO</a:t>
+            </a:r>
+          </a:p>
+        </p:txBody>
+      </p:sp>
+      <p:sp>
+        <p:nvSpPr>
+          <p:cNvPr id="313" name="Tools: report"/>
+          <p:cNvSpPr/>
+          <p:nvPr/>
+        </p:nvSpPr>
+        <p:spPr>
+          <a:xfrm>
+            <a:off x="365760" y="3154680"/>
+            <a:ext cx="4069080" cy="512064"/>
+          </a:xfrm>
+          <a:prstGeom prst="roundRect">
+            <a:avLst>
+              <a:gd name="adj" fmla="val 10714"/>
             </a:avLst>
           </a:prstGeom>
           <a:solidFill>
@@ -25745,180 +27868,76 @@
           <a:ln>
             <a:noFill/>
           </a:ln>
-          <a:effectLst/>
-        </p:spPr>
-        <p:style>
-          <a:lnRef idx="1">
-            <a:schemeClr val="accent1"/>
-          </a:lnRef>
-          <a:fillRef idx="3">
-            <a:schemeClr val="accent1"/>
-          </a:fillRef>
-          <a:effectRef idx="2">
-            <a:schemeClr val="accent1"/>
-          </a:effectRef>
-          <a:fontRef idx="minor">
-            <a:schemeClr val="lt1"/>
-          </a:fontRef>
-        </p:style>
-        <p:txBody>
-          <a:bodyPr wrap="square" lIns="73152" tIns="73152" rIns="73152" bIns="73152" rtlCol="0" anchor="ctr"/>
-          <a:lstStyle/>
-          <a:p>
-            <a:pPr algn="l"/>
-            <a:r>
-              <a:rPr sz="950" b="1" i="0">
+        </p:spPr>
+        <p:txBody>
+          <a:bodyPr wrap="square" lIns="73152" tIns="54864" rIns="73152" bIns="36576" rtlCol="0" anchor="t">
+            <a:noAutofit/>
+          </a:bodyPr>
+          <a:lstStyle/>
+          <a:p>
+            <a:pPr marL="0" indent="0" algn="l">
+              <a:lnSpc>
+                <a:spcPct val="100000"/>
+              </a:lnSpc>
+              <a:spcBef>
+                <a:spcPts val="0"/>
+              </a:spcBef>
+              <a:spcAft>
+                <a:spcPts val="0"/>
+              </a:spcAft>
+              <a:buNone/>
+            </a:pPr>
+            <a:r>
+              <a:rPr lang="en-US" sz="800" b="1" i="0" dirty="0">
                 <a:solidFill>
                   <a:srgbClr val="1A1A1A"/>
                 </a:solidFill>
                 <a:latin typeface="Arial"/>
-              </a:rPr>
-              <a:t>Senses</a:t>
-            </a:r>
-          </a:p>
-          <a:p>
-            <a:pPr algn="l"/>
-            <a:r>
-              <a:rPr sz="750" b="0" i="0">
-                <a:solidFill>
-                  <a:srgbClr val="1A1A1A"/>
-                </a:solidFill>
-                <a:latin typeface="Arial"/>
-              </a:rPr>
-              <a:t>mic 16 kHz PCM</a:t>
-            </a:r>
-          </a:p>
-          <a:p>
-            <a:pPr algn="l"/>
-            <a:r>
-              <a:rPr sz="750" b="0" i="0">
-                <a:solidFill>
-                  <a:srgbClr val="1A1A1A"/>
-                </a:solidFill>
-                <a:latin typeface="Arial"/>
-              </a:rPr>
-              <a:t>camera 0.5 fps, low-res</a:t>
-            </a:r>
-          </a:p>
-          <a:p>
-            <a:pPr algn="l"/>
-            <a:r>
-              <a:rPr sz="750" b="0" i="0">
-                <a:solidFill>
-                  <a:srgbClr val="1A1A1A"/>
-                </a:solidFill>
-                <a:latin typeface="Arial"/>
-              </a:rPr>
-              <a:t>motion + GPS</a:t>
-            </a:r>
-          </a:p>
-        </p:txBody>
-      </p:sp>
-      <p:sp>
-        <p:nvSpPr>
-          <p:cNvPr id="170" name="Rounded Rectangle 169"/>
+                <a:cs typeface="Arial"/>
+              </a:rPr>
+              <a:t>Report what she learns · 8 tools, answered silently</a:t>
+            </a:r>
+          </a:p>
+          <a:p>
+            <a:pPr marL="0" indent="0" algn="l">
+              <a:lnSpc>
+                <a:spcPct val="100000"/>
+              </a:lnSpc>
+              <a:spcBef>
+                <a:spcPts val="200"/>
+              </a:spcBef>
+              <a:spcAft>
+                <a:spcPts val="0"/>
+              </a:spcAft>
+              <a:buNone/>
+            </a:pPr>
+            <a:r>
+              <a:rPr lang="en-US" sz="700" b="0" i="0" dirty="0">
+                <a:solidFill>
+                  <a:srgbClr val="5F6368"/>
+                </a:solidFill>
+                <a:latin typeface="Arial"/>
+                <a:cs typeface="Arial"/>
+              </a:rPr>
+              <a:t>danger, people and urgency · voice stress · what the camera sees and the room sounds like · number plates · signs of coercion · caller’s apparent age · advice given · message delivered</a:t>
+            </a:r>
+          </a:p>
+        </p:txBody>
+      </p:sp>
+      <p:sp>
+        <p:nvSpPr>
+          <p:cNvPr id="314" name="Tools: act"/>
           <p:cNvSpPr/>
           <p:nvPr/>
         </p:nvSpPr>
         <p:spPr>
           <a:xfrm>
-            <a:off x="1655064" y="1554480"/>
-            <a:ext cx="1325880" cy="1188720"/>
+            <a:off x="365760" y="3712464"/>
+            <a:ext cx="4069080" cy="448056"/>
           </a:xfrm>
           <a:prstGeom prst="roundRect">
             <a:avLst>
-              <a:gd name="adj" fmla="val 8000"/>
-            </a:avLst>
-          </a:prstGeom>
-          <a:solidFill>
-            <a:srgbClr val="E8F0FE"/>
-          </a:solidFill>
-          <a:ln>
-            <a:noFill/>
-          </a:ln>
-          <a:effectLst/>
-        </p:spPr>
-        <p:style>
-          <a:lnRef idx="1">
-            <a:schemeClr val="accent1"/>
-          </a:lnRef>
-          <a:fillRef idx="3">
-            <a:schemeClr val="accent1"/>
-          </a:fillRef>
-          <a:effectRef idx="2">
-            <a:schemeClr val="accent1"/>
-          </a:effectRef>
-          <a:fontRef idx="minor">
-            <a:schemeClr val="lt1"/>
-          </a:fontRef>
-        </p:style>
-        <p:txBody>
-          <a:bodyPr wrap="square" lIns="73152" tIns="73152" rIns="73152" bIns="73152" rtlCol="0" anchor="ctr"/>
-          <a:lstStyle/>
-          <a:p>
-            <a:pPr algn="l"/>
-            <a:r>
-              <a:rPr sz="950" b="1" i="0">
-                <a:solidFill>
-                  <a:srgbClr val="1A73E8"/>
-                </a:solidFill>
-                <a:latin typeface="Arial"/>
-              </a:rPr>
-              <a:t>Gemini Live 3.8</a:t>
-            </a:r>
-          </a:p>
-          <a:p>
-            <a:pPr algn="l"/>
-            <a:r>
-              <a:rPr sz="750" b="0" i="0">
-                <a:solidFill>
-                  <a:srgbClr val="1A1A1A"/>
-                </a:solidFill>
-                <a:latin typeface="Arial"/>
-              </a:rPr>
-              <a:t>Mia persona</a:t>
-            </a:r>
-          </a:p>
-          <a:p>
-            <a:pPr algn="l"/>
-            <a:r>
-              <a:rPr sz="750" b="0" i="0">
-                <a:solidFill>
-                  <a:srgbClr val="1A1A1A"/>
-                </a:solidFill>
-                <a:latin typeface="Arial"/>
-              </a:rPr>
-              <a:t>covert / open modes</a:t>
-            </a:r>
-          </a:p>
-          <a:p>
-            <a:pPr algn="l"/>
-            <a:r>
-              <a:rPr sz="750" b="0" i="0">
-                <a:solidFill>
-                  <a:srgbClr val="1A1A1A"/>
-                </a:solidFill>
-                <a:latin typeface="Arial"/>
-              </a:rPr>
-              <a:t>6 languages, voice stress</a:t>
-            </a:r>
-          </a:p>
-        </p:txBody>
-      </p:sp>
-      <p:sp>
-        <p:nvSpPr>
-          <p:cNvPr id="171" name="Rounded Rectangle 170"/>
-          <p:cNvSpPr/>
-          <p:nvPr/>
-        </p:nvSpPr>
-        <p:spPr>
-          <a:xfrm>
-            <a:off x="5788152" y="1554480"/>
-            <a:ext cx="1371600" cy="1188720"/>
-          </a:xfrm>
-          <a:prstGeom prst="roundRect">
-            <a:avLst>
-              <a:gd name="adj" fmla="val 8000"/>
+              <a:gd name="adj" fmla="val 12245"/>
             </a:avLst>
           </a:prstGeom>
           <a:solidFill>
@@ -25927,89 +27946,76 @@
           <a:ln>
             <a:noFill/>
           </a:ln>
-          <a:effectLst/>
-        </p:spPr>
-        <p:style>
-          <a:lnRef idx="1">
-            <a:schemeClr val="accent1"/>
-          </a:lnRef>
-          <a:fillRef idx="3">
-            <a:schemeClr val="accent1"/>
-          </a:fillRef>
-          <a:effectRef idx="2">
-            <a:schemeClr val="accent1"/>
-          </a:effectRef>
-          <a:fontRef idx="minor">
-            <a:schemeClr val="lt1"/>
-          </a:fontRef>
-        </p:style>
-        <p:txBody>
-          <a:bodyPr wrap="square" lIns="73152" tIns="73152" rIns="73152" bIns="73152" rtlCol="0" anchor="ctr"/>
-          <a:lstStyle/>
-          <a:p>
-            <a:pPr algn="l"/>
-            <a:r>
-              <a:rPr sz="950" b="1" i="0">
+        </p:spPr>
+        <p:txBody>
+          <a:bodyPr wrap="square" lIns="73152" tIns="54864" rIns="73152" bIns="36576" rtlCol="0" anchor="t">
+            <a:noAutofit/>
+          </a:bodyPr>
+          <a:lstStyle/>
+          <a:p>
+            <a:pPr marL="0" indent="0" algn="l">
+              <a:lnSpc>
+                <a:spcPct val="100000"/>
+              </a:lnSpc>
+              <a:spcBef>
+                <a:spcPts val="0"/>
+              </a:spcBef>
+              <a:spcAft>
+                <a:spcPts val="0"/>
+              </a:spcAft>
+              <a:buNone/>
+            </a:pPr>
+            <a:r>
+              <a:rPr lang="en-US" sz="800" b="1" i="0" dirty="0">
                 <a:solidFill>
                   <a:srgbClr val="1A1A1A"/>
                 </a:solidFill>
                 <a:latin typeface="Arial"/>
-              </a:rPr>
-              <a:t>App logic</a:t>
-            </a:r>
-          </a:p>
-          <a:p>
-            <a:pPr algn="l"/>
-            <a:r>
-              <a:rPr sz="750" b="0" i="0">
-                <a:solidFill>
-                  <a:srgbClr val="1A1A1A"/>
-                </a:solidFill>
-                <a:latin typeface="Arial"/>
-              </a:rPr>
-              <a:t>severity rules in code</a:t>
-            </a:r>
-          </a:p>
-          <a:p>
-            <a:pPr algn="l"/>
-            <a:r>
-              <a:rPr sz="750" b="0" i="0">
-                <a:solidFill>
-                  <a:srgbClr val="1A1A1A"/>
-                </a:solidFill>
-                <a:latin typeface="Arial"/>
-              </a:rPr>
-              <a:t>geocode + OSRM route</a:t>
-            </a:r>
-          </a:p>
-          <a:p>
-            <a:pPr algn="l"/>
-            <a:r>
-              <a:rPr sz="750" b="0" i="0">
-                <a:solidFill>
-                  <a:srgbClr val="1A1A1A"/>
-                </a:solidFill>
-                <a:latin typeface="Arial"/>
-              </a:rPr>
-              <a:t>nearby police/hospital</a:t>
-            </a:r>
-          </a:p>
-        </p:txBody>
-      </p:sp>
-      <p:sp>
-        <p:nvSpPr>
-          <p:cNvPr id="172" name="Rounded Rectangle 171"/>
+                <a:cs typeface="Arial"/>
+              </a:rPr>
+              <a:t>Act for the caller · 3 tools, answered so Mia can use the result</a:t>
+            </a:r>
+          </a:p>
+          <a:p>
+            <a:pPr marL="0" indent="0" algn="l">
+              <a:lnSpc>
+                <a:spcPct val="100000"/>
+              </a:lnSpc>
+              <a:spcBef>
+                <a:spcPts val="200"/>
+              </a:spcBef>
+              <a:spcAft>
+                <a:spcPts val="0"/>
+              </a:spcAft>
+              <a:buNone/>
+            </a:pPr>
+            <a:r>
+              <a:rPr lang="en-US" sz="700" b="0" i="0" dirty="0">
+                <a:solidFill>
+                  <a:srgbClr val="5F6368"/>
+                </a:solidFill>
+                <a:latin typeface="Arial"/>
+                <a:cs typeface="Arial"/>
+              </a:rPr>
+              <a:t>confirm the address on a map · route to safety (nearby police, OSRM) · email the case report</a:t>
+            </a:r>
+          </a:p>
+        </p:txBody>
+      </p:sp>
+      <p:sp>
+        <p:nvSpPr>
+          <p:cNvPr id="315" name="Tools: end"/>
           <p:cNvSpPr/>
           <p:nvPr/>
         </p:nvSpPr>
         <p:spPr>
           <a:xfrm>
-            <a:off x="7306056" y="1554480"/>
-            <a:ext cx="1472184" cy="1188720"/>
+            <a:off x="365760" y="4206240"/>
+            <a:ext cx="4069080" cy="274320"/>
           </a:xfrm>
           <a:prstGeom prst="roundRect">
             <a:avLst>
-              <a:gd name="adj" fmla="val 8000"/>
+              <a:gd name="adj" fmla="val 20000"/>
             </a:avLst>
           </a:prstGeom>
           <a:solidFill>
@@ -26018,1136 +28024,112 @@
           <a:ln>
             <a:noFill/>
           </a:ln>
-          <a:effectLst/>
-        </p:spPr>
-        <p:style>
-          <a:lnRef idx="1">
-            <a:schemeClr val="accent1"/>
-          </a:lnRef>
-          <a:fillRef idx="3">
-            <a:schemeClr val="accent1"/>
-          </a:fillRef>
-          <a:effectRef idx="2">
-            <a:schemeClr val="accent1"/>
-          </a:effectRef>
-          <a:fontRef idx="minor">
-            <a:schemeClr val="lt1"/>
-          </a:fontRef>
-        </p:style>
-        <p:txBody>
-          <a:bodyPr wrap="square" lIns="73152" tIns="73152" rIns="73152" bIns="73152" rtlCol="0" anchor="ctr"/>
-          <a:lstStyle/>
-          <a:p>
-            <a:pPr algn="l"/>
-            <a:r>
-              <a:rPr sz="950" b="1" i="0">
-                <a:solidFill>
-                  <a:srgbClr val="2F9E44"/>
-                </a:solidFill>
-                <a:latin typeface="Arial"/>
-              </a:rPr>
-              <a:t>Firestore → console</a:t>
-            </a:r>
-          </a:p>
-          <a:p>
-            <a:pPr algn="l"/>
-            <a:r>
-              <a:rPr sz="750" b="0" i="0">
+        </p:spPr>
+        <p:txBody>
+          <a:bodyPr wrap="square" lIns="73152" tIns="54864" rIns="73152" bIns="36576" rtlCol="0" anchor="t">
+            <a:noAutofit/>
+          </a:bodyPr>
+          <a:lstStyle/>
+          <a:p>
+            <a:pPr marL="0" indent="0" algn="l">
+              <a:lnSpc>
+                <a:spcPct val="100000"/>
+              </a:lnSpc>
+              <a:spcBef>
+                <a:spcPts val="0"/>
+              </a:spcBef>
+              <a:spcAft>
+                <a:spcPts val="0"/>
+              </a:spcAft>
+              <a:buNone/>
+            </a:pPr>
+            <a:r>
+              <a:rPr lang="en-US" sz="800" b="1" i="0" dirty="0">
                 <a:solidFill>
                   <a:srgbClr val="1A1A1A"/>
                 </a:solidFill>
                 <a:latin typeface="Arial"/>
-              </a:rPr>
-              <a:t>field-by-field</a:t>
-            </a:r>
-          </a:p>
-          <a:p>
-            <a:pPr algn="l"/>
-            <a:r>
-              <a:rPr sz="750" b="0" i="0">
-                <a:solidFill>
-                  <a:srgbClr val="1A1A1A"/>
-                </a:solidFill>
-                <a:latin typeface="Arial"/>
-              </a:rPr>
-              <a:t>in real time</a:t>
-            </a:r>
-          </a:p>
-        </p:txBody>
-      </p:sp>
-      <p:sp>
-        <p:nvSpPr>
-          <p:cNvPr id="173" name="Rounded Rectangle 172"/>
-          <p:cNvSpPr/>
-          <p:nvPr/>
-        </p:nvSpPr>
-        <p:spPr>
-          <a:xfrm>
-            <a:off x="3127248" y="1554480"/>
-            <a:ext cx="2514600" cy="1188720"/>
-          </a:xfrm>
-          <a:prstGeom prst="roundRect">
-            <a:avLst>
-              <a:gd name="adj" fmla="val 8000"/>
-            </a:avLst>
-          </a:prstGeom>
-          <a:solidFill>
-            <a:srgbClr val="FFFFFF"/>
-          </a:solidFill>
-          <a:ln w="9525">
-            <a:solidFill>
-              <a:srgbClr val="1A73E8"/>
-            </a:solidFill>
-          </a:ln>
-          <a:effectLst/>
-        </p:spPr>
-        <p:style>
-          <a:lnRef idx="1">
-            <a:schemeClr val="accent1"/>
-          </a:lnRef>
-          <a:fillRef idx="3">
-            <a:schemeClr val="accent1"/>
-          </a:fillRef>
-          <a:effectRef idx="2">
-            <a:schemeClr val="accent1"/>
-          </a:effectRef>
-          <a:fontRef idx="minor">
-            <a:schemeClr val="lt1"/>
-          </a:fontRef>
-        </p:style>
-        <p:txBody>
-          <a:bodyPr rtlCol="0" anchor="ctr"/>
-          <a:lstStyle/>
-          <a:p>
-            <a:endParaRPr/>
-          </a:p>
-        </p:txBody>
-      </p:sp>
-      <p:sp>
-        <p:nvSpPr>
-          <p:cNvPr id="174" name="TextBox 173"/>
+                <a:cs typeface="Arial"/>
+              </a:rPr>
+              <a:t>End the call · 1 tool: </a:t>
+            </a:r>
+            <a:r>
+              <a:rPr lang="en-US" sz="700" b="0" i="0" dirty="0">
+                <a:solidFill>
+                  <a:srgbClr val="5F6368"/>
+                </a:solidFill>
+                <a:latin typeface="Arial"/>
+                <a:cs typeface="Arial"/>
+              </a:rPr>
+              <a:t>hangs up only after the goodbye has finished playing</a:t>
+            </a:r>
+          </a:p>
+        </p:txBody>
+      </p:sp>
+      <p:sp>
+        <p:nvSpPr>
+          <p:cNvPr id="316" name="Header: reliability"/>
           <p:cNvSpPr txBox="1"/>
           <p:nvPr/>
         </p:nvSpPr>
         <p:spPr>
           <a:xfrm>
-            <a:off x="3200400" y="1581912"/>
-            <a:ext cx="2423160" cy="182880"/>
+            <a:off x="4617720" y="2944368"/>
+            <a:ext cx="4160520" cy="164592"/>
           </a:xfrm>
           <a:prstGeom prst="rect">
             <a:avLst/>
           </a:prstGeom>
           <a:noFill/>
-        </p:spPr>
-        <p:txBody>
-          <a:bodyPr wrap="square" lIns="0" tIns="0" rIns="0" bIns="0" anchor="t"/>
-          <a:lstStyle/>
-          <a:p>
-            <a:pPr algn="l"/>
-            <a:r>
-              <a:rPr sz="850" b="1" i="0">
-                <a:solidFill>
-                  <a:srgbClr val="1A73E8"/>
-                </a:solidFill>
-                <a:latin typeface="Arial"/>
-              </a:rPr>
-              <a:t>12 function-calling tools</a:t>
-            </a:r>
-          </a:p>
-        </p:txBody>
-      </p:sp>
-      <p:sp>
-        <p:nvSpPr>
-          <p:cNvPr id="175" name="TextBox 174"/>
-          <p:cNvSpPr txBox="1"/>
-          <p:nvPr/>
-        </p:nvSpPr>
-        <p:spPr>
-          <a:xfrm>
-            <a:off x="3200400" y="1783080"/>
-            <a:ext cx="1234440" cy="155448"/>
-          </a:xfrm>
-          <a:prstGeom prst="rect">
-            <a:avLst/>
-          </a:prstGeom>
-          <a:noFill/>
-        </p:spPr>
-        <p:txBody>
-          <a:bodyPr wrap="square" lIns="0" tIns="0" rIns="0" bIns="0" anchor="t"/>
-          <a:lstStyle/>
-          <a:p>
-            <a:pPr algn="l"/>
-            <a:r>
-              <a:rPr sz="580" b="0" i="0">
-                <a:solidFill>
-                  <a:srgbClr val="1A1A1A"/>
-                </a:solidFill>
-                <a:latin typeface="Courier New"/>
-              </a:rPr>
-              <a:t>report_situation</a:t>
-            </a:r>
-          </a:p>
-        </p:txBody>
-      </p:sp>
-      <p:sp>
-        <p:nvSpPr>
-          <p:cNvPr id="176" name="TextBox 175"/>
-          <p:cNvSpPr txBox="1"/>
-          <p:nvPr/>
-        </p:nvSpPr>
-        <p:spPr>
-          <a:xfrm>
-            <a:off x="3200400" y="1938528"/>
-            <a:ext cx="1234440" cy="155448"/>
-          </a:xfrm>
-          <a:prstGeom prst="rect">
-            <a:avLst/>
-          </a:prstGeom>
-          <a:noFill/>
-        </p:spPr>
-        <p:txBody>
-          <a:bodyPr wrap="square" lIns="0" tIns="0" rIns="0" bIns="0" anchor="t"/>
-          <a:lstStyle/>
-          <a:p>
-            <a:pPr algn="l"/>
-            <a:r>
-              <a:rPr sz="580" b="0" i="0">
-                <a:solidFill>
-                  <a:srgbClr val="1A1A1A"/>
-                </a:solidFill>
-                <a:latin typeface="Courier New"/>
-              </a:rPr>
-              <a:t>confirm_address</a:t>
-            </a:r>
-          </a:p>
-        </p:txBody>
-      </p:sp>
-      <p:sp>
-        <p:nvSpPr>
-          <p:cNvPr id="177" name="TextBox 176"/>
-          <p:cNvSpPr txBox="1"/>
-          <p:nvPr/>
-        </p:nvSpPr>
-        <p:spPr>
-          <a:xfrm>
-            <a:off x="3200400" y="2093976"/>
-            <a:ext cx="1234440" cy="155448"/>
-          </a:xfrm>
-          <a:prstGeom prst="rect">
-            <a:avLst/>
-          </a:prstGeom>
-          <a:noFill/>
-        </p:spPr>
-        <p:txBody>
-          <a:bodyPr wrap="square" lIns="0" tIns="0" rIns="0" bIns="0" anchor="t"/>
-          <a:lstStyle/>
-          <a:p>
-            <a:pPr algn="l"/>
-            <a:r>
-              <a:rPr sz="580" b="0" i="0">
-                <a:solidFill>
-                  <a:srgbClr val="1A1A1A"/>
-                </a:solidFill>
-                <a:latin typeface="Courier New"/>
-              </a:rPr>
-              <a:t>report_stress_level</a:t>
-            </a:r>
-          </a:p>
-        </p:txBody>
-      </p:sp>
-      <p:sp>
-        <p:nvSpPr>
-          <p:cNvPr id="178" name="TextBox 177"/>
-          <p:cNvSpPr txBox="1"/>
-          <p:nvPr/>
-        </p:nvSpPr>
-        <p:spPr>
-          <a:xfrm>
-            <a:off x="3200400" y="2249424"/>
-            <a:ext cx="1234440" cy="155448"/>
-          </a:xfrm>
-          <a:prstGeom prst="rect">
-            <a:avLst/>
-          </a:prstGeom>
-          <a:noFill/>
-        </p:spPr>
-        <p:txBody>
-          <a:bodyPr wrap="square" lIns="0" tIns="0" rIns="0" bIns="0" anchor="t"/>
-          <a:lstStyle/>
-          <a:p>
-            <a:pPr algn="l"/>
-            <a:r>
-              <a:rPr sz="580" b="0" i="0">
-                <a:solidFill>
-                  <a:srgbClr val="1A1A1A"/>
-                </a:solidFill>
-                <a:latin typeface="Courier New"/>
-              </a:rPr>
-              <a:t>report_scene_observation</a:t>
-            </a:r>
-          </a:p>
-        </p:txBody>
-      </p:sp>
-      <p:sp>
-        <p:nvSpPr>
-          <p:cNvPr id="179" name="TextBox 178"/>
-          <p:cNvSpPr txBox="1"/>
-          <p:nvPr/>
-        </p:nvSpPr>
-        <p:spPr>
-          <a:xfrm>
-            <a:off x="3200400" y="2404872"/>
-            <a:ext cx="1234440" cy="155448"/>
-          </a:xfrm>
-          <a:prstGeom prst="rect">
-            <a:avLst/>
-          </a:prstGeom>
-          <a:noFill/>
-        </p:spPr>
-        <p:txBody>
-          <a:bodyPr wrap="square" lIns="0" tIns="0" rIns="0" bIns="0" anchor="t"/>
-          <a:lstStyle/>
-          <a:p>
-            <a:pPr algn="l"/>
-            <a:r>
-              <a:rPr sz="580" b="0" i="0">
-                <a:solidFill>
-                  <a:srgbClr val="1A1A1A"/>
-                </a:solidFill>
-                <a:latin typeface="Courier New"/>
-              </a:rPr>
-              <a:t>report_caller_estimate</a:t>
-            </a:r>
-          </a:p>
-        </p:txBody>
-      </p:sp>
-      <p:sp>
-        <p:nvSpPr>
-          <p:cNvPr id="180" name="TextBox 179"/>
-          <p:cNvSpPr txBox="1"/>
-          <p:nvPr/>
-        </p:nvSpPr>
-        <p:spPr>
-          <a:xfrm>
-            <a:off x="3200400" y="2560320"/>
-            <a:ext cx="1234440" cy="155448"/>
-          </a:xfrm>
-          <a:prstGeom prst="rect">
-            <a:avLst/>
-          </a:prstGeom>
-          <a:noFill/>
-        </p:spPr>
-        <p:txBody>
-          <a:bodyPr wrap="square" lIns="0" tIns="0" rIns="0" bIns="0" anchor="t"/>
-          <a:lstStyle/>
-          <a:p>
-            <a:pPr algn="l"/>
-            <a:r>
-              <a:rPr sz="580" b="0" i="0">
-                <a:solidFill>
-                  <a:srgbClr val="1A1A1A"/>
-                </a:solidFill>
-                <a:latin typeface="Courier New"/>
-              </a:rPr>
-              <a:t>report_advice</a:t>
-            </a:r>
-          </a:p>
-        </p:txBody>
-      </p:sp>
-      <p:sp>
-        <p:nvSpPr>
-          <p:cNvPr id="181" name="TextBox 180"/>
-          <p:cNvSpPr txBox="1"/>
-          <p:nvPr/>
-        </p:nvSpPr>
-        <p:spPr>
-          <a:xfrm>
-            <a:off x="4416552" y="1783080"/>
-            <a:ext cx="1234440" cy="155448"/>
-          </a:xfrm>
-          <a:prstGeom prst="rect">
-            <a:avLst/>
-          </a:prstGeom>
-          <a:noFill/>
-        </p:spPr>
-        <p:txBody>
-          <a:bodyPr wrap="square" lIns="0" tIns="0" rIns="0" bIns="0" anchor="t"/>
-          <a:lstStyle/>
-          <a:p>
-            <a:pPr algn="l"/>
-            <a:r>
-              <a:rPr sz="580" b="0" i="0">
-                <a:solidFill>
-                  <a:srgbClr val="1A1A1A"/>
-                </a:solidFill>
-                <a:latin typeface="Courier New"/>
-              </a:rPr>
-              <a:t>get_route_guidance</a:t>
-            </a:r>
-          </a:p>
-        </p:txBody>
-      </p:sp>
-      <p:sp>
-        <p:nvSpPr>
-          <p:cNvPr id="182" name="TextBox 181"/>
-          <p:cNvSpPr txBox="1"/>
-          <p:nvPr/>
-        </p:nvSpPr>
-        <p:spPr>
-          <a:xfrm>
-            <a:off x="4416552" y="1938528"/>
-            <a:ext cx="1234440" cy="155448"/>
-          </a:xfrm>
-          <a:prstGeom prst="rect">
-            <a:avLst/>
-          </a:prstGeom>
-          <a:noFill/>
-        </p:spPr>
-        <p:txBody>
-          <a:bodyPr wrap="square" lIns="0" tIns="0" rIns="0" bIns="0" anchor="t"/>
-          <a:lstStyle/>
-          <a:p>
-            <a:pPr algn="l"/>
-            <a:r>
-              <a:rPr sz="580" b="0" i="0">
-                <a:solidFill>
-                  <a:srgbClr val="1A1A1A"/>
-                </a:solidFill>
-                <a:latin typeface="Courier New"/>
-              </a:rPr>
-              <a:t>report_vehicle_number</a:t>
-            </a:r>
-          </a:p>
-        </p:txBody>
-      </p:sp>
-      <p:sp>
-        <p:nvSpPr>
-          <p:cNvPr id="183" name="TextBox 182"/>
-          <p:cNvSpPr txBox="1"/>
-          <p:nvPr/>
-        </p:nvSpPr>
-        <p:spPr>
-          <a:xfrm>
-            <a:off x="4416552" y="2093976"/>
-            <a:ext cx="1234440" cy="155448"/>
-          </a:xfrm>
-          <a:prstGeom prst="rect">
-            <a:avLst/>
-          </a:prstGeom>
-          <a:noFill/>
-        </p:spPr>
-        <p:txBody>
-          <a:bodyPr wrap="square" lIns="0" tIns="0" rIns="0" bIns="0" anchor="t"/>
-          <a:lstStyle/>
-          <a:p>
-            <a:pPr algn="l"/>
-            <a:r>
-              <a:rPr sz="580" b="0" i="0">
-                <a:solidFill>
-                  <a:srgbClr val="1A1A1A"/>
-                </a:solidFill>
-                <a:latin typeface="Courier New"/>
-              </a:rPr>
-              <a:t>report_coercion_signal</a:t>
-            </a:r>
-          </a:p>
-        </p:txBody>
-      </p:sp>
-      <p:sp>
-        <p:nvSpPr>
-          <p:cNvPr id="184" name="TextBox 183"/>
-          <p:cNvSpPr txBox="1"/>
-          <p:nvPr/>
-        </p:nvSpPr>
-        <p:spPr>
-          <a:xfrm>
-            <a:off x="4416552" y="2249424"/>
-            <a:ext cx="1234440" cy="155448"/>
-          </a:xfrm>
-          <a:prstGeom prst="rect">
-            <a:avLst/>
-          </a:prstGeom>
-          <a:noFill/>
-        </p:spPr>
-        <p:txBody>
-          <a:bodyPr wrap="square" lIns="0" tIns="0" rIns="0" bIns="0" anchor="t"/>
-          <a:lstStyle/>
-          <a:p>
-            <a:pPr algn="l"/>
-            <a:r>
-              <a:rPr sz="580" b="0" i="0">
-                <a:solidFill>
-                  <a:srgbClr val="1A1A1A"/>
-                </a:solidFill>
-                <a:latin typeface="Courier New"/>
-              </a:rPr>
-              <a:t>confirm_message_delivered</a:t>
-            </a:r>
-          </a:p>
-        </p:txBody>
-      </p:sp>
-      <p:sp>
-        <p:nvSpPr>
-          <p:cNvPr id="185" name="TextBox 184"/>
-          <p:cNvSpPr txBox="1"/>
-          <p:nvPr/>
-        </p:nvSpPr>
-        <p:spPr>
-          <a:xfrm>
-            <a:off x="4416552" y="2404872"/>
-            <a:ext cx="1234440" cy="155448"/>
-          </a:xfrm>
-          <a:prstGeom prst="rect">
-            <a:avLst/>
-          </a:prstGeom>
-          <a:noFill/>
-        </p:spPr>
-        <p:txBody>
-          <a:bodyPr wrap="square" lIns="0" tIns="0" rIns="0" bIns="0" anchor="t"/>
-          <a:lstStyle/>
-          <a:p>
-            <a:pPr algn="l"/>
-            <a:r>
-              <a:rPr sz="580" b="0" i="0">
-                <a:solidFill>
-                  <a:srgbClr val="1A1A1A"/>
-                </a:solidFill>
-                <a:latin typeface="Courier New"/>
-              </a:rPr>
-              <a:t>send_case_report</a:t>
-            </a:r>
-          </a:p>
-        </p:txBody>
-      </p:sp>
-      <p:sp>
-        <p:nvSpPr>
-          <p:cNvPr id="186" name="TextBox 185"/>
-          <p:cNvSpPr txBox="1"/>
-          <p:nvPr/>
-        </p:nvSpPr>
-        <p:spPr>
-          <a:xfrm>
-            <a:off x="4416552" y="2560320"/>
-            <a:ext cx="1234440" cy="155448"/>
-          </a:xfrm>
-          <a:prstGeom prst="rect">
-            <a:avLst/>
-          </a:prstGeom>
-          <a:noFill/>
-        </p:spPr>
-        <p:txBody>
-          <a:bodyPr wrap="square" lIns="0" tIns="0" rIns="0" bIns="0" anchor="t"/>
-          <a:lstStyle/>
-          <a:p>
-            <a:pPr algn="l"/>
-            <a:r>
-              <a:rPr sz="580" b="0" i="0">
-                <a:solidFill>
-                  <a:srgbClr val="1A1A1A"/>
-                </a:solidFill>
-                <a:latin typeface="Courier New"/>
-              </a:rPr>
-              <a:t>end_call</a:t>
-            </a:r>
-          </a:p>
-        </p:txBody>
-      </p:sp>
-      <p:cxnSp>
-        <p:nvCxnSpPr>
-          <p:cNvPr id="187" name="Connector 186"/>
-          <p:cNvCxnSpPr/>
-          <p:nvPr/>
-        </p:nvCxnSpPr>
-        <p:spPr>
-          <a:xfrm>
-            <a:off x="1508760" y="2148840"/>
-            <a:ext cx="146304" cy="0"/>
-          </a:xfrm>
-          <a:prstGeom prst="line">
-            <a:avLst/>
-          </a:prstGeom>
-          <a:ln w="19050">
-            <a:solidFill>
-              <a:srgbClr val="1A73E8"/>
-            </a:solidFill>
-            <a:tailEnd type="triangle" w="med" len="med"/>
-          </a:ln>
-        </p:spPr>
-        <p:style>
-          <a:lnRef idx="2">
-            <a:schemeClr val="accent1"/>
-          </a:lnRef>
-          <a:fillRef idx="0">
-            <a:schemeClr val="accent1"/>
-          </a:fillRef>
-          <a:effectRef idx="1">
-            <a:schemeClr val="accent1"/>
-          </a:effectRef>
-          <a:fontRef idx="minor">
-            <a:schemeClr val="tx1"/>
-          </a:fontRef>
-        </p:style>
-      </p:cxnSp>
-      <p:cxnSp>
-        <p:nvCxnSpPr>
-          <p:cNvPr id="188" name="Connector 187"/>
-          <p:cNvCxnSpPr/>
-          <p:nvPr/>
-        </p:nvCxnSpPr>
-        <p:spPr>
-          <a:xfrm>
-            <a:off x="2980944" y="2148840"/>
-            <a:ext cx="146304" cy="0"/>
-          </a:xfrm>
-          <a:prstGeom prst="line">
-            <a:avLst/>
-          </a:prstGeom>
-          <a:ln w="19050">
-            <a:solidFill>
-              <a:srgbClr val="1A73E8"/>
-            </a:solidFill>
-            <a:tailEnd type="triangle" w="med" len="med"/>
-          </a:ln>
-        </p:spPr>
-        <p:style>
-          <a:lnRef idx="2">
-            <a:schemeClr val="accent1"/>
-          </a:lnRef>
-          <a:fillRef idx="0">
-            <a:schemeClr val="accent1"/>
-          </a:fillRef>
-          <a:effectRef idx="1">
-            <a:schemeClr val="accent1"/>
-          </a:effectRef>
-          <a:fontRef idx="minor">
-            <a:schemeClr val="tx1"/>
-          </a:fontRef>
-        </p:style>
-      </p:cxnSp>
-      <p:cxnSp>
-        <p:nvCxnSpPr>
-          <p:cNvPr id="189" name="Connector 188"/>
-          <p:cNvCxnSpPr/>
-          <p:nvPr/>
-        </p:nvCxnSpPr>
-        <p:spPr>
-          <a:xfrm>
-            <a:off x="5641848" y="2148840"/>
-            <a:ext cx="146304" cy="0"/>
-          </a:xfrm>
-          <a:prstGeom prst="line">
-            <a:avLst/>
-          </a:prstGeom>
-          <a:ln w="19050">
-            <a:solidFill>
-              <a:srgbClr val="1A73E8"/>
-            </a:solidFill>
-            <a:tailEnd type="triangle" w="med" len="med"/>
-          </a:ln>
-        </p:spPr>
-        <p:style>
-          <a:lnRef idx="2">
-            <a:schemeClr val="accent1"/>
-          </a:lnRef>
-          <a:fillRef idx="0">
-            <a:schemeClr val="accent1"/>
-          </a:fillRef>
-          <a:effectRef idx="1">
-            <a:schemeClr val="accent1"/>
-          </a:effectRef>
-          <a:fontRef idx="minor">
-            <a:schemeClr val="tx1"/>
-          </a:fontRef>
-        </p:style>
-      </p:cxnSp>
-      <p:cxnSp>
-        <p:nvCxnSpPr>
-          <p:cNvPr id="190" name="Connector 189"/>
-          <p:cNvCxnSpPr/>
-          <p:nvPr/>
-        </p:nvCxnSpPr>
-        <p:spPr>
-          <a:xfrm>
-            <a:off x="7159752" y="2148840"/>
-            <a:ext cx="146304" cy="0"/>
-          </a:xfrm>
-          <a:prstGeom prst="line">
-            <a:avLst/>
-          </a:prstGeom>
-          <a:ln w="19050">
-            <a:solidFill>
-              <a:srgbClr val="1A73E8"/>
-            </a:solidFill>
-            <a:tailEnd type="triangle" w="med" len="med"/>
-          </a:ln>
-        </p:spPr>
-        <p:style>
-          <a:lnRef idx="2">
-            <a:schemeClr val="accent1"/>
-          </a:lnRef>
-          <a:fillRef idx="0">
-            <a:schemeClr val="accent1"/>
-          </a:fillRef>
-          <a:effectRef idx="1">
-            <a:schemeClr val="accent1"/>
-          </a:effectRef>
-          <a:fontRef idx="minor">
-            <a:schemeClr val="tx1"/>
-          </a:fontRef>
-        </p:style>
-      </p:cxnSp>
-      <p:cxnSp>
-        <p:nvCxnSpPr>
-          <p:cNvPr id="191" name="Connector 190"/>
-          <p:cNvCxnSpPr/>
-          <p:nvPr/>
-        </p:nvCxnSpPr>
-        <p:spPr>
-          <a:xfrm>
-            <a:off x="6473952" y="2743200"/>
-            <a:ext cx="0" cy="164592"/>
-          </a:xfrm>
-          <a:prstGeom prst="line">
-            <a:avLst/>
-          </a:prstGeom>
-          <a:ln w="15875">
-            <a:solidFill>
-              <a:srgbClr val="E8590C"/>
-            </a:solidFill>
-            <a:tailEnd type="triangle" w="med" len="med"/>
-          </a:ln>
-        </p:spPr>
-        <p:style>
-          <a:lnRef idx="2">
-            <a:schemeClr val="accent1"/>
-          </a:lnRef>
-          <a:fillRef idx="0">
-            <a:schemeClr val="accent1"/>
-          </a:fillRef>
-          <a:effectRef idx="1">
-            <a:schemeClr val="accent1"/>
-          </a:effectRef>
-          <a:fontRef idx="minor">
-            <a:schemeClr val="tx1"/>
-          </a:fontRef>
-        </p:style>
-      </p:cxnSp>
-      <p:cxnSp>
-        <p:nvCxnSpPr>
-          <p:cNvPr id="192" name="Connector 191"/>
-          <p:cNvCxnSpPr/>
-          <p:nvPr/>
-        </p:nvCxnSpPr>
-        <p:spPr>
-          <a:xfrm flipH="1">
-            <a:off x="2318004" y="2907792"/>
-            <a:ext cx="4155948" cy="0"/>
-          </a:xfrm>
-          <a:prstGeom prst="line">
-            <a:avLst/>
-          </a:prstGeom>
-          <a:ln w="15875">
-            <a:solidFill>
-              <a:srgbClr val="E8590C"/>
-            </a:solidFill>
-            <a:tailEnd type="triangle" w="med" len="med"/>
-          </a:ln>
-        </p:spPr>
-        <p:style>
-          <a:lnRef idx="2">
-            <a:schemeClr val="accent1"/>
-          </a:lnRef>
-          <a:fillRef idx="0">
-            <a:schemeClr val="accent1"/>
-          </a:fillRef>
-          <a:effectRef idx="1">
-            <a:schemeClr val="accent1"/>
-          </a:effectRef>
-          <a:fontRef idx="minor">
-            <a:schemeClr val="tx1"/>
-          </a:fontRef>
-        </p:style>
-      </p:cxnSp>
-      <p:cxnSp>
-        <p:nvCxnSpPr>
-          <p:cNvPr id="193" name="Connector 192"/>
-          <p:cNvCxnSpPr/>
-          <p:nvPr/>
-        </p:nvCxnSpPr>
-        <p:spPr>
-          <a:xfrm flipV="1">
-            <a:off x="2318004" y="2743200"/>
-            <a:ext cx="0" cy="164592"/>
-          </a:xfrm>
-          <a:prstGeom prst="line">
-            <a:avLst/>
-          </a:prstGeom>
-          <a:ln w="15875">
-            <a:solidFill>
-              <a:srgbClr val="E8590C"/>
-            </a:solidFill>
-            <a:tailEnd type="triangle" w="med" len="med"/>
-          </a:ln>
-        </p:spPr>
-        <p:style>
-          <a:lnRef idx="2">
-            <a:schemeClr val="accent1"/>
-          </a:lnRef>
-          <a:fillRef idx="0">
-            <a:schemeClr val="accent1"/>
-          </a:fillRef>
-          <a:effectRef idx="1">
-            <a:schemeClr val="accent1"/>
-          </a:effectRef>
-          <a:fontRef idx="minor">
-            <a:schemeClr val="tx1"/>
-          </a:fontRef>
-        </p:style>
-      </p:cxnSp>
-      <p:sp>
-        <p:nvSpPr>
-          <p:cNvPr id="194" name="TextBox 193"/>
-          <p:cNvSpPr txBox="1"/>
-          <p:nvPr/>
-        </p:nvSpPr>
-        <p:spPr>
-          <a:xfrm>
-            <a:off x="2514600" y="2926080"/>
-            <a:ext cx="3566160" cy="182880"/>
-          </a:xfrm>
-          <a:prstGeom prst="rect">
-            <a:avLst/>
-          </a:prstGeom>
-          <a:noFill/>
-        </p:spPr>
-        <p:txBody>
-          <a:bodyPr wrap="square" lIns="0" tIns="0" rIns="0" bIns="0" anchor="t"/>
-          <a:lstStyle/>
-          <a:p>
-            <a:pPr algn="ctr"/>
-            <a:r>
-              <a:rPr sz="700" b="0" i="0">
-                <a:solidFill>
-                  <a:srgbClr val="E8590C"/>
-                </a:solidFill>
-                <a:latin typeface="Arial"/>
-              </a:rPr>
-              <a:t>tool responses feed known facts, route turns and responder messages back to Mia</a:t>
-            </a:r>
-          </a:p>
-        </p:txBody>
-      </p:sp>
-      <p:sp>
-        <p:nvSpPr>
-          <p:cNvPr id="195" name="TextBox 194"/>
-          <p:cNvSpPr txBox="1"/>
-          <p:nvPr/>
-        </p:nvSpPr>
-        <p:spPr>
-          <a:xfrm>
-            <a:off x="365760" y="3154680"/>
-            <a:ext cx="3657600" cy="182880"/>
-          </a:xfrm>
-          <a:prstGeom prst="rect">
-            <a:avLst/>
-          </a:prstGeom>
-          <a:noFill/>
-        </p:spPr>
-        <p:txBody>
-          <a:bodyPr wrap="square" lIns="0" tIns="0" rIns="0" bIns="0" anchor="t"/>
-          <a:lstStyle/>
-          <a:p>
-            <a:pPr algn="l"/>
-            <a:r>
-              <a:rPr sz="800" b="1" i="0">
-                <a:solidFill>
-                  <a:srgbClr val="1A73E8"/>
-                </a:solidFill>
-                <a:latin typeface="Arial"/>
-              </a:rPr>
-              <a:t>AFTER THE CALL</a:t>
-            </a:r>
-          </a:p>
-        </p:txBody>
-      </p:sp>
-      <p:sp>
-        <p:nvSpPr>
-          <p:cNvPr id="196" name="Rounded Rectangle 195"/>
-          <p:cNvSpPr/>
-          <p:nvPr/>
-        </p:nvSpPr>
-        <p:spPr>
-          <a:xfrm>
-            <a:off x="365760" y="3364992"/>
-            <a:ext cx="2697480" cy="502920"/>
-          </a:xfrm>
-          <a:prstGeom prst="roundRect">
-            <a:avLst>
-              <a:gd name="adj" fmla="val 8000"/>
-            </a:avLst>
-          </a:prstGeom>
-          <a:solidFill>
-            <a:srgbClr val="F4F5F7"/>
-          </a:solidFill>
           <a:ln>
             <a:noFill/>
           </a:ln>
-          <a:effectLst/>
-        </p:spPr>
-        <p:style>
-          <a:lnRef idx="1">
-            <a:schemeClr val="accent1"/>
-          </a:lnRef>
-          <a:fillRef idx="3">
-            <a:schemeClr val="accent1"/>
-          </a:fillRef>
-          <a:effectRef idx="2">
-            <a:schemeClr val="accent1"/>
-          </a:effectRef>
-          <a:fontRef idx="minor">
-            <a:schemeClr val="lt1"/>
-          </a:fontRef>
-        </p:style>
-        <p:txBody>
-          <a:bodyPr wrap="square" lIns="73152" tIns="73152" rIns="73152" bIns="73152" rtlCol="0" anchor="ctr"/>
-          <a:lstStyle/>
-          <a:p>
-            <a:pPr algn="l"/>
-            <a:r>
-              <a:rPr sz="850" b="1" i="0">
+        </p:spPr>
+        <p:txBody>
+          <a:bodyPr wrap="square" lIns="0" tIns="0" rIns="0" bIns="0" rtlCol="0" anchor="t">
+            <a:noAutofit/>
+          </a:bodyPr>
+          <a:lstStyle/>
+          <a:p>
+            <a:pPr marL="0" indent="0" algn="l">
+              <a:lnSpc>
+                <a:spcPct val="100000"/>
+              </a:lnSpc>
+              <a:spcBef>
+                <a:spcPts val="0"/>
+              </a:spcBef>
+              <a:spcAft>
+                <a:spcPts val="0"/>
+              </a:spcAft>
+              <a:buNone/>
+            </a:pPr>
+            <a:r>
+              <a:rPr lang="en-US" sz="800" b="1" i="0" dirty="0" spc="60">
                 <a:solidFill>
                   <a:srgbClr val="1A73E8"/>
                 </a:solidFill>
                 <a:latin typeface="Arial"/>
-              </a:rPr>
-              <a:t>3.5 Flash-Lite  </a:t>
-            </a:r>
-            <a:r>
-              <a:rPr sz="750" b="0" i="0">
-                <a:solidFill>
-                  <a:srgbClr val="1A1A1A"/>
-                </a:solidFill>
-                <a:latin typeface="Arial"/>
-              </a:rPr>
-              <a:t>case summary, field confidence, dispatch bulletin, third-party redaction</a:t>
-            </a:r>
-          </a:p>
-        </p:txBody>
-      </p:sp>
-      <p:cxnSp>
-        <p:nvCxnSpPr>
-          <p:cNvPr id="197" name="Connector 196"/>
-          <p:cNvCxnSpPr/>
-          <p:nvPr/>
-        </p:nvCxnSpPr>
-        <p:spPr>
-          <a:xfrm>
-            <a:off x="3063240" y="3616452"/>
-            <a:ext cx="137160" cy="0"/>
-          </a:xfrm>
-          <a:prstGeom prst="line">
-            <a:avLst/>
-          </a:prstGeom>
-          <a:ln w="15875">
-            <a:solidFill>
-              <a:srgbClr val="1A73E8"/>
-            </a:solidFill>
-            <a:tailEnd type="triangle" w="med" len="med"/>
-          </a:ln>
-        </p:spPr>
-        <p:style>
-          <a:lnRef idx="2">
-            <a:schemeClr val="accent1"/>
-          </a:lnRef>
-          <a:fillRef idx="0">
-            <a:schemeClr val="accent1"/>
-          </a:fillRef>
-          <a:effectRef idx="1">
-            <a:schemeClr val="accent1"/>
-          </a:effectRef>
-          <a:fontRef idx="minor">
-            <a:schemeClr val="tx1"/>
-          </a:fontRef>
-        </p:style>
-      </p:cxnSp>
-      <p:sp>
-        <p:nvSpPr>
-          <p:cNvPr id="198" name="Rounded Rectangle 197"/>
+                <a:cs typeface="Arial"/>
+              </a:rPr>
+              <a:t>WHAT MAKES IT HOLD UP ON A REAL CALL</a:t>
+            </a:r>
+          </a:p>
+        </p:txBody>
+      </p:sp>
+      <p:sp>
+        <p:nvSpPr>
+          <p:cNvPr id="317" name="Reliability: One reply per batch"/>
           <p:cNvSpPr/>
           <p:nvPr/>
         </p:nvSpPr>
         <p:spPr>
           <a:xfrm>
-            <a:off x="3200400" y="3364992"/>
-            <a:ext cx="2697480" cy="502920"/>
+            <a:off x="4617720" y="3154680"/>
+            <a:ext cx="4160520" cy="320040"/>
           </a:xfrm>
           <a:prstGeom prst="roundRect">
             <a:avLst>
-              <a:gd name="adj" fmla="val 8000"/>
-            </a:avLst>
-          </a:prstGeom>
-          <a:solidFill>
-            <a:srgbClr val="F4F5F7"/>
-          </a:solidFill>
-          <a:ln>
-            <a:noFill/>
-          </a:ln>
-          <a:effectLst/>
-        </p:spPr>
-        <p:style>
-          <a:lnRef idx="1">
-            <a:schemeClr val="accent1"/>
-          </a:lnRef>
-          <a:fillRef idx="3">
-            <a:schemeClr val="accent1"/>
-          </a:fillRef>
-          <a:effectRef idx="2">
-            <a:schemeClr val="accent1"/>
-          </a:effectRef>
-          <a:fontRef idx="minor">
-            <a:schemeClr val="lt1"/>
-          </a:fontRef>
-        </p:style>
-        <p:txBody>
-          <a:bodyPr wrap="square" lIns="73152" tIns="73152" rIns="73152" bIns="73152" rtlCol="0" anchor="ctr"/>
-          <a:lstStyle/>
-          <a:p>
-            <a:pPr algn="l"/>
-            <a:r>
-              <a:rPr sz="850" b="1" i="0">
-                <a:solidFill>
-                  <a:srgbClr val="1A73E8"/>
-                </a:solidFill>
-                <a:latin typeface="Arial"/>
-              </a:rPr>
-              <a:t>3.1 Flash-Lite  </a:t>
-            </a:r>
-            <a:r>
-              <a:rPr sz="750" b="0" i="0">
-                <a:solidFill>
-                  <a:srgbClr val="1A1A1A"/>
-                </a:solidFill>
-                <a:latin typeface="Arial"/>
-              </a:rPr>
-              <a:t>links the case to recent ones: same person, place or vehicle</a:t>
-            </a:r>
-          </a:p>
-        </p:txBody>
-      </p:sp>
-      <p:cxnSp>
-        <p:nvCxnSpPr>
-          <p:cNvPr id="199" name="Connector 198"/>
-          <p:cNvCxnSpPr/>
-          <p:nvPr/>
-        </p:nvCxnSpPr>
-        <p:spPr>
-          <a:xfrm>
-            <a:off x="5897880" y="3616452"/>
-            <a:ext cx="137160" cy="0"/>
-          </a:xfrm>
-          <a:prstGeom prst="line">
-            <a:avLst/>
-          </a:prstGeom>
-          <a:ln w="15875">
-            <a:solidFill>
-              <a:srgbClr val="1A73E8"/>
-            </a:solidFill>
-            <a:tailEnd type="triangle" w="med" len="med"/>
-          </a:ln>
-        </p:spPr>
-        <p:style>
-          <a:lnRef idx="2">
-            <a:schemeClr val="accent1"/>
-          </a:lnRef>
-          <a:fillRef idx="0">
-            <a:schemeClr val="accent1"/>
-          </a:fillRef>
-          <a:effectRef idx="1">
-            <a:schemeClr val="accent1"/>
-          </a:effectRef>
-          <a:fontRef idx="minor">
-            <a:schemeClr val="tx1"/>
-          </a:fontRef>
-        </p:style>
-      </p:cxnSp>
-      <p:sp>
-        <p:nvSpPr>
-          <p:cNvPr id="200" name="Rounded Rectangle 199"/>
-          <p:cNvSpPr/>
-          <p:nvPr/>
-        </p:nvSpPr>
-        <p:spPr>
-          <a:xfrm>
-            <a:off x="6035040" y="3364992"/>
-            <a:ext cx="2697480" cy="502920"/>
-          </a:xfrm>
-          <a:prstGeom prst="roundRect">
-            <a:avLst>
-              <a:gd name="adj" fmla="val 8000"/>
-            </a:avLst>
-          </a:prstGeom>
-          <a:solidFill>
-            <a:srgbClr val="F4F5F7"/>
-          </a:solidFill>
-          <a:ln>
-            <a:noFill/>
-          </a:ln>
-          <a:effectLst/>
-        </p:spPr>
-        <p:style>
-          <a:lnRef idx="1">
-            <a:schemeClr val="accent1"/>
-          </a:lnRef>
-          <a:fillRef idx="3">
-            <a:schemeClr val="accent1"/>
-          </a:fillRef>
-          <a:effectRef idx="2">
-            <a:schemeClr val="accent1"/>
-          </a:effectRef>
-          <a:fontRef idx="minor">
-            <a:schemeClr val="lt1"/>
-          </a:fontRef>
-        </p:style>
-        <p:txBody>
-          <a:bodyPr wrap="square" lIns="73152" tIns="73152" rIns="73152" bIns="73152" rtlCol="0" anchor="ctr"/>
-          <a:lstStyle/>
-          <a:p>
-            <a:pPr algn="l"/>
-            <a:r>
-              <a:rPr sz="850" b="1" i="0">
-                <a:solidFill>
-                  <a:srgbClr val="1A73E8"/>
-                </a:solidFill>
-                <a:latin typeface="Arial"/>
-              </a:rPr>
-              <a:t>Apps Script  </a:t>
-            </a:r>
-            <a:r>
-              <a:rPr sz="750" b="0" i="0">
-                <a:solidFill>
-                  <a:srgbClr val="1A1A1A"/>
-                </a:solidFill>
-                <a:latin typeface="Arial"/>
-              </a:rPr>
-              <a:t>case-report email with PDF, scene sketch and map</a:t>
-            </a:r>
-          </a:p>
-        </p:txBody>
-      </p:sp>
-      <p:sp>
-        <p:nvSpPr>
-          <p:cNvPr id="201" name="Rounded Rectangle 200"/>
-          <p:cNvSpPr/>
-          <p:nvPr/>
-        </p:nvSpPr>
-        <p:spPr>
-          <a:xfrm>
-            <a:off x="365760" y="3977639"/>
-            <a:ext cx="2697480" cy="384048"/>
-          </a:xfrm>
-          <a:prstGeom prst="roundRect">
-            <a:avLst>
-              <a:gd name="adj" fmla="val 8000"/>
+              <a:gd name="adj" fmla="val 17143"/>
             </a:avLst>
           </a:prstGeom>
           <a:solidFill>
@@ -27157,63 +28139,64 @@
             <a:solidFill>
               <a:srgbClr val="DADCE0"/>
             </a:solidFill>
+            <a:round/>
           </a:ln>
-          <a:effectLst/>
-        </p:spPr>
-        <p:style>
-          <a:lnRef idx="1">
-            <a:schemeClr val="accent1"/>
-          </a:lnRef>
-          <a:fillRef idx="3">
-            <a:schemeClr val="accent1"/>
-          </a:fillRef>
-          <a:effectRef idx="2">
-            <a:schemeClr val="accent1"/>
-          </a:effectRef>
-          <a:fontRef idx="minor">
-            <a:schemeClr val="lt1"/>
-          </a:fontRef>
-        </p:style>
-        <p:txBody>
-          <a:bodyPr wrap="square" lIns="64008" tIns="64008" rIns="64008" bIns="64008" rtlCol="0" anchor="ctr"/>
-          <a:lstStyle/>
-          <a:p>
-            <a:pPr algn="l"/>
-            <a:r>
-              <a:rPr sz="750" b="1" i="0">
+        </p:spPr>
+        <p:txBody>
+          <a:bodyPr wrap="square" lIns="73152" tIns="36576" rIns="73152" bIns="36576" rtlCol="0" anchor="ctr">
+            <a:noAutofit/>
+          </a:bodyPr>
+          <a:lstStyle/>
+          <a:p>
+            <a:pPr marL="0" indent="0" algn="l">
+              <a:lnSpc>
+                <a:spcPct val="100000"/>
+              </a:lnSpc>
+              <a:spcBef>
+                <a:spcPts val="0"/>
+              </a:spcBef>
+              <a:spcAft>
+                <a:spcPts val="0"/>
+              </a:spcAft>
+              <a:buNone/>
+            </a:pPr>
+            <a:r>
+              <a:rPr lang="en-US" sz="750" b="1" i="0" dirty="0">
                 <a:solidFill>
                   <a:srgbClr val="1A1A1A"/>
                 </a:solidFill>
                 <a:latin typeface="Arial"/>
-              </a:rPr>
-              <a:t>One reply per tool batch: </a:t>
-            </a:r>
-            <a:r>
-              <a:rPr sz="700" b="0" i="0">
+                <a:cs typeface="Arial"/>
+              </a:rPr>
+              <a:t>One reply per batch: </a:t>
+            </a:r>
+            <a:r>
+              <a:rPr lang="en-US" sz="700" b="0" i="0" dirty="0">
                 <a:solidFill>
                   <a:srgbClr val="5F6368"/>
                 </a:solidFill>
                 <a:latin typeface="Arial"/>
-              </a:rPr>
-              <a:t>record-only tools answer SILENT; one WHEN_IDLE starts Mia’s next line</a:t>
-            </a:r>
-          </a:p>
-        </p:txBody>
-      </p:sp>
-      <p:sp>
-        <p:nvSpPr>
-          <p:cNvPr id="202" name="Rounded Rectangle 201"/>
+                <a:cs typeface="Arial"/>
+              </a:rPr>
+              <a:t>report tools answer silently, so Mia never talks over herself</a:t>
+            </a:r>
+          </a:p>
+        </p:txBody>
+      </p:sp>
+      <p:sp>
+        <p:nvSpPr>
+          <p:cNvPr id="318" name="Reliability: Never goes quiet"/>
           <p:cNvSpPr/>
           <p:nvPr/>
         </p:nvSpPr>
         <p:spPr>
           <a:xfrm>
-            <a:off x="3200400" y="3977639"/>
-            <a:ext cx="2697480" cy="384048"/>
+            <a:off x="4617720" y="3511296"/>
+            <a:ext cx="4160520" cy="320040"/>
           </a:xfrm>
           <a:prstGeom prst="roundRect">
             <a:avLst>
-              <a:gd name="adj" fmla="val 8000"/>
+              <a:gd name="adj" fmla="val 17143"/>
             </a:avLst>
           </a:prstGeom>
           <a:solidFill>
@@ -27223,63 +28206,64 @@
             <a:solidFill>
               <a:srgbClr val="DADCE0"/>
             </a:solidFill>
+            <a:round/>
           </a:ln>
-          <a:effectLst/>
-        </p:spPr>
-        <p:style>
-          <a:lnRef idx="1">
-            <a:schemeClr val="accent1"/>
-          </a:lnRef>
-          <a:fillRef idx="3">
-            <a:schemeClr val="accent1"/>
-          </a:fillRef>
-          <a:effectRef idx="2">
-            <a:schemeClr val="accent1"/>
-          </a:effectRef>
-          <a:fontRef idx="minor">
-            <a:schemeClr val="lt1"/>
-          </a:fontRef>
-        </p:style>
-        <p:txBody>
-          <a:bodyPr wrap="square" lIns="64008" tIns="64008" rIns="64008" bIns="64008" rtlCol="0" anchor="ctr"/>
-          <a:lstStyle/>
-          <a:p>
-            <a:pPr algn="l"/>
-            <a:r>
-              <a:rPr sz="750" b="1" i="0">
+        </p:spPr>
+        <p:txBody>
+          <a:bodyPr wrap="square" lIns="73152" tIns="36576" rIns="73152" bIns="36576" rtlCol="0" anchor="ctr">
+            <a:noAutofit/>
+          </a:bodyPr>
+          <a:lstStyle/>
+          <a:p>
+            <a:pPr marL="0" indent="0" algn="l">
+              <a:lnSpc>
+                <a:spcPct val="100000"/>
+              </a:lnSpc>
+              <a:spcBef>
+                <a:spcPts val="0"/>
+              </a:spcBef>
+              <a:spcAft>
+                <a:spcPts val="0"/>
+              </a:spcAft>
+              <a:buNone/>
+            </a:pPr>
+            <a:r>
+              <a:rPr lang="en-US" sz="750" b="1" i="0" dirty="0">
                 <a:solidFill>
                   <a:srgbClr val="1A1A1A"/>
                 </a:solidFill>
                 <a:latin typeface="Arial"/>
-              </a:rPr>
-              <a:t>Long, stable sessions: </a:t>
-            </a:r>
-            <a:r>
-              <a:rPr sz="700" b="0" i="0">
+                <a:cs typeface="Arial"/>
+              </a:rPr>
+              <a:t>Never goes quiet: </a:t>
+            </a:r>
+            <a:r>
+              <a:rPr lang="en-US" sz="700" b="0" i="0" dirty="0">
                 <a:solidFill>
                   <a:srgbClr val="5F6368"/>
                 </a:solidFill>
                 <a:latin typeface="Arial"/>
-              </a:rPr>
-              <a:t>session resumption, context compression, capped reconnects</a:t>
-            </a:r>
-          </a:p>
-        </p:txBody>
-      </p:sp>
-      <p:sp>
-        <p:nvSpPr>
-          <p:cNvPr id="203" name="Rounded Rectangle 202"/>
+                <a:cs typeface="Arial"/>
+              </a:rPr>
+              <a:t>20 s silence and 8 s reply watchdogs; a 6 s route budget with a holding line</a:t>
+            </a:r>
+          </a:p>
+        </p:txBody>
+      </p:sp>
+      <p:sp>
+        <p:nvSpPr>
+          <p:cNvPr id="319" name="Reliability: Long calls survive"/>
           <p:cNvSpPr/>
           <p:nvPr/>
         </p:nvSpPr>
         <p:spPr>
           <a:xfrm>
-            <a:off x="6035040" y="3977639"/>
-            <a:ext cx="2697480" cy="384048"/>
+            <a:off x="4617720" y="3867912"/>
+            <a:ext cx="4160520" cy="320040"/>
           </a:xfrm>
           <a:prstGeom prst="roundRect">
             <a:avLst>
-              <a:gd name="adj" fmla="val 8000"/>
+              <a:gd name="adj" fmla="val 17143"/>
             </a:avLst>
           </a:prstGeom>
           <a:solidFill>
@@ -27289,63 +28273,64 @@
             <a:solidFill>
               <a:srgbClr val="DADCE0"/>
             </a:solidFill>
+            <a:round/>
           </a:ln>
-          <a:effectLst/>
-        </p:spPr>
-        <p:style>
-          <a:lnRef idx="1">
-            <a:schemeClr val="accent1"/>
-          </a:lnRef>
-          <a:fillRef idx="3">
-            <a:schemeClr val="accent1"/>
-          </a:fillRef>
-          <a:effectRef idx="2">
-            <a:schemeClr val="accent1"/>
-          </a:effectRef>
-          <a:fontRef idx="minor">
-            <a:schemeClr val="lt1"/>
-          </a:fontRef>
-        </p:style>
-        <p:txBody>
-          <a:bodyPr wrap="square" lIns="64008" tIns="64008" rIns="64008" bIns="64008" rtlCol="0" anchor="ctr"/>
-          <a:lstStyle/>
-          <a:p>
-            <a:pPr algn="l"/>
-            <a:r>
-              <a:rPr sz="750" b="1" i="0">
+        </p:spPr>
+        <p:txBody>
+          <a:bodyPr wrap="square" lIns="73152" tIns="36576" rIns="73152" bIns="36576" rtlCol="0" anchor="ctr">
+            <a:noAutofit/>
+          </a:bodyPr>
+          <a:lstStyle/>
+          <a:p>
+            <a:pPr marL="0" indent="0" algn="l">
+              <a:lnSpc>
+                <a:spcPct val="100000"/>
+              </a:lnSpc>
+              <a:spcBef>
+                <a:spcPts val="0"/>
+              </a:spcBef>
+              <a:spcAft>
+                <a:spcPts val="0"/>
+              </a:spcAft>
+              <a:buNone/>
+            </a:pPr>
+            <a:r>
+              <a:rPr lang="en-US" sz="750" b="1" i="0" dirty="0">
                 <a:solidFill>
                   <a:srgbClr val="1A1A1A"/>
                 </a:solidFill>
                 <a:latin typeface="Arial"/>
-              </a:rPr>
-              <a:t>Never goes quiet: </a:t>
-            </a:r>
-            <a:r>
-              <a:rPr sz="700" b="0" i="0">
+                <a:cs typeface="Arial"/>
+              </a:rPr>
+              <a:t>Long calls survive: </a:t>
+            </a:r>
+            <a:r>
+              <a:rPr lang="en-US" sz="700" b="0" i="0" dirty="0">
                 <a:solidFill>
                   <a:srgbClr val="5F6368"/>
                 </a:solidFill>
                 <a:latin typeface="Arial"/>
-              </a:rPr>
-              <a:t>silence and reply watchdogs; 6 s route budget with a holding line</a:t>
-            </a:r>
-          </a:p>
-        </p:txBody>
-      </p:sp>
-      <p:sp>
-        <p:nvSpPr>
-          <p:cNvPr id="204" name="Rounded Rectangle 203"/>
+                <a:cs typeface="Arial"/>
+              </a:rPr>
+              <a:t>session resumption, context compressed 48K → 28K tokens, capped reconnects</a:t>
+            </a:r>
+          </a:p>
+        </p:txBody>
+      </p:sp>
+      <p:sp>
+        <p:nvSpPr>
+          <p:cNvPr id="320" name="Reliability: After the call"/>
           <p:cNvSpPr/>
           <p:nvPr/>
         </p:nvSpPr>
         <p:spPr>
           <a:xfrm>
-            <a:off x="365760" y="4416552"/>
-            <a:ext cx="2697480" cy="384048"/>
+            <a:off x="4617720" y="4224528"/>
+            <a:ext cx="4160520" cy="320040"/>
           </a:xfrm>
           <a:prstGeom prst="roundRect">
             <a:avLst>
-              <a:gd name="adj" fmla="val 8000"/>
+              <a:gd name="adj" fmla="val 17143"/>
             </a:avLst>
           </a:prstGeom>
           <a:solidFill>
@@ -27355,177 +28340,96 @@
             <a:solidFill>
               <a:srgbClr val="DADCE0"/>
             </a:solidFill>
+            <a:round/>
           </a:ln>
-          <a:effectLst/>
-        </p:spPr>
-        <p:style>
-          <a:lnRef idx="1">
-            <a:schemeClr val="accent1"/>
-          </a:lnRef>
-          <a:fillRef idx="3">
-            <a:schemeClr val="accent1"/>
-          </a:fillRef>
-          <a:effectRef idx="2">
-            <a:schemeClr val="accent1"/>
-          </a:effectRef>
-          <a:fontRef idx="minor">
-            <a:schemeClr val="lt1"/>
-          </a:fontRef>
-        </p:style>
-        <p:txBody>
-          <a:bodyPr wrap="square" lIns="64008" tIns="64008" rIns="64008" bIns="64008" rtlCol="0" anchor="ctr"/>
-          <a:lstStyle/>
-          <a:p>
-            <a:pPr algn="l"/>
-            <a:r>
-              <a:rPr sz="750" b="1" i="0">
+        </p:spPr>
+        <p:txBody>
+          <a:bodyPr wrap="square" lIns="73152" tIns="36576" rIns="73152" bIns="36576" rtlCol="0" anchor="ctr">
+            <a:noAutofit/>
+          </a:bodyPr>
+          <a:lstStyle/>
+          <a:p>
+            <a:pPr marL="0" indent="0" algn="l">
+              <a:lnSpc>
+                <a:spcPct val="100000"/>
+              </a:lnSpc>
+              <a:spcBef>
+                <a:spcPts val="0"/>
+              </a:spcBef>
+              <a:spcAft>
+                <a:spcPts val="0"/>
+              </a:spcAft>
+              <a:buNone/>
+            </a:pPr>
+            <a:r>
+              <a:rPr lang="en-US" sz="750" b="1" i="0" dirty="0">
                 <a:solidFill>
                   <a:srgbClr val="1A1A1A"/>
                 </a:solidFill>
                 <a:latin typeface="Arial"/>
-              </a:rPr>
-              <a:t>Right-sized models: </a:t>
-            </a:r>
-            <a:r>
-              <a:rPr sz="700" b="0" i="0">
+                <a:cs typeface="Arial"/>
+              </a:rPr>
+              <a:t>After the call: </a:t>
+            </a:r>
+            <a:r>
+              <a:rPr lang="en-US" sz="700" b="0" i="0" dirty="0">
                 <a:solidFill>
                   <a:srgbClr val="5F6368"/>
                 </a:solidFill>
                 <a:latin typeface="Arial"/>
-              </a:rPr>
-              <a:t>smallest model per task; free key first, paid fallback</a:t>
-            </a:r>
-          </a:p>
-        </p:txBody>
-      </p:sp>
-      <p:sp>
-        <p:nvSpPr>
-          <p:cNvPr id="205" name="Rounded Rectangle 204"/>
-          <p:cNvSpPr/>
-          <p:nvPr/>
-        </p:nvSpPr>
-        <p:spPr>
-          <a:xfrm>
-            <a:off x="3200400" y="4416552"/>
-            <a:ext cx="2697480" cy="384048"/>
-          </a:xfrm>
-          <a:prstGeom prst="roundRect">
-            <a:avLst>
-              <a:gd name="adj" fmla="val 8000"/>
-            </a:avLst>
-          </a:prstGeom>
-          <a:solidFill>
-            <a:srgbClr val="FFFFFF"/>
-          </a:solidFill>
-          <a:ln w="9525">
-            <a:solidFill>
-              <a:srgbClr val="DADCE0"/>
-            </a:solidFill>
+                <a:cs typeface="Arial"/>
+              </a:rPr>
+              <a:t>3.5 Flash-Lite writes the summary, bulletin and redactions in one request; 3.1 Flash-Lite links related cases</a:t>
+            </a:r>
+          </a:p>
+        </p:txBody>
+      </p:sp>
+      <p:sp>
+        <p:nvSpPr>
+          <p:cNvPr id="321" name="Footer: models"/>
+          <p:cNvSpPr txBox="1"/>
+          <p:nvPr/>
+        </p:nvSpPr>
+        <p:spPr>
+          <a:xfrm>
+            <a:off x="365760" y="4663440"/>
+            <a:ext cx="8412480" cy="146304"/>
+          </a:xfrm>
+          <a:prstGeom prst="rect">
+            <a:avLst/>
+          </a:prstGeom>
+          <a:noFill/>
+          <a:ln>
+            <a:noFill/>
           </a:ln>
-          <a:effectLst/>
-        </p:spPr>
-        <p:style>
-          <a:lnRef idx="1">
-            <a:schemeClr val="accent1"/>
-          </a:lnRef>
-          <a:fillRef idx="3">
-            <a:schemeClr val="accent1"/>
-          </a:fillRef>
-          <a:effectRef idx="2">
-            <a:schemeClr val="accent1"/>
-          </a:effectRef>
-          <a:fontRef idx="minor">
-            <a:schemeClr val="lt1"/>
-          </a:fontRef>
-        </p:style>
-        <p:txBody>
-          <a:bodyPr wrap="square" lIns="64008" tIns="64008" rIns="64008" bIns="64008" rtlCol="0" anchor="ctr"/>
-          <a:lstStyle/>
-          <a:p>
-            <a:pPr algn="l"/>
-            <a:r>
-              <a:rPr sz="750" b="1" i="0">
-                <a:solidFill>
-                  <a:srgbClr val="1A1A1A"/>
-                </a:solidFill>
-                <a:latin typeface="Arial"/>
-              </a:rPr>
-              <a:t>Metered: </a:t>
-            </a:r>
-            <a:r>
-              <a:rPr sz="700" b="0" i="0">
+        </p:spPr>
+        <p:txBody>
+          <a:bodyPr wrap="square" lIns="0" tIns="0" rIns="0" bIns="0" rtlCol="0" anchor="t">
+            <a:noAutofit/>
+          </a:bodyPr>
+          <a:lstStyle/>
+          <a:p>
+            <a:pPr marL="0" indent="0" algn="ctr">
+              <a:lnSpc>
+                <a:spcPct val="100000"/>
+              </a:lnSpc>
+              <a:spcBef>
+                <a:spcPts val="0"/>
+              </a:spcBef>
+              <a:spcAft>
+                <a:spcPts val="0"/>
+              </a:spcAft>
+              <a:buNone/>
+            </a:pPr>
+            <a:r>
+              <a:rPr lang="en-US" sz="700" b="0" i="0" dirty="0">
                 <a:solidFill>
                   <a:srgbClr val="5F6368"/>
                 </a:solidFill>
                 <a:latin typeface="Arial"/>
-              </a:rPr>
-              <a:t>tokens per task recorded on every incident</a:t>
-            </a:r>
-          </a:p>
-        </p:txBody>
-      </p:sp>
-      <p:sp>
-        <p:nvSpPr>
-          <p:cNvPr id="206" name="Rounded Rectangle 205"/>
-          <p:cNvSpPr/>
-          <p:nvPr/>
-        </p:nvSpPr>
-        <p:spPr>
-          <a:xfrm>
-            <a:off x="6035040" y="4416552"/>
-            <a:ext cx="2697480" cy="384048"/>
-          </a:xfrm>
-          <a:prstGeom prst="roundRect">
-            <a:avLst>
-              <a:gd name="adj" fmla="val 8000"/>
-            </a:avLst>
-          </a:prstGeom>
-          <a:solidFill>
-            <a:srgbClr val="FFFFFF"/>
-          </a:solidFill>
-          <a:ln w="9525">
-            <a:solidFill>
-              <a:srgbClr val="DADCE0"/>
-            </a:solidFill>
-          </a:ln>
-          <a:effectLst/>
-        </p:spPr>
-        <p:style>
-          <a:lnRef idx="1">
-            <a:schemeClr val="accent1"/>
-          </a:lnRef>
-          <a:fillRef idx="3">
-            <a:schemeClr val="accent1"/>
-          </a:fillRef>
-          <a:effectRef idx="2">
-            <a:schemeClr val="accent1"/>
-          </a:effectRef>
-          <a:fontRef idx="minor">
-            <a:schemeClr val="lt1"/>
-          </a:fontRef>
-        </p:style>
-        <p:txBody>
-          <a:bodyPr wrap="square" lIns="64008" tIns="64008" rIns="64008" bIns="64008" rtlCol="0" anchor="ctr"/>
-          <a:lstStyle/>
-          <a:p>
-            <a:pPr algn="l"/>
-            <a:r>
-              <a:rPr sz="750" b="1" i="0">
-                <a:solidFill>
-                  <a:srgbClr val="1A1A1A"/>
-                </a:solidFill>
-                <a:latin typeface="Arial"/>
-              </a:rPr>
-              <a:t>Tested like a product: </a:t>
-            </a:r>
-            <a:r>
-              <a:rPr sz="700" b="0" i="0">
-                <a:solidFill>
-                  <a:srgbClr val="5F6368"/>
-                </a:solidFill>
-                <a:latin typeface="Arial"/>
-              </a:rPr>
-              <a:t>17-scenario eval: real Live calls vs a simulated caller, AI judge</a:t>
+                <a:cs typeface="Arial"/>
+              </a:rPr>
+              <a:t>Models per task: gemini-3.8-live on the call · 3.5 Flash-Lite after it · 3.1 Flash-Lite for vision, linking and console AI · free-tier key first, paid fallback · tokens recorded on every incident</a:t>
             </a:r>
           </a:p>
         </p:txBody>
